--- a/IEP/t2-lesson1-transforming-linear-functions-IEP.pptx
+++ b/IEP/t2-lesson1-transforming-linear-functions-IEP.pptx
@@ -1856,6 +1856,40 @@
           </a:p>
         </p:txBody>
       </p:sp>
+      <p:sp>
+        <p:nvSpPr>
+          <p:cNvPr id="11" name="Slide Number 11"/>
+          <p:cNvSpPr txBox="1"/>
+          <p:nvPr/>
+        </p:nvSpPr>
+        <p:spPr>
+          <a:xfrm>
+            <a:off x="11277295" y="6611112"/>
+            <a:ext cx="685800" cy="201168"/>
+          </a:xfrm>
+          <a:prstGeom prst="rect">
+            <a:avLst/>
+          </a:prstGeom>
+          <a:noFill/>
+        </p:spPr>
+        <p:txBody>
+          <a:bodyPr wrap="none" lIns="0" tIns="0" rIns="0" bIns="0" anchor="b">
+            <a:noAutofit/>
+          </a:bodyPr>
+          <a:lstStyle/>
+          <a:p>
+            <a:pPr algn="r"/>
+            <a:fld id="{5C1A6E0B-3B1F-4D5E-9C7A-2F4B8D6E1A90}" type="slidenum">
+              <a:rPr lang="en-US" sz="1200" dirty="0">
+                <a:solidFill>
+                  <a:srgbClr val="5F6272"/>
+                </a:solidFill>
+              </a:rPr>
+              <a:t>1</a:t>
+            </a:fld>
+          </a:p>
+        </p:txBody>
+      </p:sp>
     </p:spTree>
   </p:cSld>
   <p:clrMapOvr>
@@ -2603,6 +2637,40 @@
               <a:t xml:space="preserve"> − 3</a:t>
             </a:r>
             <a:endParaRPr lang="en-US" sz="2325" dirty="0"/>
+          </a:p>
+        </p:txBody>
+      </p:sp>
+      <p:sp>
+        <p:nvSpPr>
+          <p:cNvPr id="10" name="Slide Number 10"/>
+          <p:cNvSpPr txBox="1"/>
+          <p:nvPr/>
+        </p:nvSpPr>
+        <p:spPr>
+          <a:xfrm>
+            <a:off x="11277295" y="6611112"/>
+            <a:ext cx="685800" cy="201168"/>
+          </a:xfrm>
+          <a:prstGeom prst="rect">
+            <a:avLst/>
+          </a:prstGeom>
+          <a:noFill/>
+        </p:spPr>
+        <p:txBody>
+          <a:bodyPr wrap="none" lIns="0" tIns="0" rIns="0" bIns="0" anchor="b">
+            <a:noAutofit/>
+          </a:bodyPr>
+          <a:lstStyle/>
+          <a:p>
+            <a:pPr algn="r"/>
+            <a:fld id="{5C1A6E0B-3B1F-4D5E-9C7A-2F4B8D6E1A90}" type="slidenum">
+              <a:rPr lang="en-US" sz="1200" dirty="0">
+                <a:solidFill>
+                  <a:srgbClr val="5F6272"/>
+                </a:solidFill>
+              </a:rPr>
+              <a:t>10</a:t>
+            </a:fld>
           </a:p>
         </p:txBody>
       </p:sp>
@@ -3403,6 +3471,40 @@
               <a:t xml:space="preserve"> + 2</a:t>
             </a:r>
             <a:endParaRPr lang="en-US" sz="2325" dirty="0"/>
+          </a:p>
+        </p:txBody>
+      </p:sp>
+      <p:sp>
+        <p:nvSpPr>
+          <p:cNvPr id="10" name="Slide Number 10"/>
+          <p:cNvSpPr txBox="1"/>
+          <p:nvPr/>
+        </p:nvSpPr>
+        <p:spPr>
+          <a:xfrm>
+            <a:off x="11277295" y="6611112"/>
+            <a:ext cx="685800" cy="201168"/>
+          </a:xfrm>
+          <a:prstGeom prst="rect">
+            <a:avLst/>
+          </a:prstGeom>
+          <a:noFill/>
+        </p:spPr>
+        <p:txBody>
+          <a:bodyPr wrap="none" lIns="0" tIns="0" rIns="0" bIns="0" anchor="b">
+            <a:noAutofit/>
+          </a:bodyPr>
+          <a:lstStyle/>
+          <a:p>
+            <a:pPr algn="r"/>
+            <a:fld id="{5C1A6E0B-3B1F-4D5E-9C7A-2F4B8D6E1A90}" type="slidenum">
+              <a:rPr lang="en-US" sz="1200" dirty="0">
+                <a:solidFill>
+                  <a:srgbClr val="5F6272"/>
+                </a:solidFill>
+              </a:rPr>
+              <a:t>11</a:t>
+            </a:fld>
           </a:p>
         </p:txBody>
       </p:sp>
@@ -4277,6 +4379,40 @@
           </a:p>
         </p:txBody>
       </p:sp>
+      <p:sp>
+        <p:nvSpPr>
+          <p:cNvPr id="11" name="Slide Number 11"/>
+          <p:cNvSpPr txBox="1"/>
+          <p:nvPr/>
+        </p:nvSpPr>
+        <p:spPr>
+          <a:xfrm>
+            <a:off x="11277295" y="6611112"/>
+            <a:ext cx="685800" cy="201168"/>
+          </a:xfrm>
+          <a:prstGeom prst="rect">
+            <a:avLst/>
+          </a:prstGeom>
+          <a:noFill/>
+        </p:spPr>
+        <p:txBody>
+          <a:bodyPr wrap="none" lIns="0" tIns="0" rIns="0" bIns="0" anchor="b">
+            <a:noAutofit/>
+          </a:bodyPr>
+          <a:lstStyle/>
+          <a:p>
+            <a:pPr algn="r"/>
+            <a:fld id="{5C1A6E0B-3B1F-4D5E-9C7A-2F4B8D6E1A90}" type="slidenum">
+              <a:rPr lang="en-US" sz="1200" dirty="0">
+                <a:solidFill>
+                  <a:srgbClr val="5F6272"/>
+                </a:solidFill>
+              </a:rPr>
+              <a:t>12</a:t>
+            </a:fld>
+          </a:p>
+        </p:txBody>
+      </p:sp>
     </p:spTree>
   </p:cSld>
   <p:clrMapOvr>
@@ -5274,6 +5410,40 @@
               <a:t xml:space="preserve"> − 2</a:t>
             </a:r>
             <a:endParaRPr lang="en-US" sz="2325" dirty="0"/>
+          </a:p>
+        </p:txBody>
+      </p:sp>
+      <p:sp>
+        <p:nvSpPr>
+          <p:cNvPr id="13" name="Slide Number 13"/>
+          <p:cNvSpPr txBox="1"/>
+          <p:nvPr/>
+        </p:nvSpPr>
+        <p:spPr>
+          <a:xfrm>
+            <a:off x="11277295" y="6611112"/>
+            <a:ext cx="685800" cy="201168"/>
+          </a:xfrm>
+          <a:prstGeom prst="rect">
+            <a:avLst/>
+          </a:prstGeom>
+          <a:noFill/>
+        </p:spPr>
+        <p:txBody>
+          <a:bodyPr wrap="none" lIns="0" tIns="0" rIns="0" bIns="0" anchor="b">
+            <a:noAutofit/>
+          </a:bodyPr>
+          <a:lstStyle/>
+          <a:p>
+            <a:pPr algn="r"/>
+            <a:fld id="{5C1A6E0B-3B1F-4D5E-9C7A-2F4B8D6E1A90}" type="slidenum">
+              <a:rPr lang="en-US" sz="1200" dirty="0">
+                <a:solidFill>
+                  <a:srgbClr val="5F6272"/>
+                </a:solidFill>
+              </a:rPr>
+              <a:t>13</a:t>
+            </a:fld>
           </a:p>
         </p:txBody>
       </p:sp>
@@ -5903,6 +6073,40 @@
           </a:p>
         </p:txBody>
       </p:sp>
+      <p:sp>
+        <p:nvSpPr>
+          <p:cNvPr id="6" name="Slide Number 6"/>
+          <p:cNvSpPr txBox="1"/>
+          <p:nvPr/>
+        </p:nvSpPr>
+        <p:spPr>
+          <a:xfrm>
+            <a:off x="11277295" y="6611112"/>
+            <a:ext cx="685800" cy="201168"/>
+          </a:xfrm>
+          <a:prstGeom prst="rect">
+            <a:avLst/>
+          </a:prstGeom>
+          <a:noFill/>
+        </p:spPr>
+        <p:txBody>
+          <a:bodyPr wrap="none" lIns="0" tIns="0" rIns="0" bIns="0" anchor="b">
+            <a:noAutofit/>
+          </a:bodyPr>
+          <a:lstStyle/>
+          <a:p>
+            <a:pPr algn="r"/>
+            <a:fld id="{5C1A6E0B-3B1F-4D5E-9C7A-2F4B8D6E1A90}" type="slidenum">
+              <a:rPr lang="en-US" sz="1200" dirty="0">
+                <a:solidFill>
+                  <a:srgbClr val="5F6272"/>
+                </a:solidFill>
+              </a:rPr>
+              <a:t>14</a:t>
+            </a:fld>
+          </a:p>
+        </p:txBody>
+      </p:sp>
     </p:spTree>
   </p:cSld>
   <p:clrMapOvr>
@@ -6714,6 +6918,40 @@
               <a:t xml:space="preserve"> − 5</a:t>
             </a:r>
             <a:endParaRPr lang="en-US" sz="2325" dirty="0"/>
+          </a:p>
+        </p:txBody>
+      </p:sp>
+      <p:sp>
+        <p:nvSpPr>
+          <p:cNvPr id="12" name="Slide Number 12"/>
+          <p:cNvSpPr txBox="1"/>
+          <p:nvPr/>
+        </p:nvSpPr>
+        <p:spPr>
+          <a:xfrm>
+            <a:off x="11277295" y="6611112"/>
+            <a:ext cx="685800" cy="201168"/>
+          </a:xfrm>
+          <a:prstGeom prst="rect">
+            <a:avLst/>
+          </a:prstGeom>
+          <a:noFill/>
+        </p:spPr>
+        <p:txBody>
+          <a:bodyPr wrap="none" lIns="0" tIns="0" rIns="0" bIns="0" anchor="b">
+            <a:noAutofit/>
+          </a:bodyPr>
+          <a:lstStyle/>
+          <a:p>
+            <a:pPr algn="r"/>
+            <a:fld id="{5C1A6E0B-3B1F-4D5E-9C7A-2F4B8D6E1A90}" type="slidenum">
+              <a:rPr lang="en-US" sz="1200" dirty="0">
+                <a:solidFill>
+                  <a:srgbClr val="5F6272"/>
+                </a:solidFill>
+              </a:rPr>
+              <a:t>2</a:t>
+            </a:fld>
           </a:p>
         </p:txBody>
       </p:sp>
@@ -8177,6 +8415,40 @@
           </a:p>
         </p:txBody>
       </p:sp>
+      <p:sp>
+        <p:nvSpPr>
+          <p:cNvPr id="12" name="Slide Number 12"/>
+          <p:cNvSpPr txBox="1"/>
+          <p:nvPr/>
+        </p:nvSpPr>
+        <p:spPr>
+          <a:xfrm>
+            <a:off x="11277295" y="6611112"/>
+            <a:ext cx="685800" cy="201168"/>
+          </a:xfrm>
+          <a:prstGeom prst="rect">
+            <a:avLst/>
+          </a:prstGeom>
+          <a:noFill/>
+        </p:spPr>
+        <p:txBody>
+          <a:bodyPr wrap="none" lIns="0" tIns="0" rIns="0" bIns="0" anchor="b">
+            <a:noAutofit/>
+          </a:bodyPr>
+          <a:lstStyle/>
+          <a:p>
+            <a:pPr algn="r"/>
+            <a:fld id="{5C1A6E0B-3B1F-4D5E-9C7A-2F4B8D6E1A90}" type="slidenum">
+              <a:rPr lang="en-US" sz="1200" dirty="0">
+                <a:solidFill>
+                  <a:srgbClr val="5F6272"/>
+                </a:solidFill>
+              </a:rPr>
+              <a:t>3</a:t>
+            </a:fld>
+          </a:p>
+        </p:txBody>
+      </p:sp>
     </p:spTree>
   </p:cSld>
   <p:clrMapOvr>
@@ -9887,6 +10159,40 @@
           </a:p>
         </p:txBody>
       </p:sp>
+      <p:sp>
+        <p:nvSpPr>
+          <p:cNvPr id="12" name="Slide Number 12"/>
+          <p:cNvSpPr txBox="1"/>
+          <p:nvPr/>
+        </p:nvSpPr>
+        <p:spPr>
+          <a:xfrm>
+            <a:off x="11277295" y="6611112"/>
+            <a:ext cx="685800" cy="201168"/>
+          </a:xfrm>
+          <a:prstGeom prst="rect">
+            <a:avLst/>
+          </a:prstGeom>
+          <a:noFill/>
+        </p:spPr>
+        <p:txBody>
+          <a:bodyPr wrap="none" lIns="0" tIns="0" rIns="0" bIns="0" anchor="b">
+            <a:noAutofit/>
+          </a:bodyPr>
+          <a:lstStyle/>
+          <a:p>
+            <a:pPr algn="r"/>
+            <a:fld id="{5C1A6E0B-3B1F-4D5E-9C7A-2F4B8D6E1A90}" type="slidenum">
+              <a:rPr lang="en-US" sz="1200" dirty="0">
+                <a:solidFill>
+                  <a:srgbClr val="5F6272"/>
+                </a:solidFill>
+              </a:rPr>
+              <a:t>4</a:t>
+            </a:fld>
+          </a:p>
+        </p:txBody>
+      </p:sp>
     </p:spTree>
   </p:cSld>
   <p:clrMapOvr>
@@ -11115,6 +11421,40 @@
           </a:p>
         </p:txBody>
       </p:sp>
+      <p:sp>
+        <p:nvSpPr>
+          <p:cNvPr id="16" name="Slide Number 16"/>
+          <p:cNvSpPr txBox="1"/>
+          <p:nvPr/>
+        </p:nvSpPr>
+        <p:spPr>
+          <a:xfrm>
+            <a:off x="11277295" y="6611112"/>
+            <a:ext cx="685800" cy="201168"/>
+          </a:xfrm>
+          <a:prstGeom prst="rect">
+            <a:avLst/>
+          </a:prstGeom>
+          <a:noFill/>
+        </p:spPr>
+        <p:txBody>
+          <a:bodyPr wrap="none" lIns="0" tIns="0" rIns="0" bIns="0" anchor="b">
+            <a:noAutofit/>
+          </a:bodyPr>
+          <a:lstStyle/>
+          <a:p>
+            <a:pPr algn="r"/>
+            <a:fld id="{5C1A6E0B-3B1F-4D5E-9C7A-2F4B8D6E1A90}" type="slidenum">
+              <a:rPr lang="en-US" sz="1200" dirty="0">
+                <a:solidFill>
+                  <a:srgbClr val="5F6272"/>
+                </a:solidFill>
+              </a:rPr>
+              <a:t>5</a:t>
+            </a:fld>
+          </a:p>
+        </p:txBody>
+      </p:sp>
     </p:spTree>
   </p:cSld>
   <p:clrMapOvr>
@@ -11757,6 +12097,40 @@
           </a:p>
         </p:txBody>
       </p:sp>
+      <p:sp>
+        <p:nvSpPr>
+          <p:cNvPr id="8" name="Slide Number 8"/>
+          <p:cNvSpPr txBox="1"/>
+          <p:nvPr/>
+        </p:nvSpPr>
+        <p:spPr>
+          <a:xfrm>
+            <a:off x="11277295" y="6611112"/>
+            <a:ext cx="685800" cy="201168"/>
+          </a:xfrm>
+          <a:prstGeom prst="rect">
+            <a:avLst/>
+          </a:prstGeom>
+          <a:noFill/>
+        </p:spPr>
+        <p:txBody>
+          <a:bodyPr wrap="none" lIns="0" tIns="0" rIns="0" bIns="0" anchor="b">
+            <a:noAutofit/>
+          </a:bodyPr>
+          <a:lstStyle/>
+          <a:p>
+            <a:pPr algn="r"/>
+            <a:fld id="{5C1A6E0B-3B1F-4D5E-9C7A-2F4B8D6E1A90}" type="slidenum">
+              <a:rPr lang="en-US" sz="1200" dirty="0">
+                <a:solidFill>
+                  <a:srgbClr val="5F6272"/>
+                </a:solidFill>
+              </a:rPr>
+              <a:t>6</a:t>
+            </a:fld>
+          </a:p>
+        </p:txBody>
+      </p:sp>
     </p:spTree>
   </p:cSld>
   <p:clrMapOvr>
@@ -13720,6 +14094,40 @@
               <a:t xml:space="preserve">p(x)</a:t>
             </a:r>
             <a:endParaRPr lang="en-US" sz="1275" dirty="0"/>
+          </a:p>
+        </p:txBody>
+      </p:sp>
+      <p:sp>
+        <p:nvSpPr>
+          <p:cNvPr id="58" name="Slide Number 58"/>
+          <p:cNvSpPr txBox="1"/>
+          <p:nvPr/>
+        </p:nvSpPr>
+        <p:spPr>
+          <a:xfrm>
+            <a:off x="11277295" y="6611112"/>
+            <a:ext cx="685800" cy="201168"/>
+          </a:xfrm>
+          <a:prstGeom prst="rect">
+            <a:avLst/>
+          </a:prstGeom>
+          <a:noFill/>
+        </p:spPr>
+        <p:txBody>
+          <a:bodyPr wrap="none" lIns="0" tIns="0" rIns="0" bIns="0" anchor="b">
+            <a:noAutofit/>
+          </a:bodyPr>
+          <a:lstStyle/>
+          <a:p>
+            <a:pPr algn="r"/>
+            <a:fld id="{5C1A6E0B-3B1F-4D5E-9C7A-2F4B8D6E1A90}" type="slidenum">
+              <a:rPr lang="en-US" sz="1200" dirty="0">
+                <a:solidFill>
+                  <a:srgbClr val="5F6272"/>
+                </a:solidFill>
+              </a:rPr>
+              <a:t>7</a:t>
+            </a:fld>
           </a:p>
         </p:txBody>
       </p:sp>
@@ -14649,6 +15057,40 @@
               <a:t xml:space="preserve">slope 2, (0, −5)</a:t>
             </a:r>
             <a:endParaRPr lang="en-US" sz="2325" dirty="0"/>
+          </a:p>
+        </p:txBody>
+      </p:sp>
+      <p:sp>
+        <p:nvSpPr>
+          <p:cNvPr id="10" name="Slide Number 10"/>
+          <p:cNvSpPr txBox="1"/>
+          <p:nvPr/>
+        </p:nvSpPr>
+        <p:spPr>
+          <a:xfrm>
+            <a:off x="11277295" y="6611112"/>
+            <a:ext cx="685800" cy="201168"/>
+          </a:xfrm>
+          <a:prstGeom prst="rect">
+            <a:avLst/>
+          </a:prstGeom>
+          <a:noFill/>
+        </p:spPr>
+        <p:txBody>
+          <a:bodyPr wrap="none" lIns="0" tIns="0" rIns="0" bIns="0" anchor="b">
+            <a:noAutofit/>
+          </a:bodyPr>
+          <a:lstStyle/>
+          <a:p>
+            <a:pPr algn="r"/>
+            <a:fld id="{5C1A6E0B-3B1F-4D5E-9C7A-2F4B8D6E1A90}" type="slidenum">
+              <a:rPr lang="en-US" sz="1200" dirty="0">
+                <a:solidFill>
+                  <a:srgbClr val="5F6272"/>
+                </a:solidFill>
+              </a:rPr>
+              <a:t>8</a:t>
+            </a:fld>
           </a:p>
         </p:txBody>
       </p:sp>
@@ -17135,6 +17577,40 @@
               <a:t xml:space="preserve">−4x</a:t>
             </a:r>
             <a:endParaRPr lang="en-US" sz="1275" dirty="0"/>
+          </a:p>
+        </p:txBody>
+      </p:sp>
+      <p:sp>
+        <p:nvSpPr>
+          <p:cNvPr id="62" name="Slide Number 62"/>
+          <p:cNvSpPr txBox="1"/>
+          <p:nvPr/>
+        </p:nvSpPr>
+        <p:spPr>
+          <a:xfrm>
+            <a:off x="11277295" y="6611112"/>
+            <a:ext cx="685800" cy="201168"/>
+          </a:xfrm>
+          <a:prstGeom prst="rect">
+            <a:avLst/>
+          </a:prstGeom>
+          <a:noFill/>
+        </p:spPr>
+        <p:txBody>
+          <a:bodyPr wrap="none" lIns="0" tIns="0" rIns="0" bIns="0" anchor="b">
+            <a:noAutofit/>
+          </a:bodyPr>
+          <a:lstStyle/>
+          <a:p>
+            <a:pPr algn="r"/>
+            <a:fld id="{5C1A6E0B-3B1F-4D5E-9C7A-2F4B8D6E1A90}" type="slidenum">
+              <a:rPr lang="en-US" sz="1200" dirty="0">
+                <a:solidFill>
+                  <a:srgbClr val="5F6272"/>
+                </a:solidFill>
+              </a:rPr>
+              <a:t>9</a:t>
+            </a:fld>
           </a:p>
         </p:txBody>
       </p:sp>

--- a/IEP/t2-lesson1-transforming-linear-functions-IEP.pptx
+++ b/IEP/t2-lesson1-transforming-linear-functions-IEP.pptx
@@ -22,6 +22,8 @@
     <p:sldId id="267" r:id="rId22"/>
     <p:sldId id="268" r:id="rId23"/>
     <p:sldId id="269" r:id="rId24"/>
+    <p:sldId id="270" r:id="rId25"/>
+    <p:sldId id="271" r:id="rId26"/>
   </p:sldIdLst>
   <p:sldSz cx="12192000" cy="6858000"/>
   <p:notesSz cx="6858000" cy="9144000"/>
@@ -286,7 +288,7 @@
           <a:p>
             <a:r>
               <a:rPr lang="en-US" dirty="0"/>
-              <a:t>Parallel lines have the same slope; only b changes.</a:t>
+              <a:t>For the teacher or assistant: click once for each step. Read the step aloud, and before each click ask the student what to do next. Students check their own paper and fix any mistake in a different color.</a:t>
             </a:r>
           </a:p>
         </p:txBody>
@@ -343,7 +345,10 @@
           <a:bodyPr/>
           <a:lstStyle/>
           <a:p>
-            <a:endParaRPr lang="en-US"/>
+            <a:r>
+              <a:rPr lang="en-US" dirty="0"/>
+              <a:t>Parallel lines have the same slope; only b changes.</a:t>
+            </a:r>
           </a:p>
         </p:txBody>
       </p:sp>
@@ -399,10 +404,7 @@
           <a:bodyPr/>
           <a:lstStyle/>
           <a:p>
-            <a:r>
-              <a:rPr lang="en-US" dirty="0"/>
-              <a:t>Give students time to try all items before revealing. Students may use the steps slide and their notes.</a:t>
-            </a:r>
+            <a:endParaRPr lang="en-US"/>
           </a:p>
         </p:txBody>
       </p:sp>
@@ -415,6 +417,124 @@
 </file>
 
 <file path=ppt/notesSlides/notesSlide14.xml><?xml version="1.0" encoding="utf-8"?>
+<p:notes xmlns:a="http://schemas.openxmlformats.org/drawingml/2006/main" xmlns:r="http://schemas.openxmlformats.org/officeDocument/2006/relationships" xmlns:p="http://schemas.openxmlformats.org/presentationml/2006/main">
+  <p:cSld>
+    <p:spTree>
+      <p:nvGrpSpPr>
+        <p:cNvPr id="1" name=""/>
+        <p:cNvGrpSpPr/>
+        <p:nvPr/>
+      </p:nvGrpSpPr>
+      <p:grpSpPr>
+        <a:xfrm>
+          <a:off x="0" y="0"/>
+          <a:ext cx="0" cy="0"/>
+          <a:chOff x="0" y="0"/>
+          <a:chExt cx="0" cy="0"/>
+        </a:xfrm>
+      </p:grpSpPr>
+      <p:sp>
+        <p:nvSpPr>
+          <p:cNvPr id="2" name="Slide Image Placeholder 1"/>
+          <p:cNvSpPr>
+            <a:spLocks noGrp="1" noRot="1" noChangeAspect="1"/>
+          </p:cNvSpPr>
+          <p:nvPr>
+            <p:ph type="sldImg"/>
+          </p:nvPr>
+        </p:nvSpPr>
+        <p:spPr/>
+      </p:sp>
+      <p:sp>
+        <p:nvSpPr>
+          <p:cNvPr id="3" name="Notes Placeholder 2"/>
+          <p:cNvSpPr>
+            <a:spLocks noGrp="1"/>
+          </p:cNvSpPr>
+          <p:nvPr>
+            <p:ph type="body" idx="1"/>
+          </p:nvPr>
+        </p:nvSpPr>
+        <p:spPr/>
+        <p:txBody>
+          <a:bodyPr/>
+          <a:lstStyle/>
+          <a:p>
+            <a:r>
+              <a:rPr lang="en-US" dirty="0"/>
+              <a:t>For the teacher or assistant: click once for each step. Read the step aloud, and before each click ask the student what to do next. Students check their own paper and fix any mistake in a different color.</a:t>
+            </a:r>
+          </a:p>
+        </p:txBody>
+      </p:sp>
+    </p:spTree>
+  </p:cSld>
+  <p:clrMapOvr>
+    <a:masterClrMapping/>
+  </p:clrMapOvr>
+</p:notes>
+</file>
+
+<file path=ppt/notesSlides/notesSlide15.xml><?xml version="1.0" encoding="utf-8"?>
+<p:notes xmlns:a="http://schemas.openxmlformats.org/drawingml/2006/main" xmlns:r="http://schemas.openxmlformats.org/officeDocument/2006/relationships" xmlns:p="http://schemas.openxmlformats.org/presentationml/2006/main">
+  <p:cSld>
+    <p:spTree>
+      <p:nvGrpSpPr>
+        <p:cNvPr id="1" name=""/>
+        <p:cNvGrpSpPr/>
+        <p:nvPr/>
+      </p:nvGrpSpPr>
+      <p:grpSpPr>
+        <a:xfrm>
+          <a:off x="0" y="0"/>
+          <a:ext cx="0" cy="0"/>
+          <a:chOff x="0" y="0"/>
+          <a:chExt cx="0" cy="0"/>
+        </a:xfrm>
+      </p:grpSpPr>
+      <p:sp>
+        <p:nvSpPr>
+          <p:cNvPr id="2" name="Slide Image Placeholder 1"/>
+          <p:cNvSpPr>
+            <a:spLocks noGrp="1" noRot="1" noChangeAspect="1"/>
+          </p:cNvSpPr>
+          <p:nvPr>
+            <p:ph type="sldImg"/>
+          </p:nvPr>
+        </p:nvSpPr>
+        <p:spPr/>
+      </p:sp>
+      <p:sp>
+        <p:nvSpPr>
+          <p:cNvPr id="3" name="Notes Placeholder 2"/>
+          <p:cNvSpPr>
+            <a:spLocks noGrp="1"/>
+          </p:cNvSpPr>
+          <p:nvPr>
+            <p:ph type="body" idx="1"/>
+          </p:nvPr>
+        </p:nvSpPr>
+        <p:spPr/>
+        <p:txBody>
+          <a:bodyPr/>
+          <a:lstStyle/>
+          <a:p>
+            <a:r>
+              <a:rPr lang="en-US" dirty="0"/>
+              <a:t>Give students time to try all items before revealing. Students may use the steps slide and their notes.</a:t>
+            </a:r>
+          </a:p>
+        </p:txBody>
+      </p:sp>
+    </p:spTree>
+  </p:cSld>
+  <p:clrMapOvr>
+    <a:masterClrMapping/>
+  </p:clrMapOvr>
+</p:notes>
+</file>
+
+<file path=ppt/notesSlides/notesSlide16.xml><?xml version="1.0" encoding="utf-8"?>
 <p:notes xmlns:a="http://schemas.openxmlformats.org/drawingml/2006/main" xmlns:r="http://schemas.openxmlformats.org/officeDocument/2006/relationships" xmlns:p="http://schemas.openxmlformats.org/presentationml/2006/main">
   <p:cSld>
     <p:spTree>
@@ -2968,7 +3088,7 @@
                 <a:latin typeface="Segoe UI"/>
                 <a:cs typeface="Segoe UI"/>
               </a:rPr>
-              <a:t xml:space="preserve">We do · Parallel line</a:t>
+              <a:t xml:space="preserve">Check it · Step by step</a:t>
             </a:r>
             <a:endParaRPr lang="en-US" sz="1200" dirty="0"/>
           </a:p>
@@ -3012,7 +3132,7 @@
                 <a:latin typeface="Segoe UI"/>
                 <a:cs typeface="Segoe UI"/>
               </a:rPr>
-              <a:t xml:space="preserve">Parallel to </a:t>
+              <a:t xml:space="preserve">Describe the change and write </a:t>
             </a:r>
             <a:r>
               <a:rPr lang="en-US" sz="3450" dirty="0" b="1" i="1">
@@ -3022,7 +3142,7 @@
                 <a:latin typeface="Segoe UI"/>
                 <a:cs typeface="Segoe UI"/>
               </a:rPr>
-              <a:t xml:space="preserve">y</a:t>
+              <a:t xml:space="preserve">g</a:t>
             </a:r>
             <a:r>
               <a:rPr lang="en-US" sz="3450" dirty="0" b="1">
@@ -3032,7 +3152,7 @@
                 <a:latin typeface="Segoe UI"/>
                 <a:cs typeface="Segoe UI"/>
               </a:rPr>
-              <a:t xml:space="preserve"> = −3</a:t>
+              <a:t xml:space="preserve">(</a:t>
             </a:r>
             <a:r>
               <a:rPr lang="en-US" sz="3450" dirty="0" b="1" i="1">
@@ -3052,7 +3172,7 @@
                 <a:latin typeface="Segoe UI"/>
                 <a:cs typeface="Segoe UI"/>
               </a:rPr>
-              <a:t xml:space="preserve"> − 1, through (−1, 5)</a:t>
+              <a:t xml:space="preserve">)</a:t>
             </a:r>
             <a:endParaRPr lang="en-US" sz="3450" dirty="0"/>
           </a:p>
@@ -3060,21 +3180,27 @@
       </p:sp>
       <p:sp>
         <p:nvSpPr>
-          <p:cNvPr id="4" name="Shape 4"/>
+          <p:cNvPr id="9" name="Shape 9"/>
           <p:cNvSpPr txBox="1"/>
           <p:nvPr/>
         </p:nvSpPr>
         <p:spPr>
           <a:xfrm>
             <a:off x="685800" y="1618488"/>
-            <a:ext cx="10820095" cy="352044"/>
-          </a:xfrm>
-          <a:prstGeom prst="rect">
-            <a:avLst/>
-          </a:prstGeom>
-          <a:noFill/>
-          <a:ln>
-            <a:noFill/>
+            <a:ext cx="5295748" cy="4056888"/>
+          </a:xfrm>
+          <a:prstGeom prst="roundRect">
+            <a:avLst>
+              <a:gd name="adj" fmla="val 8000"/>
+            </a:avLst>
+          </a:prstGeom>
+          <a:solidFill>
+            <a:srgbClr val="FFFFFF"/>
+          </a:solidFill>
+          <a:ln w="12700">
+            <a:solidFill>
+              <a:srgbClr val="E3E4EC"/>
+            </a:solidFill>
           </a:ln>
         </p:spPr>
         <p:txBody>
@@ -3088,50 +3214,586 @@
                 <a:spcPct val="100000"/>
               </a:lnSpc>
             </a:pPr>
-            <a:r>
-              <a:rPr lang="en-US" sz="1950" dirty="0">
-                <a:solidFill>
-                  <a:srgbClr val="16171D"/>
-                </a:solidFill>
-                <a:latin typeface="Segoe UI"/>
-                <a:cs typeface="Segoe UI"/>
-              </a:rPr>
-              <a:t xml:space="preserve">Step 1: same slope. </a:t>
-            </a:r>
-            <a:r>
-              <a:rPr lang="en-US" sz="1950" dirty="0" i="1">
-                <a:solidFill>
-                  <a:srgbClr val="16171D"/>
-                </a:solidFill>
-                <a:latin typeface="Segoe UI"/>
-                <a:cs typeface="Segoe UI"/>
-              </a:rPr>
-              <a:t xml:space="preserve">m</a:t>
-            </a:r>
-            <a:r>
-              <a:rPr lang="en-US" sz="1950" dirty="0">
-                <a:solidFill>
-                  <a:srgbClr val="16171D"/>
-                </a:solidFill>
-                <a:latin typeface="Segoe UI"/>
-                <a:cs typeface="Segoe UI"/>
-              </a:rPr>
-              <a:t xml:space="preserve"> = ____</a:t>
-            </a:r>
             <a:endParaRPr lang="en-US" sz="1950" dirty="0"/>
           </a:p>
         </p:txBody>
       </p:sp>
       <p:sp>
         <p:nvSpPr>
+          <p:cNvPr id="4" name="Shape 4"/>
+          <p:cNvSpPr txBox="1"/>
+          <p:nvPr/>
+        </p:nvSpPr>
+        <p:spPr>
+          <a:xfrm>
+            <a:off x="895350" y="1789938"/>
+            <a:ext cx="4876648" cy="374904"/>
+          </a:xfrm>
+          <a:prstGeom prst="rect">
+            <a:avLst/>
+          </a:prstGeom>
+          <a:noFill/>
+          <a:ln>
+            <a:noFill/>
+          </a:ln>
+        </p:spPr>
+        <p:txBody>
+          <a:bodyPr wrap="square" lIns="36576" tIns="27432" rIns="36576" bIns="27432" anchor="t">
+            <a:noAutofit/>
+          </a:bodyPr>
+          <a:lstStyle/>
+          <a:p>
+            <a:pPr algn="l">
+              <a:lnSpc>
+                <a:spcPct val="100000"/>
+              </a:lnSpc>
+            </a:pPr>
+            <a:r>
+              <a:rPr lang="en-US" sz="2100" dirty="0" b="1">
+                <a:solidFill>
+                  <a:srgbClr val="16171D"/>
+                </a:solidFill>
+                <a:latin typeface="Segoe UI"/>
+                <a:cs typeface="Segoe UI"/>
+              </a:rPr>
+              <a:t xml:space="preserve">1. </a:t>
+            </a:r>
+            <a:r>
+              <a:rPr lang="en-US" sz="2100" dirty="0" b="1" i="1">
+                <a:solidFill>
+                  <a:srgbClr val="16171D"/>
+                </a:solidFill>
+                <a:latin typeface="Segoe UI"/>
+                <a:cs typeface="Segoe UI"/>
+              </a:rPr>
+              <a:t xml:space="preserve">g</a:t>
+            </a:r>
+            <a:r>
+              <a:rPr lang="en-US" sz="2100" dirty="0" b="1">
+                <a:solidFill>
+                  <a:srgbClr val="16171D"/>
+                </a:solidFill>
+                <a:latin typeface="Segoe UI"/>
+                <a:cs typeface="Segoe UI"/>
+              </a:rPr>
+              <a:t xml:space="preserve">(</a:t>
+            </a:r>
+            <a:r>
+              <a:rPr lang="en-US" sz="2100" dirty="0" b="1" i="1">
+                <a:solidFill>
+                  <a:srgbClr val="16171D"/>
+                </a:solidFill>
+                <a:latin typeface="Segoe UI"/>
+                <a:cs typeface="Segoe UI"/>
+              </a:rPr>
+              <a:t xml:space="preserve">x</a:t>
+            </a:r>
+            <a:r>
+              <a:rPr lang="en-US" sz="2100" dirty="0" b="1">
+                <a:solidFill>
+                  <a:srgbClr val="16171D"/>
+                </a:solidFill>
+                <a:latin typeface="Segoe UI"/>
+                <a:cs typeface="Segoe UI"/>
+              </a:rPr>
+              <a:t xml:space="preserve">) = 2 · </a:t>
+            </a:r>
+            <a:r>
+              <a:rPr lang="en-US" sz="2100" dirty="0" b="1" i="1">
+                <a:solidFill>
+                  <a:srgbClr val="16171D"/>
+                </a:solidFill>
+                <a:latin typeface="Segoe UI"/>
+                <a:cs typeface="Segoe UI"/>
+              </a:rPr>
+              <a:t xml:space="preserve">f</a:t>
+            </a:r>
+            <a:r>
+              <a:rPr lang="en-US" sz="2100" dirty="0" b="1">
+                <a:solidFill>
+                  <a:srgbClr val="16171D"/>
+                </a:solidFill>
+                <a:latin typeface="Segoe UI"/>
+                <a:cs typeface="Segoe UI"/>
+              </a:rPr>
+              <a:t xml:space="preserve">(</a:t>
+            </a:r>
+            <a:r>
+              <a:rPr lang="en-US" sz="2100" dirty="0" b="1" i="1">
+                <a:solidFill>
+                  <a:srgbClr val="16171D"/>
+                </a:solidFill>
+                <a:latin typeface="Segoe UI"/>
+                <a:cs typeface="Segoe UI"/>
+              </a:rPr>
+              <a:t xml:space="preserve">x</a:t>
+            </a:r>
+            <a:r>
+              <a:rPr lang="en-US" sz="2100" dirty="0" b="1">
+                <a:solidFill>
+                  <a:srgbClr val="16171D"/>
+                </a:solidFill>
+                <a:latin typeface="Segoe UI"/>
+                <a:cs typeface="Segoe UI"/>
+              </a:rPr>
+              <a:t xml:space="preserve">) + 7</a:t>
+            </a:r>
+            <a:endParaRPr lang="en-US" sz="2100" dirty="0"/>
+          </a:p>
+        </p:txBody>
+      </p:sp>
+      <p:sp>
+        <p:nvSpPr>
           <p:cNvPr id="5" name="Shape 5"/>
           <p:cNvSpPr txBox="1"/>
           <p:nvPr/>
         </p:nvSpPr>
         <p:spPr>
           <a:xfrm>
-            <a:off x="685800" y="2141982"/>
-            <a:ext cx="2908021" cy="518922"/>
+            <a:off x="895350" y="2260092"/>
+            <a:ext cx="4876648" cy="534924"/>
+          </a:xfrm>
+          <a:prstGeom prst="rect">
+            <a:avLst/>
+          </a:prstGeom>
+          <a:noFill/>
+          <a:ln>
+            <a:noFill/>
+          </a:ln>
+        </p:spPr>
+        <p:txBody>
+          <a:bodyPr wrap="square" lIns="36576" tIns="27432" rIns="36576" bIns="27432" anchor="t">
+            <a:noAutofit/>
+          </a:bodyPr>
+          <a:lstStyle/>
+          <a:p>
+            <a:pPr algn="l">
+              <a:lnSpc>
+                <a:spcPct val="100000"/>
+              </a:lnSpc>
+            </a:pPr>
+            <a:r>
+              <a:rPr lang="en-US" sz="1575" dirty="0" b="1">
+                <a:solidFill>
+                  <a:srgbClr val="16171D"/>
+                </a:solidFill>
+                <a:latin typeface="Segoe UI"/>
+                <a:cs typeface="Segoe UI"/>
+              </a:rPr>
+              <a:t xml:space="preserve">Step 1.</a:t>
+            </a:r>
+            <a:r>
+              <a:rPr lang="en-US" sz="1575" dirty="0">
+                <a:solidFill>
+                  <a:srgbClr val="16171D"/>
+                </a:solidFill>
+                <a:latin typeface="Segoe UI"/>
+                <a:cs typeface="Segoe UI"/>
+              </a:rPr>
+              <a:t xml:space="preserve"> </a:t>
+            </a:r>
+            <a:r>
+              <a:rPr lang="en-US" sz="1575" dirty="0" i="1">
+                <a:solidFill>
+                  <a:srgbClr val="16171D"/>
+                </a:solidFill>
+                <a:latin typeface="Segoe UI"/>
+                <a:cs typeface="Segoe UI"/>
+              </a:rPr>
+              <a:t xml:space="preserve">f</a:t>
+            </a:r>
+            <a:r>
+              <a:rPr lang="en-US" sz="1575" dirty="0">
+                <a:solidFill>
+                  <a:srgbClr val="16171D"/>
+                </a:solidFill>
+                <a:latin typeface="Segoe UI"/>
+                <a:cs typeface="Segoe UI"/>
+              </a:rPr>
+              <a:t xml:space="preserve">(</a:t>
+            </a:r>
+            <a:r>
+              <a:rPr lang="en-US" sz="1575" dirty="0" i="1">
+                <a:solidFill>
+                  <a:srgbClr val="16171D"/>
+                </a:solidFill>
+                <a:latin typeface="Segoe UI"/>
+                <a:cs typeface="Segoe UI"/>
+              </a:rPr>
+              <a:t xml:space="preserve">x</a:t>
+            </a:r>
+            <a:r>
+              <a:rPr lang="en-US" sz="1575" dirty="0">
+                <a:solidFill>
+                  <a:srgbClr val="16171D"/>
+                </a:solidFill>
+                <a:latin typeface="Segoe UI"/>
+                <a:cs typeface="Segoe UI"/>
+              </a:rPr>
+              <a:t xml:space="preserve">) = </a:t>
+            </a:r>
+            <a:r>
+              <a:rPr lang="en-US" sz="1575" dirty="0" i="1">
+                <a:solidFill>
+                  <a:srgbClr val="16171D"/>
+                </a:solidFill>
+                <a:latin typeface="Segoe UI"/>
+                <a:cs typeface="Segoe UI"/>
+              </a:rPr>
+              <a:t xml:space="preserve">x</a:t>
+            </a:r>
+            <a:r>
+              <a:rPr lang="en-US" sz="1575" dirty="0">
+                <a:solidFill>
+                  <a:srgbClr val="16171D"/>
+                </a:solidFill>
+                <a:latin typeface="Segoe UI"/>
+                <a:cs typeface="Segoe UI"/>
+              </a:rPr>
+              <a:t xml:space="preserve">, so write </a:t>
+            </a:r>
+            <a:r>
+              <a:rPr lang="en-US" sz="1575" dirty="0" i="1">
+                <a:solidFill>
+                  <a:srgbClr val="16171D"/>
+                </a:solidFill>
+                <a:latin typeface="Segoe UI"/>
+                <a:cs typeface="Segoe UI"/>
+              </a:rPr>
+              <a:t xml:space="preserve">x</a:t>
+            </a:r>
+            <a:r>
+              <a:rPr lang="en-US" sz="1575" dirty="0">
+                <a:solidFill>
+                  <a:srgbClr val="16171D"/>
+                </a:solidFill>
+                <a:latin typeface="Segoe UI"/>
+                <a:cs typeface="Segoe UI"/>
+              </a:rPr>
+              <a:t xml:space="preserve"> in its place: </a:t>
+            </a:r>
+            <a:r>
+              <a:rPr lang="en-US" sz="1575" dirty="0" i="1">
+                <a:solidFill>
+                  <a:srgbClr val="16171D"/>
+                </a:solidFill>
+                <a:latin typeface="Segoe UI"/>
+                <a:cs typeface="Segoe UI"/>
+              </a:rPr>
+              <a:t xml:space="preserve">g</a:t>
+            </a:r>
+            <a:r>
+              <a:rPr lang="en-US" sz="1575" dirty="0">
+                <a:solidFill>
+                  <a:srgbClr val="16171D"/>
+                </a:solidFill>
+                <a:latin typeface="Segoe UI"/>
+                <a:cs typeface="Segoe UI"/>
+              </a:rPr>
+              <a:t xml:space="preserve">(</a:t>
+            </a:r>
+            <a:r>
+              <a:rPr lang="en-US" sz="1575" dirty="0" i="1">
+                <a:solidFill>
+                  <a:srgbClr val="16171D"/>
+                </a:solidFill>
+                <a:latin typeface="Segoe UI"/>
+                <a:cs typeface="Segoe UI"/>
+              </a:rPr>
+              <a:t xml:space="preserve">x</a:t>
+            </a:r>
+            <a:r>
+              <a:rPr lang="en-US" sz="1575" dirty="0">
+                <a:solidFill>
+                  <a:srgbClr val="16171D"/>
+                </a:solidFill>
+                <a:latin typeface="Segoe UI"/>
+                <a:cs typeface="Segoe UI"/>
+              </a:rPr>
+              <a:t xml:space="preserve">) = 2</a:t>
+            </a:r>
+            <a:r>
+              <a:rPr lang="en-US" sz="1575" dirty="0" i="1">
+                <a:solidFill>
+                  <a:srgbClr val="16171D"/>
+                </a:solidFill>
+                <a:latin typeface="Segoe UI"/>
+                <a:cs typeface="Segoe UI"/>
+              </a:rPr>
+              <a:t xml:space="preserve">x</a:t>
+            </a:r>
+            <a:r>
+              <a:rPr lang="en-US" sz="1575" dirty="0">
+                <a:solidFill>
+                  <a:srgbClr val="16171D"/>
+                </a:solidFill>
+                <a:latin typeface="Segoe UI"/>
+                <a:cs typeface="Segoe UI"/>
+              </a:rPr>
+              <a:t xml:space="preserve"> + 7.</a:t>
+            </a:r>
+            <a:endParaRPr lang="en-US" sz="1575" dirty="0"/>
+          </a:p>
+        </p:txBody>
+      </p:sp>
+      <p:sp>
+        <p:nvSpPr>
+          <p:cNvPr id="6" name="Shape 6"/>
+          <p:cNvSpPr txBox="1"/>
+          <p:nvPr/>
+        </p:nvSpPr>
+        <p:spPr>
+          <a:xfrm>
+            <a:off x="895350" y="2890266"/>
+            <a:ext cx="4876648" cy="774954"/>
+          </a:xfrm>
+          <a:prstGeom prst="rect">
+            <a:avLst/>
+          </a:prstGeom>
+          <a:noFill/>
+          <a:ln>
+            <a:noFill/>
+          </a:ln>
+        </p:spPr>
+        <p:txBody>
+          <a:bodyPr wrap="square" lIns="36576" tIns="27432" rIns="36576" bIns="27432" anchor="t">
+            <a:noAutofit/>
+          </a:bodyPr>
+          <a:lstStyle/>
+          <a:p>
+            <a:pPr algn="l">
+              <a:lnSpc>
+                <a:spcPct val="100000"/>
+              </a:lnSpc>
+            </a:pPr>
+            <a:r>
+              <a:rPr lang="en-US" sz="1575" dirty="0" b="1">
+                <a:solidFill>
+                  <a:srgbClr val="16171D"/>
+                </a:solidFill>
+                <a:latin typeface="Segoe UI"/>
+                <a:cs typeface="Segoe UI"/>
+              </a:rPr>
+              <a:t xml:space="preserve">Step 2.</a:t>
+            </a:r>
+            <a:r>
+              <a:rPr lang="en-US" sz="1575" dirty="0">
+                <a:solidFill>
+                  <a:srgbClr val="16171D"/>
+                </a:solidFill>
+                <a:latin typeface="Segoe UI"/>
+                <a:cs typeface="Segoe UI"/>
+              </a:rPr>
+              <a:t xml:space="preserve"> The number </a:t>
+            </a:r>
+            <a:r>
+              <a:rPr lang="en-US" sz="1575" dirty="0" b="1">
+                <a:solidFill>
+                  <a:srgbClr val="C9561F"/>
+                </a:solidFill>
+                <a:latin typeface="Segoe UI"/>
+                <a:cs typeface="Segoe UI"/>
+              </a:rPr>
+              <a:t xml:space="preserve">multiplied</a:t>
+            </a:r>
+            <a:r>
+              <a:rPr lang="en-US" sz="1575" dirty="0">
+                <a:solidFill>
+                  <a:srgbClr val="16171D"/>
+                </a:solidFill>
+                <a:latin typeface="Segoe UI"/>
+                <a:cs typeface="Segoe UI"/>
+              </a:rPr>
+              <a:t xml:space="preserve"> is </a:t>
+            </a:r>
+            <a:r>
+              <a:rPr lang="en-US" sz="1575" dirty="0" i="1">
+                <a:solidFill>
+                  <a:srgbClr val="16171D"/>
+                </a:solidFill>
+                <a:latin typeface="Segoe UI"/>
+                <a:cs typeface="Segoe UI"/>
+              </a:rPr>
+              <a:t xml:space="preserve">a</a:t>
+            </a:r>
+            <a:r>
+              <a:rPr lang="en-US" sz="1575" dirty="0">
+                <a:solidFill>
+                  <a:srgbClr val="16171D"/>
+                </a:solidFill>
+                <a:latin typeface="Segoe UI"/>
+                <a:cs typeface="Segoe UI"/>
+              </a:rPr>
+              <a:t xml:space="preserve"> = 2. It is the new slope. 2 is more than 1, so the line </a:t>
+            </a:r>
+            <a:r>
+              <a:rPr lang="en-US" sz="1575" dirty="0" b="1">
+                <a:solidFill>
+                  <a:srgbClr val="16171D"/>
+                </a:solidFill>
+                <a:latin typeface="Segoe UI"/>
+                <a:cs typeface="Segoe UI"/>
+              </a:rPr>
+              <a:t xml:space="preserve">stretches</a:t>
+            </a:r>
+            <a:r>
+              <a:rPr lang="en-US" sz="1575" dirty="0">
+                <a:solidFill>
+                  <a:srgbClr val="16171D"/>
+                </a:solidFill>
+                <a:latin typeface="Segoe UI"/>
+                <a:cs typeface="Segoe UI"/>
+              </a:rPr>
+              <a:t xml:space="preserve"> (gets steeper).</a:t>
+            </a:r>
+            <a:endParaRPr lang="en-US" sz="1575" dirty="0"/>
+          </a:p>
+        </p:txBody>
+      </p:sp>
+      <p:sp>
+        <p:nvSpPr>
+          <p:cNvPr id="7" name="Shape 7"/>
+          <p:cNvSpPr txBox="1"/>
+          <p:nvPr/>
+        </p:nvSpPr>
+        <p:spPr>
+          <a:xfrm>
+            <a:off x="895350" y="3760470"/>
+            <a:ext cx="4876648" cy="774954"/>
+          </a:xfrm>
+          <a:prstGeom prst="rect">
+            <a:avLst/>
+          </a:prstGeom>
+          <a:noFill/>
+          <a:ln>
+            <a:noFill/>
+          </a:ln>
+        </p:spPr>
+        <p:txBody>
+          <a:bodyPr wrap="square" lIns="36576" tIns="27432" rIns="36576" bIns="27432" anchor="t">
+            <a:noAutofit/>
+          </a:bodyPr>
+          <a:lstStyle/>
+          <a:p>
+            <a:pPr algn="l">
+              <a:lnSpc>
+                <a:spcPct val="100000"/>
+              </a:lnSpc>
+            </a:pPr>
+            <a:r>
+              <a:rPr lang="en-US" sz="1575" dirty="0" b="1">
+                <a:solidFill>
+                  <a:srgbClr val="16171D"/>
+                </a:solidFill>
+                <a:latin typeface="Segoe UI"/>
+                <a:cs typeface="Segoe UI"/>
+              </a:rPr>
+              <a:t xml:space="preserve">Step 3.</a:t>
+            </a:r>
+            <a:r>
+              <a:rPr lang="en-US" sz="1575" dirty="0">
+                <a:solidFill>
+                  <a:srgbClr val="16171D"/>
+                </a:solidFill>
+                <a:latin typeface="Segoe UI"/>
+                <a:cs typeface="Segoe UI"/>
+              </a:rPr>
+              <a:t xml:space="preserve"> The number </a:t>
+            </a:r>
+            <a:r>
+              <a:rPr lang="en-US" sz="1575" dirty="0" b="1">
+                <a:solidFill>
+                  <a:srgbClr val="3050B8"/>
+                </a:solidFill>
+                <a:latin typeface="Segoe UI"/>
+                <a:cs typeface="Segoe UI"/>
+              </a:rPr>
+              <a:t xml:space="preserve">added</a:t>
+            </a:r>
+            <a:r>
+              <a:rPr lang="en-US" sz="1575" dirty="0">
+                <a:solidFill>
+                  <a:srgbClr val="16171D"/>
+                </a:solidFill>
+                <a:latin typeface="Segoe UI"/>
+                <a:cs typeface="Segoe UI"/>
+              </a:rPr>
+              <a:t xml:space="preserve"> is </a:t>
+            </a:r>
+            <a:r>
+              <a:rPr lang="en-US" sz="1575" dirty="0" i="1">
+                <a:solidFill>
+                  <a:srgbClr val="16171D"/>
+                </a:solidFill>
+                <a:latin typeface="Segoe UI"/>
+                <a:cs typeface="Segoe UI"/>
+              </a:rPr>
+              <a:t xml:space="preserve">d</a:t>
+            </a:r>
+            <a:r>
+              <a:rPr lang="en-US" sz="1575" dirty="0">
+                <a:solidFill>
+                  <a:srgbClr val="16171D"/>
+                </a:solidFill>
+                <a:latin typeface="Segoe UI"/>
+                <a:cs typeface="Segoe UI"/>
+              </a:rPr>
+              <a:t xml:space="preserve"> = +7. Plus means the line moves </a:t>
+            </a:r>
+            <a:r>
+              <a:rPr lang="en-US" sz="1575" dirty="0" b="1">
+                <a:solidFill>
+                  <a:srgbClr val="16171D"/>
+                </a:solidFill>
+                <a:latin typeface="Segoe UI"/>
+                <a:cs typeface="Segoe UI"/>
+              </a:rPr>
+              <a:t xml:space="preserve">up 7</a:t>
+            </a:r>
+            <a:r>
+              <a:rPr lang="en-US" sz="1575" dirty="0">
+                <a:solidFill>
+                  <a:srgbClr val="16171D"/>
+                </a:solidFill>
+                <a:latin typeface="Segoe UI"/>
+                <a:cs typeface="Segoe UI"/>
+              </a:rPr>
+              <a:t xml:space="preserve">. It crosses the </a:t>
+            </a:r>
+            <a:r>
+              <a:rPr lang="en-US" sz="1575" dirty="0" i="1">
+                <a:solidFill>
+                  <a:srgbClr val="16171D"/>
+                </a:solidFill>
+                <a:latin typeface="Segoe UI"/>
+                <a:cs typeface="Segoe UI"/>
+              </a:rPr>
+              <a:t xml:space="preserve">y</a:t>
+            </a:r>
+            <a:r>
+              <a:rPr lang="en-US" sz="1575" dirty="0">
+                <a:solidFill>
+                  <a:srgbClr val="16171D"/>
+                </a:solidFill>
+                <a:latin typeface="Segoe UI"/>
+                <a:cs typeface="Segoe UI"/>
+              </a:rPr>
+              <a:t xml:space="preserve">-axis at (0, 7).</a:t>
+            </a:r>
+            <a:endParaRPr lang="en-US" sz="1575" dirty="0"/>
+          </a:p>
+        </p:txBody>
+      </p:sp>
+      <p:sp>
+        <p:nvSpPr>
+          <p:cNvPr id="8" name="Shape 8"/>
+          <p:cNvSpPr txBox="1"/>
+          <p:nvPr/>
+        </p:nvSpPr>
+        <p:spPr>
+          <a:xfrm>
+            <a:off x="895350" y="4630674"/>
+            <a:ext cx="4876648" cy="873252"/>
           </a:xfrm>
           <a:prstGeom prst="roundRect">
             <a:avLst>
@@ -3167,6 +3829,16 @@
               <a:t xml:space="preserve">ANSWER   </a:t>
             </a:r>
             <a:r>
+              <a:rPr lang="en-US" sz="2325" dirty="0">
+                <a:solidFill>
+                  <a:srgbClr val="16171D"/>
+                </a:solidFill>
+                <a:latin typeface="Cambria"/>
+                <a:cs typeface="Cambria"/>
+              </a:rPr>
+              <a:t xml:space="preserve">stretch by 2, up 7: </a:t>
+            </a:r>
+            <a:r>
               <a:rPr lang="en-US" sz="2325" dirty="0" i="1">
                 <a:solidFill>
                   <a:srgbClr val="16171D"/>
@@ -3174,7 +3846,7 @@
                 <a:latin typeface="Cambria"/>
                 <a:cs typeface="Cambria"/>
               </a:rPr>
-              <a:t xml:space="preserve">m</a:t>
+              <a:t xml:space="preserve">g</a:t>
             </a:r>
             <a:r>
               <a:rPr lang="en-US" sz="2325" dirty="0">
@@ -3184,7 +3856,47 @@
                 <a:latin typeface="Cambria"/>
                 <a:cs typeface="Cambria"/>
               </a:rPr>
-              <a:t xml:space="preserve"> = −3</a:t>
+              <a:t xml:space="preserve">(</a:t>
+            </a:r>
+            <a:r>
+              <a:rPr lang="en-US" sz="2325" dirty="0" i="1">
+                <a:solidFill>
+                  <a:srgbClr val="16171D"/>
+                </a:solidFill>
+                <a:latin typeface="Cambria"/>
+                <a:cs typeface="Cambria"/>
+              </a:rPr>
+              <a:t xml:space="preserve">x</a:t>
+            </a:r>
+            <a:r>
+              <a:rPr lang="en-US" sz="2325" dirty="0">
+                <a:solidFill>
+                  <a:srgbClr val="16171D"/>
+                </a:solidFill>
+                <a:latin typeface="Cambria"/>
+                <a:cs typeface="Cambria"/>
+              </a:rPr>
+              <a:t xml:space="preserve">) = 2</a:t>
+            </a:r>
+            <a:r>
+              <a:rPr lang="en-US" sz="2325" dirty="0" i="1">
+                <a:solidFill>
+                  <a:srgbClr val="16171D"/>
+                </a:solidFill>
+                <a:latin typeface="Cambria"/>
+                <a:cs typeface="Cambria"/>
+              </a:rPr>
+              <a:t xml:space="preserve">x</a:t>
+            </a:r>
+            <a:r>
+              <a:rPr lang="en-US" sz="2325" dirty="0">
+                <a:solidFill>
+                  <a:srgbClr val="16171D"/>
+                </a:solidFill>
+                <a:latin typeface="Cambria"/>
+                <a:cs typeface="Cambria"/>
+              </a:rPr>
+              <a:t xml:space="preserve"> + 7</a:t>
             </a:r>
             <a:endParaRPr lang="en-US" sz="2325" dirty="0"/>
           </a:p>
@@ -3192,21 +3904,27 @@
       </p:sp>
       <p:sp>
         <p:nvSpPr>
-          <p:cNvPr id="6" name="Shape 6"/>
+          <p:cNvPr id="15" name="Shape 15"/>
           <p:cNvSpPr txBox="1"/>
           <p:nvPr/>
         </p:nvSpPr>
         <p:spPr>
           <a:xfrm>
-            <a:off x="685800" y="2832354"/>
-            <a:ext cx="10820095" cy="352044"/>
-          </a:xfrm>
-          <a:prstGeom prst="rect">
-            <a:avLst/>
-          </a:prstGeom>
-          <a:noFill/>
-          <a:ln>
-            <a:noFill/>
+            <a:off x="6210148" y="1618488"/>
+            <a:ext cx="5295748" cy="3576828"/>
+          </a:xfrm>
+          <a:prstGeom prst="roundRect">
+            <a:avLst>
+              <a:gd name="adj" fmla="val 8000"/>
+            </a:avLst>
+          </a:prstGeom>
+          <a:solidFill>
+            <a:srgbClr val="FFFFFF"/>
+          </a:solidFill>
+          <a:ln w="12700">
+            <a:solidFill>
+              <a:srgbClr val="E3E4EC"/>
+            </a:solidFill>
           </a:ln>
         </p:spPr>
         <p:txBody>
@@ -3220,70 +3938,676 @@
                 <a:spcPct val="100000"/>
               </a:lnSpc>
             </a:pPr>
-            <a:r>
-              <a:rPr lang="en-US" sz="1950" dirty="0">
-                <a:solidFill>
-                  <a:srgbClr val="16171D"/>
-                </a:solidFill>
-                <a:latin typeface="Segoe UI"/>
-                <a:cs typeface="Segoe UI"/>
-              </a:rPr>
-              <a:t xml:space="preserve">Step 2: 5 = −3(−1) + </a:t>
-            </a:r>
-            <a:r>
-              <a:rPr lang="en-US" sz="1950" dirty="0" i="1">
-                <a:solidFill>
-                  <a:srgbClr val="16171D"/>
-                </a:solidFill>
-                <a:latin typeface="Segoe UI"/>
-                <a:cs typeface="Segoe UI"/>
-              </a:rPr>
-              <a:t xml:space="preserve">b</a:t>
-            </a:r>
-            <a:r>
-              <a:rPr lang="en-US" sz="1950" dirty="0">
-                <a:solidFill>
-                  <a:srgbClr val="16171D"/>
-                </a:solidFill>
-                <a:latin typeface="Segoe UI"/>
-                <a:cs typeface="Segoe UI"/>
-              </a:rPr>
-              <a:t xml:space="preserve">, so </a:t>
-            </a:r>
-            <a:r>
-              <a:rPr lang="en-US" sz="1950" dirty="0" i="1">
-                <a:solidFill>
-                  <a:srgbClr val="16171D"/>
-                </a:solidFill>
-                <a:latin typeface="Segoe UI"/>
-                <a:cs typeface="Segoe UI"/>
-              </a:rPr>
-              <a:t xml:space="preserve">b</a:t>
-            </a:r>
-            <a:r>
-              <a:rPr lang="en-US" sz="1950" dirty="0">
-                <a:solidFill>
-                  <a:srgbClr val="16171D"/>
-                </a:solidFill>
-                <a:latin typeface="Segoe UI"/>
-                <a:cs typeface="Segoe UI"/>
-              </a:rPr>
-              <a:t xml:space="preserve"> = ____</a:t>
-            </a:r>
             <a:endParaRPr lang="en-US" sz="1950" dirty="0"/>
           </a:p>
         </p:txBody>
       </p:sp>
       <p:sp>
         <p:nvSpPr>
-          <p:cNvPr id="7" name="Shape 7"/>
+          <p:cNvPr id="10" name="Shape 10"/>
           <p:cNvSpPr txBox="1"/>
           <p:nvPr/>
         </p:nvSpPr>
         <p:spPr>
           <a:xfrm>
-            <a:off x="685800" y="3355848"/>
-            <a:ext cx="2742194" cy="518922"/>
+            <a:off x="6419698" y="1789938"/>
+            <a:ext cx="4876648" cy="374904"/>
+          </a:xfrm>
+          <a:prstGeom prst="rect">
+            <a:avLst/>
+          </a:prstGeom>
+          <a:noFill/>
+          <a:ln>
+            <a:noFill/>
+          </a:ln>
+        </p:spPr>
+        <p:txBody>
+          <a:bodyPr wrap="square" lIns="36576" tIns="27432" rIns="36576" bIns="27432" anchor="t">
+            <a:noAutofit/>
+          </a:bodyPr>
+          <a:lstStyle/>
+          <a:p>
+            <a:pPr algn="l">
+              <a:lnSpc>
+                <a:spcPct val="100000"/>
+              </a:lnSpc>
+            </a:pPr>
+            <a:r>
+              <a:rPr lang="en-US" sz="2100" dirty="0" b="1">
+                <a:solidFill>
+                  <a:srgbClr val="16171D"/>
+                </a:solidFill>
+                <a:latin typeface="Segoe UI"/>
+                <a:cs typeface="Segoe UI"/>
+              </a:rPr>
+              <a:t xml:space="preserve">2. </a:t>
+            </a:r>
+            <a:r>
+              <a:rPr lang="en-US" sz="2100" dirty="0" b="1" i="1">
+                <a:solidFill>
+                  <a:srgbClr val="16171D"/>
+                </a:solidFill>
+                <a:latin typeface="Segoe UI"/>
+                <a:cs typeface="Segoe UI"/>
+              </a:rPr>
+              <a:t xml:space="preserve">g</a:t>
+            </a:r>
+            <a:r>
+              <a:rPr lang="en-US" sz="2100" dirty="0" b="1">
+                <a:solidFill>
+                  <a:srgbClr val="16171D"/>
+                </a:solidFill>
+                <a:latin typeface="Segoe UI"/>
+                <a:cs typeface="Segoe UI"/>
+              </a:rPr>
+              <a:t xml:space="preserve">(</a:t>
+            </a:r>
+            <a:r>
+              <a:rPr lang="en-US" sz="2100" dirty="0" b="1" i="1">
+                <a:solidFill>
+                  <a:srgbClr val="16171D"/>
+                </a:solidFill>
+                <a:latin typeface="Segoe UI"/>
+                <a:cs typeface="Segoe UI"/>
+              </a:rPr>
+              <a:t xml:space="preserve">x</a:t>
+            </a:r>
+            <a:r>
+              <a:rPr lang="en-US" sz="2100" dirty="0" b="1">
+                <a:solidFill>
+                  <a:srgbClr val="16171D"/>
+                </a:solidFill>
+                <a:latin typeface="Segoe UI"/>
+                <a:cs typeface="Segoe UI"/>
+              </a:rPr>
+              <a:t xml:space="preserve">) = </a:t>
+            </a:r>
+            <a:r>
+              <a:rPr lang="en-US" sz="2100" dirty="0" b="1">
+                <a:solidFill>
+                  <a:srgbClr val="16171D"/>
+                </a:solidFill>
+                <a:latin typeface="Segoe UI"/>
+                <a:cs typeface="Segoe UI"/>
+              </a:rPr>
+              <a:t xml:space="preserve">1</a:t>
+            </a:r>
+            <a:r>
+              <a:rPr lang="en-US" sz="2100" dirty="0" b="1">
+                <a:solidFill>
+                  <a:srgbClr val="16171D"/>
+                </a:solidFill>
+                <a:latin typeface="Segoe UI"/>
+                <a:cs typeface="Segoe UI"/>
+              </a:rPr>
+              <a:t xml:space="preserve">/</a:t>
+            </a:r>
+            <a:r>
+              <a:rPr lang="en-US" sz="2100" dirty="0" b="1">
+                <a:solidFill>
+                  <a:srgbClr val="16171D"/>
+                </a:solidFill>
+                <a:latin typeface="Segoe UI"/>
+                <a:cs typeface="Segoe UI"/>
+              </a:rPr>
+              <a:t xml:space="preserve">2</a:t>
+            </a:r>
+            <a:r>
+              <a:rPr lang="en-US" sz="2100" dirty="0" b="1">
+                <a:solidFill>
+                  <a:srgbClr val="16171D"/>
+                </a:solidFill>
+                <a:latin typeface="Segoe UI"/>
+                <a:cs typeface="Segoe UI"/>
+              </a:rPr>
+              <a:t xml:space="preserve"> · </a:t>
+            </a:r>
+            <a:r>
+              <a:rPr lang="en-US" sz="2100" dirty="0" b="1" i="1">
+                <a:solidFill>
+                  <a:srgbClr val="16171D"/>
+                </a:solidFill>
+                <a:latin typeface="Segoe UI"/>
+                <a:cs typeface="Segoe UI"/>
+              </a:rPr>
+              <a:t xml:space="preserve">f</a:t>
+            </a:r>
+            <a:r>
+              <a:rPr lang="en-US" sz="2100" dirty="0" b="1">
+                <a:solidFill>
+                  <a:srgbClr val="16171D"/>
+                </a:solidFill>
+                <a:latin typeface="Segoe UI"/>
+                <a:cs typeface="Segoe UI"/>
+              </a:rPr>
+              <a:t xml:space="preserve">(</a:t>
+            </a:r>
+            <a:r>
+              <a:rPr lang="en-US" sz="2100" dirty="0" b="1" i="1">
+                <a:solidFill>
+                  <a:srgbClr val="16171D"/>
+                </a:solidFill>
+                <a:latin typeface="Segoe UI"/>
+                <a:cs typeface="Segoe UI"/>
+              </a:rPr>
+              <a:t xml:space="preserve">x</a:t>
+            </a:r>
+            <a:r>
+              <a:rPr lang="en-US" sz="2100" dirty="0" b="1">
+                <a:solidFill>
+                  <a:srgbClr val="16171D"/>
+                </a:solidFill>
+                <a:latin typeface="Segoe UI"/>
+                <a:cs typeface="Segoe UI"/>
+              </a:rPr>
+              <a:t xml:space="preserve">) − 3</a:t>
+            </a:r>
+            <a:endParaRPr lang="en-US" sz="2100" dirty="0"/>
+          </a:p>
+        </p:txBody>
+      </p:sp>
+      <p:sp>
+        <p:nvSpPr>
+          <p:cNvPr id="11" name="Shape 11"/>
+          <p:cNvSpPr txBox="1"/>
+          <p:nvPr/>
+        </p:nvSpPr>
+        <p:spPr>
+          <a:xfrm>
+            <a:off x="6419698" y="2260092"/>
+            <a:ext cx="4876648" cy="534924"/>
+          </a:xfrm>
+          <a:prstGeom prst="rect">
+            <a:avLst/>
+          </a:prstGeom>
+          <a:noFill/>
+          <a:ln>
+            <a:noFill/>
+          </a:ln>
+        </p:spPr>
+        <p:txBody>
+          <a:bodyPr wrap="square" lIns="36576" tIns="27432" rIns="36576" bIns="27432" anchor="t">
+            <a:noAutofit/>
+          </a:bodyPr>
+          <a:lstStyle/>
+          <a:p>
+            <a:pPr algn="l">
+              <a:lnSpc>
+                <a:spcPct val="100000"/>
+              </a:lnSpc>
+            </a:pPr>
+            <a:r>
+              <a:rPr lang="en-US" sz="1575" dirty="0" b="1">
+                <a:solidFill>
+                  <a:srgbClr val="16171D"/>
+                </a:solidFill>
+                <a:latin typeface="Segoe UI"/>
+                <a:cs typeface="Segoe UI"/>
+              </a:rPr>
+              <a:t xml:space="preserve">Step 1.</a:t>
+            </a:r>
+            <a:r>
+              <a:rPr lang="en-US" sz="1575" dirty="0">
+                <a:solidFill>
+                  <a:srgbClr val="16171D"/>
+                </a:solidFill>
+                <a:latin typeface="Segoe UI"/>
+                <a:cs typeface="Segoe UI"/>
+              </a:rPr>
+              <a:t xml:space="preserve"> Write </a:t>
+            </a:r>
+            <a:r>
+              <a:rPr lang="en-US" sz="1575" dirty="0" i="1">
+                <a:solidFill>
+                  <a:srgbClr val="16171D"/>
+                </a:solidFill>
+                <a:latin typeface="Segoe UI"/>
+                <a:cs typeface="Segoe UI"/>
+              </a:rPr>
+              <a:t xml:space="preserve">x</a:t>
+            </a:r>
+            <a:r>
+              <a:rPr lang="en-US" sz="1575" dirty="0">
+                <a:solidFill>
+                  <a:srgbClr val="16171D"/>
+                </a:solidFill>
+                <a:latin typeface="Segoe UI"/>
+                <a:cs typeface="Segoe UI"/>
+              </a:rPr>
+              <a:t xml:space="preserve"> in place of </a:t>
+            </a:r>
+            <a:r>
+              <a:rPr lang="en-US" sz="1575" dirty="0" i="1">
+                <a:solidFill>
+                  <a:srgbClr val="16171D"/>
+                </a:solidFill>
+                <a:latin typeface="Segoe UI"/>
+                <a:cs typeface="Segoe UI"/>
+              </a:rPr>
+              <a:t xml:space="preserve">f</a:t>
+            </a:r>
+            <a:r>
+              <a:rPr lang="en-US" sz="1575" dirty="0">
+                <a:solidFill>
+                  <a:srgbClr val="16171D"/>
+                </a:solidFill>
+                <a:latin typeface="Segoe UI"/>
+                <a:cs typeface="Segoe UI"/>
+              </a:rPr>
+              <a:t xml:space="preserve">(</a:t>
+            </a:r>
+            <a:r>
+              <a:rPr lang="en-US" sz="1575" dirty="0" i="1">
+                <a:solidFill>
+                  <a:srgbClr val="16171D"/>
+                </a:solidFill>
+                <a:latin typeface="Segoe UI"/>
+                <a:cs typeface="Segoe UI"/>
+              </a:rPr>
+              <a:t xml:space="preserve">x</a:t>
+            </a:r>
+            <a:r>
+              <a:rPr lang="en-US" sz="1575" dirty="0">
+                <a:solidFill>
+                  <a:srgbClr val="16171D"/>
+                </a:solidFill>
+                <a:latin typeface="Segoe UI"/>
+                <a:cs typeface="Segoe UI"/>
+              </a:rPr>
+              <a:t xml:space="preserve">): </a:t>
+            </a:r>
+            <a:r>
+              <a:rPr lang="en-US" sz="1575" dirty="0" i="1">
+                <a:solidFill>
+                  <a:srgbClr val="16171D"/>
+                </a:solidFill>
+                <a:latin typeface="Segoe UI"/>
+                <a:cs typeface="Segoe UI"/>
+              </a:rPr>
+              <a:t xml:space="preserve">g</a:t>
+            </a:r>
+            <a:r>
+              <a:rPr lang="en-US" sz="1575" dirty="0">
+                <a:solidFill>
+                  <a:srgbClr val="16171D"/>
+                </a:solidFill>
+                <a:latin typeface="Segoe UI"/>
+                <a:cs typeface="Segoe UI"/>
+              </a:rPr>
+              <a:t xml:space="preserve">(</a:t>
+            </a:r>
+            <a:r>
+              <a:rPr lang="en-US" sz="1575" dirty="0" i="1">
+                <a:solidFill>
+                  <a:srgbClr val="16171D"/>
+                </a:solidFill>
+                <a:latin typeface="Segoe UI"/>
+                <a:cs typeface="Segoe UI"/>
+              </a:rPr>
+              <a:t xml:space="preserve">x</a:t>
+            </a:r>
+            <a:r>
+              <a:rPr lang="en-US" sz="1575" dirty="0">
+                <a:solidFill>
+                  <a:srgbClr val="16171D"/>
+                </a:solidFill>
+                <a:latin typeface="Segoe UI"/>
+                <a:cs typeface="Segoe UI"/>
+              </a:rPr>
+              <a:t xml:space="preserve">) = </a:t>
+            </a:r>
+            <a:r>
+              <a:rPr lang="en-US" sz="1575" dirty="0">
+                <a:solidFill>
+                  <a:srgbClr val="16171D"/>
+                </a:solidFill>
+                <a:latin typeface="Segoe UI"/>
+                <a:cs typeface="Segoe UI"/>
+              </a:rPr>
+              <a:t xml:space="preserve">1</a:t>
+            </a:r>
+            <a:r>
+              <a:rPr lang="en-US" sz="1575" dirty="0">
+                <a:solidFill>
+                  <a:srgbClr val="16171D"/>
+                </a:solidFill>
+                <a:latin typeface="Segoe UI"/>
+                <a:cs typeface="Segoe UI"/>
+              </a:rPr>
+              <a:t xml:space="preserve">/</a:t>
+            </a:r>
+            <a:r>
+              <a:rPr lang="en-US" sz="1575" dirty="0">
+                <a:solidFill>
+                  <a:srgbClr val="16171D"/>
+                </a:solidFill>
+                <a:latin typeface="Segoe UI"/>
+                <a:cs typeface="Segoe UI"/>
+              </a:rPr>
+              <a:t xml:space="preserve">2</a:t>
+            </a:r>
+            <a:r>
+              <a:rPr lang="en-US" sz="1575" dirty="0" i="1">
+                <a:solidFill>
+                  <a:srgbClr val="16171D"/>
+                </a:solidFill>
+                <a:latin typeface="Segoe UI"/>
+                <a:cs typeface="Segoe UI"/>
+              </a:rPr>
+              <a:t xml:space="preserve">x</a:t>
+            </a:r>
+            <a:r>
+              <a:rPr lang="en-US" sz="1575" dirty="0">
+                <a:solidFill>
+                  <a:srgbClr val="16171D"/>
+                </a:solidFill>
+                <a:latin typeface="Segoe UI"/>
+                <a:cs typeface="Segoe UI"/>
+              </a:rPr>
+              <a:t xml:space="preserve"> − 3.</a:t>
+            </a:r>
+            <a:endParaRPr lang="en-US" sz="1575" dirty="0"/>
+          </a:p>
+        </p:txBody>
+      </p:sp>
+      <p:sp>
+        <p:nvSpPr>
+          <p:cNvPr id="12" name="Shape 12"/>
+          <p:cNvSpPr txBox="1"/>
+          <p:nvPr/>
+        </p:nvSpPr>
+        <p:spPr>
+          <a:xfrm>
+            <a:off x="6419698" y="2890266"/>
+            <a:ext cx="4876648" cy="534924"/>
+          </a:xfrm>
+          <a:prstGeom prst="rect">
+            <a:avLst/>
+          </a:prstGeom>
+          <a:noFill/>
+          <a:ln>
+            <a:noFill/>
+          </a:ln>
+        </p:spPr>
+        <p:txBody>
+          <a:bodyPr wrap="square" lIns="36576" tIns="27432" rIns="36576" bIns="27432" anchor="t">
+            <a:noAutofit/>
+          </a:bodyPr>
+          <a:lstStyle/>
+          <a:p>
+            <a:pPr algn="l">
+              <a:lnSpc>
+                <a:spcPct val="100000"/>
+              </a:lnSpc>
+            </a:pPr>
+            <a:r>
+              <a:rPr lang="en-US" sz="1575" dirty="0" b="1">
+                <a:solidFill>
+                  <a:srgbClr val="16171D"/>
+                </a:solidFill>
+                <a:latin typeface="Segoe UI"/>
+                <a:cs typeface="Segoe UI"/>
+              </a:rPr>
+              <a:t xml:space="preserve">Step 2.</a:t>
+            </a:r>
+            <a:r>
+              <a:rPr lang="en-US" sz="1575" dirty="0">
+                <a:solidFill>
+                  <a:srgbClr val="16171D"/>
+                </a:solidFill>
+                <a:latin typeface="Segoe UI"/>
+                <a:cs typeface="Segoe UI"/>
+              </a:rPr>
+              <a:t xml:space="preserve"> </a:t>
+            </a:r>
+            <a:r>
+              <a:rPr lang="en-US" sz="1575" dirty="0" i="1">
+                <a:solidFill>
+                  <a:srgbClr val="16171D"/>
+                </a:solidFill>
+                <a:latin typeface="Segoe UI"/>
+                <a:cs typeface="Segoe UI"/>
+              </a:rPr>
+              <a:t xml:space="preserve">a</a:t>
+            </a:r>
+            <a:r>
+              <a:rPr lang="en-US" sz="1575" dirty="0">
+                <a:solidFill>
+                  <a:srgbClr val="16171D"/>
+                </a:solidFill>
+                <a:latin typeface="Segoe UI"/>
+                <a:cs typeface="Segoe UI"/>
+              </a:rPr>
+              <a:t xml:space="preserve"> = </a:t>
+            </a:r>
+            <a:r>
+              <a:rPr lang="en-US" sz="1575" dirty="0">
+                <a:solidFill>
+                  <a:srgbClr val="16171D"/>
+                </a:solidFill>
+                <a:latin typeface="Segoe UI"/>
+                <a:cs typeface="Segoe UI"/>
+              </a:rPr>
+              <a:t xml:space="preserve">1</a:t>
+            </a:r>
+            <a:r>
+              <a:rPr lang="en-US" sz="1575" dirty="0">
+                <a:solidFill>
+                  <a:srgbClr val="16171D"/>
+                </a:solidFill>
+                <a:latin typeface="Segoe UI"/>
+                <a:cs typeface="Segoe UI"/>
+              </a:rPr>
+              <a:t xml:space="preserve">/</a:t>
+            </a:r>
+            <a:r>
+              <a:rPr lang="en-US" sz="1575" dirty="0">
+                <a:solidFill>
+                  <a:srgbClr val="16171D"/>
+                </a:solidFill>
+                <a:latin typeface="Segoe UI"/>
+                <a:cs typeface="Segoe UI"/>
+              </a:rPr>
+              <a:t xml:space="preserve">2</a:t>
+            </a:r>
+            <a:r>
+              <a:rPr lang="en-US" sz="1575" dirty="0">
+                <a:solidFill>
+                  <a:srgbClr val="16171D"/>
+                </a:solidFill>
+                <a:latin typeface="Segoe UI"/>
+                <a:cs typeface="Segoe UI"/>
+              </a:rPr>
+              <a:t xml:space="preserve"> is between 0 and 1, so the line </a:t>
+            </a:r>
+            <a:r>
+              <a:rPr lang="en-US" sz="1575" dirty="0" b="1">
+                <a:solidFill>
+                  <a:srgbClr val="16171D"/>
+                </a:solidFill>
+                <a:latin typeface="Segoe UI"/>
+                <a:cs typeface="Segoe UI"/>
+              </a:rPr>
+              <a:t xml:space="preserve">compresses</a:t>
+            </a:r>
+            <a:r>
+              <a:rPr lang="en-US" sz="1575" dirty="0">
+                <a:solidFill>
+                  <a:srgbClr val="16171D"/>
+                </a:solidFill>
+                <a:latin typeface="Segoe UI"/>
+                <a:cs typeface="Segoe UI"/>
+              </a:rPr>
+              <a:t xml:space="preserve"> (gets less steep). The slope is </a:t>
+            </a:r>
+            <a:r>
+              <a:rPr lang="en-US" sz="1575" dirty="0">
+                <a:solidFill>
+                  <a:srgbClr val="16171D"/>
+                </a:solidFill>
+                <a:latin typeface="Segoe UI"/>
+                <a:cs typeface="Segoe UI"/>
+              </a:rPr>
+              <a:t xml:space="preserve">1</a:t>
+            </a:r>
+            <a:r>
+              <a:rPr lang="en-US" sz="1575" dirty="0">
+                <a:solidFill>
+                  <a:srgbClr val="16171D"/>
+                </a:solidFill>
+                <a:latin typeface="Segoe UI"/>
+                <a:cs typeface="Segoe UI"/>
+              </a:rPr>
+              <a:t xml:space="preserve">/</a:t>
+            </a:r>
+            <a:r>
+              <a:rPr lang="en-US" sz="1575" dirty="0">
+                <a:solidFill>
+                  <a:srgbClr val="16171D"/>
+                </a:solidFill>
+                <a:latin typeface="Segoe UI"/>
+                <a:cs typeface="Segoe UI"/>
+              </a:rPr>
+              <a:t xml:space="preserve">2</a:t>
+            </a:r>
+            <a:r>
+              <a:rPr lang="en-US" sz="1575" dirty="0">
+                <a:solidFill>
+                  <a:srgbClr val="16171D"/>
+                </a:solidFill>
+                <a:latin typeface="Segoe UI"/>
+                <a:cs typeface="Segoe UI"/>
+              </a:rPr>
+              <a:t xml:space="preserve">.</a:t>
+            </a:r>
+            <a:endParaRPr lang="en-US" sz="1575" dirty="0"/>
+          </a:p>
+        </p:txBody>
+      </p:sp>
+      <p:sp>
+        <p:nvSpPr>
+          <p:cNvPr id="13" name="Shape 13"/>
+          <p:cNvSpPr txBox="1"/>
+          <p:nvPr/>
+        </p:nvSpPr>
+        <p:spPr>
+          <a:xfrm>
+            <a:off x="6419698" y="3520440"/>
+            <a:ext cx="4876648" cy="534924"/>
+          </a:xfrm>
+          <a:prstGeom prst="rect">
+            <a:avLst/>
+          </a:prstGeom>
+          <a:noFill/>
+          <a:ln>
+            <a:noFill/>
+          </a:ln>
+        </p:spPr>
+        <p:txBody>
+          <a:bodyPr wrap="square" lIns="36576" tIns="27432" rIns="36576" bIns="27432" anchor="t">
+            <a:noAutofit/>
+          </a:bodyPr>
+          <a:lstStyle/>
+          <a:p>
+            <a:pPr algn="l">
+              <a:lnSpc>
+                <a:spcPct val="100000"/>
+              </a:lnSpc>
+            </a:pPr>
+            <a:r>
+              <a:rPr lang="en-US" sz="1575" dirty="0" b="1">
+                <a:solidFill>
+                  <a:srgbClr val="16171D"/>
+                </a:solidFill>
+                <a:latin typeface="Segoe UI"/>
+                <a:cs typeface="Segoe UI"/>
+              </a:rPr>
+              <a:t xml:space="preserve">Step 3.</a:t>
+            </a:r>
+            <a:r>
+              <a:rPr lang="en-US" sz="1575" dirty="0">
+                <a:solidFill>
+                  <a:srgbClr val="16171D"/>
+                </a:solidFill>
+                <a:latin typeface="Segoe UI"/>
+                <a:cs typeface="Segoe UI"/>
+              </a:rPr>
+              <a:t xml:space="preserve"> </a:t>
+            </a:r>
+            <a:r>
+              <a:rPr lang="en-US" sz="1575" dirty="0" i="1">
+                <a:solidFill>
+                  <a:srgbClr val="16171D"/>
+                </a:solidFill>
+                <a:latin typeface="Segoe UI"/>
+                <a:cs typeface="Segoe UI"/>
+              </a:rPr>
+              <a:t xml:space="preserve">d</a:t>
+            </a:r>
+            <a:r>
+              <a:rPr lang="en-US" sz="1575" dirty="0">
+                <a:solidFill>
+                  <a:srgbClr val="16171D"/>
+                </a:solidFill>
+                <a:latin typeface="Segoe UI"/>
+                <a:cs typeface="Segoe UI"/>
+              </a:rPr>
+              <a:t xml:space="preserve"> = −3. Minus means the line moves </a:t>
+            </a:r>
+            <a:r>
+              <a:rPr lang="en-US" sz="1575" dirty="0" b="1">
+                <a:solidFill>
+                  <a:srgbClr val="16171D"/>
+                </a:solidFill>
+                <a:latin typeface="Segoe UI"/>
+                <a:cs typeface="Segoe UI"/>
+              </a:rPr>
+              <a:t xml:space="preserve">down 3</a:t>
+            </a:r>
+            <a:r>
+              <a:rPr lang="en-US" sz="1575" dirty="0">
+                <a:solidFill>
+                  <a:srgbClr val="16171D"/>
+                </a:solidFill>
+                <a:latin typeface="Segoe UI"/>
+                <a:cs typeface="Segoe UI"/>
+              </a:rPr>
+              <a:t xml:space="preserve">. It crosses the </a:t>
+            </a:r>
+            <a:r>
+              <a:rPr lang="en-US" sz="1575" dirty="0" i="1">
+                <a:solidFill>
+                  <a:srgbClr val="16171D"/>
+                </a:solidFill>
+                <a:latin typeface="Segoe UI"/>
+                <a:cs typeface="Segoe UI"/>
+              </a:rPr>
+              <a:t xml:space="preserve">y</a:t>
+            </a:r>
+            <a:r>
+              <a:rPr lang="en-US" sz="1575" dirty="0">
+                <a:solidFill>
+                  <a:srgbClr val="16171D"/>
+                </a:solidFill>
+                <a:latin typeface="Segoe UI"/>
+                <a:cs typeface="Segoe UI"/>
+              </a:rPr>
+              <a:t xml:space="preserve">-axis at (0, −3).</a:t>
+            </a:r>
+            <a:endParaRPr lang="en-US" sz="1575" dirty="0"/>
+          </a:p>
+        </p:txBody>
+      </p:sp>
+      <p:sp>
+        <p:nvSpPr>
+          <p:cNvPr id="14" name="Shape 14"/>
+          <p:cNvSpPr txBox="1"/>
+          <p:nvPr/>
+        </p:nvSpPr>
+        <p:spPr>
+          <a:xfrm>
+            <a:off x="6419698" y="4150614"/>
+            <a:ext cx="4876648" cy="873252"/>
           </a:xfrm>
           <a:prstGeom prst="roundRect">
             <a:avLst>
@@ -3319,6 +4643,86 @@
               <a:t xml:space="preserve">ANSWER   </a:t>
             </a:r>
             <a:r>
+              <a:rPr lang="en-US" sz="2325" dirty="0">
+                <a:solidFill>
+                  <a:srgbClr val="16171D"/>
+                </a:solidFill>
+                <a:latin typeface="Cambria"/>
+                <a:cs typeface="Cambria"/>
+              </a:rPr>
+              <a:t xml:space="preserve">compress by </a:t>
+            </a:r>
+            <a:r>
+              <a:rPr lang="en-US" sz="2325" dirty="0">
+                <a:solidFill>
+                  <a:srgbClr val="16171D"/>
+                </a:solidFill>
+                <a:latin typeface="Cambria"/>
+                <a:cs typeface="Cambria"/>
+              </a:rPr>
+              <a:t xml:space="preserve">1</a:t>
+            </a:r>
+            <a:r>
+              <a:rPr lang="en-US" sz="2325" dirty="0">
+                <a:solidFill>
+                  <a:srgbClr val="16171D"/>
+                </a:solidFill>
+                <a:latin typeface="Cambria"/>
+                <a:cs typeface="Cambria"/>
+              </a:rPr>
+              <a:t xml:space="preserve">/</a:t>
+            </a:r>
+            <a:r>
+              <a:rPr lang="en-US" sz="2325" dirty="0">
+                <a:solidFill>
+                  <a:srgbClr val="16171D"/>
+                </a:solidFill>
+                <a:latin typeface="Cambria"/>
+                <a:cs typeface="Cambria"/>
+              </a:rPr>
+              <a:t xml:space="preserve">2</a:t>
+            </a:r>
+            <a:r>
+              <a:rPr lang="en-US" sz="2325" dirty="0">
+                <a:solidFill>
+                  <a:srgbClr val="16171D"/>
+                </a:solidFill>
+                <a:latin typeface="Cambria"/>
+                <a:cs typeface="Cambria"/>
+              </a:rPr>
+              <a:t xml:space="preserve">, down 3: </a:t>
+            </a:r>
+            <a:r>
+              <a:rPr lang="en-US" sz="2325" dirty="0">
+                <a:solidFill>
+                  <a:srgbClr val="16171D"/>
+                </a:solidFill>
+                <a:latin typeface="Cambria"/>
+                <a:cs typeface="Cambria"/>
+              </a:rPr>
+              <a:t xml:space="preserve">1</a:t>
+            </a:r>
+            <a:r>
+              <a:rPr lang="en-US" sz="2325" dirty="0">
+                <a:solidFill>
+                  <a:srgbClr val="16171D"/>
+                </a:solidFill>
+                <a:latin typeface="Cambria"/>
+                <a:cs typeface="Cambria"/>
+              </a:rPr>
+              <a:t xml:space="preserve">/</a:t>
+            </a:r>
+            <a:r>
+              <a:rPr lang="en-US" sz="2325" dirty="0">
+                <a:solidFill>
+                  <a:srgbClr val="16171D"/>
+                </a:solidFill>
+                <a:latin typeface="Cambria"/>
+                <a:cs typeface="Cambria"/>
+              </a:rPr>
+              <a:t xml:space="preserve">2</a:t>
+            </a:r>
+            <a:r>
               <a:rPr lang="en-US" sz="2325" dirty="0" i="1">
                 <a:solidFill>
                   <a:srgbClr val="16171D"/>
@@ -3326,7 +4730,7 @@
                 <a:latin typeface="Cambria"/>
                 <a:cs typeface="Cambria"/>
               </a:rPr>
-              <a:t xml:space="preserve">b</a:t>
+              <a:t xml:space="preserve">x</a:t>
             </a:r>
             <a:r>
               <a:rPr lang="en-US" sz="2325" dirty="0">
@@ -3336,7 +4740,7 @@
                 <a:latin typeface="Cambria"/>
                 <a:cs typeface="Cambria"/>
               </a:rPr>
-              <a:t xml:space="preserve"> = 2</a:t>
+              <a:t xml:space="preserve"> − 3</a:t>
             </a:r>
             <a:endParaRPr lang="en-US" sz="2325" dirty="0"/>
           </a:p>
@@ -3344,14 +4748,898 @@
       </p:sp>
       <p:sp>
         <p:nvSpPr>
-          <p:cNvPr id="8" name="Shape 8"/>
+          <p:cNvPr id="16" name="Slide Number 16"/>
           <p:cNvSpPr txBox="1"/>
           <p:nvPr/>
         </p:nvSpPr>
         <p:spPr>
           <a:xfrm>
-            <a:off x="685800" y="4046220"/>
-            <a:ext cx="10820095" cy="352044"/>
+            <a:off x="11277295" y="6611112"/>
+            <a:ext cx="685800" cy="201168"/>
+          </a:xfrm>
+          <a:prstGeom prst="rect">
+            <a:avLst/>
+          </a:prstGeom>
+          <a:noFill/>
+        </p:spPr>
+        <p:txBody>
+          <a:bodyPr wrap="none" lIns="0" tIns="0" rIns="0" bIns="0" anchor="b">
+            <a:noAutofit/>
+          </a:bodyPr>
+          <a:lstStyle/>
+          <a:p>
+            <a:pPr algn="r"/>
+            <a:fld id="{5C1A6E0B-3B1F-4D5E-9C7A-2F4B8D6E1A90}" type="slidenum">
+              <a:rPr lang="en-US" sz="1200" dirty="0">
+                <a:solidFill>
+                  <a:srgbClr val="5F6272"/>
+                </a:solidFill>
+              </a:rPr>
+              <a:t>11</a:t>
+            </a:fld>
+          </a:p>
+        </p:txBody>
+      </p:sp>
+    </p:spTree>
+  </p:cSld>
+  <p:clrMapOvr>
+    <a:masterClrMapping/>
+  </p:clrMapOvr>
+  <p:transition spd="med">
+    <p:fade/>
+  </p:transition>
+  <p:timing>
+    <p:tnLst>
+      <p:par>
+        <p:cTn id="1" dur="indefinite" restart="never" nodeType="tmRoot">
+          <p:childTnLst>
+            <p:seq concurrent="1" nextAc="seek">
+              <p:cTn id="2" dur="indefinite" nodeType="mainSeq">
+                <p:childTnLst>
+                  <p:par>
+                    <p:cTn id="8" fill="hold">
+                      <p:stCondLst>
+                        <p:cond delay="indefinite"/>
+                      </p:stCondLst>
+                      <p:childTnLst>
+                        <p:par>
+                          <p:cTn id="9" fill="hold">
+                            <p:stCondLst>
+                              <p:cond delay="0"/>
+                            </p:stCondLst>
+                            <p:childTnLst>
+                              <p:par>
+                                <p:cTn id="7" presetID="42" presetClass="entr" presetSubtype="0" fill="hold" nodeType="clickEffect">
+                                  <p:stCondLst>
+                                    <p:cond delay="0"/>
+                                  </p:stCondLst>
+                                  <p:childTnLst>
+                                    <p:set>
+                                      <p:cBhvr>
+                                        <p:cTn id="3" dur="1" fill="hold">
+                                          <p:stCondLst>
+                                            <p:cond delay="0"/>
+                                          </p:stCondLst>
+                                        </p:cTn>
+                                        <p:tgtEl>
+                                          <p:spTgt spid="5"/>
+                                        </p:tgtEl>
+                                        <p:attrNameLst>
+                                          <p:attrName>style.visibility</p:attrName>
+                                        </p:attrNameLst>
+                                      </p:cBhvr>
+                                      <p:to>
+                                        <p:strVal val="visible"/>
+                                      </p:to>
+                                    </p:set>
+                                    <p:animEffect transition="in" filter="fade">
+                                      <p:cBhvr>
+                                        <p:cTn id="4" dur="500"/>
+                                        <p:tgtEl>
+                                          <p:spTgt spid="5"/>
+                                        </p:tgtEl>
+                                      </p:cBhvr>
+                                    </p:animEffect>
+                                    <p:anim calcmode="lin" valueType="num">
+                                      <p:cBhvr>
+                                        <p:cTn id="5" dur="500" fill="hold"/>
+                                        <p:tgtEl>
+                                          <p:spTgt spid="5"/>
+                                        </p:tgtEl>
+                                        <p:attrNameLst>
+                                          <p:attrName>ppt_x</p:attrName>
+                                        </p:attrNameLst>
+                                      </p:cBhvr>
+                                      <p:tavLst>
+                                        <p:tav tm="0">
+                                          <p:val>
+                                            <p:strVal val="#ppt_x"/>
+                                          </p:val>
+                                        </p:tav>
+                                        <p:tav tm="100000">
+                                          <p:val>
+                                            <p:strVal val="#ppt_x"/>
+                                          </p:val>
+                                        </p:tav>
+                                      </p:tavLst>
+                                    </p:anim>
+                                    <p:anim calcmode="lin" valueType="num">
+                                      <p:cBhvr>
+                                        <p:cTn id="6" dur="500" fill="hold"/>
+                                        <p:tgtEl>
+                                          <p:spTgt spid="5"/>
+                                        </p:tgtEl>
+                                        <p:attrNameLst>
+                                          <p:attrName>ppt_y</p:attrName>
+                                        </p:attrNameLst>
+                                      </p:cBhvr>
+                                      <p:tavLst>
+                                        <p:tav tm="0">
+                                          <p:val>
+                                            <p:strVal val="#ppt_y+.1"/>
+                                          </p:val>
+                                        </p:tav>
+                                        <p:tav tm="100000">
+                                          <p:val>
+                                            <p:strVal val="#ppt_y"/>
+                                          </p:val>
+                                        </p:tav>
+                                      </p:tavLst>
+                                    </p:anim>
+                                  </p:childTnLst>
+                                </p:cTn>
+                              </p:par>
+                            </p:childTnLst>
+                          </p:cTn>
+                        </p:par>
+                      </p:childTnLst>
+                    </p:cTn>
+                  </p:par>
+                  <p:par>
+                    <p:cTn id="15" fill="hold">
+                      <p:stCondLst>
+                        <p:cond delay="indefinite"/>
+                      </p:stCondLst>
+                      <p:childTnLst>
+                        <p:par>
+                          <p:cTn id="16" fill="hold">
+                            <p:stCondLst>
+                              <p:cond delay="0"/>
+                            </p:stCondLst>
+                            <p:childTnLst>
+                              <p:par>
+                                <p:cTn id="14" presetID="42" presetClass="entr" presetSubtype="0" fill="hold" nodeType="clickEffect">
+                                  <p:stCondLst>
+                                    <p:cond delay="0"/>
+                                  </p:stCondLst>
+                                  <p:childTnLst>
+                                    <p:set>
+                                      <p:cBhvr>
+                                        <p:cTn id="10" dur="1" fill="hold">
+                                          <p:stCondLst>
+                                            <p:cond delay="0"/>
+                                          </p:stCondLst>
+                                        </p:cTn>
+                                        <p:tgtEl>
+                                          <p:spTgt spid="6"/>
+                                        </p:tgtEl>
+                                        <p:attrNameLst>
+                                          <p:attrName>style.visibility</p:attrName>
+                                        </p:attrNameLst>
+                                      </p:cBhvr>
+                                      <p:to>
+                                        <p:strVal val="visible"/>
+                                      </p:to>
+                                    </p:set>
+                                    <p:animEffect transition="in" filter="fade">
+                                      <p:cBhvr>
+                                        <p:cTn id="11" dur="500"/>
+                                        <p:tgtEl>
+                                          <p:spTgt spid="6"/>
+                                        </p:tgtEl>
+                                      </p:cBhvr>
+                                    </p:animEffect>
+                                    <p:anim calcmode="lin" valueType="num">
+                                      <p:cBhvr>
+                                        <p:cTn id="12" dur="500" fill="hold"/>
+                                        <p:tgtEl>
+                                          <p:spTgt spid="6"/>
+                                        </p:tgtEl>
+                                        <p:attrNameLst>
+                                          <p:attrName>ppt_x</p:attrName>
+                                        </p:attrNameLst>
+                                      </p:cBhvr>
+                                      <p:tavLst>
+                                        <p:tav tm="0">
+                                          <p:val>
+                                            <p:strVal val="#ppt_x"/>
+                                          </p:val>
+                                        </p:tav>
+                                        <p:tav tm="100000">
+                                          <p:val>
+                                            <p:strVal val="#ppt_x"/>
+                                          </p:val>
+                                        </p:tav>
+                                      </p:tavLst>
+                                    </p:anim>
+                                    <p:anim calcmode="lin" valueType="num">
+                                      <p:cBhvr>
+                                        <p:cTn id="13" dur="500" fill="hold"/>
+                                        <p:tgtEl>
+                                          <p:spTgt spid="6"/>
+                                        </p:tgtEl>
+                                        <p:attrNameLst>
+                                          <p:attrName>ppt_y</p:attrName>
+                                        </p:attrNameLst>
+                                      </p:cBhvr>
+                                      <p:tavLst>
+                                        <p:tav tm="0">
+                                          <p:val>
+                                            <p:strVal val="#ppt_y+.1"/>
+                                          </p:val>
+                                        </p:tav>
+                                        <p:tav tm="100000">
+                                          <p:val>
+                                            <p:strVal val="#ppt_y"/>
+                                          </p:val>
+                                        </p:tav>
+                                      </p:tavLst>
+                                    </p:anim>
+                                  </p:childTnLst>
+                                </p:cTn>
+                              </p:par>
+                            </p:childTnLst>
+                          </p:cTn>
+                        </p:par>
+                      </p:childTnLst>
+                    </p:cTn>
+                  </p:par>
+                  <p:par>
+                    <p:cTn id="22" fill="hold">
+                      <p:stCondLst>
+                        <p:cond delay="indefinite"/>
+                      </p:stCondLst>
+                      <p:childTnLst>
+                        <p:par>
+                          <p:cTn id="23" fill="hold">
+                            <p:stCondLst>
+                              <p:cond delay="0"/>
+                            </p:stCondLst>
+                            <p:childTnLst>
+                              <p:par>
+                                <p:cTn id="21" presetID="42" presetClass="entr" presetSubtype="0" fill="hold" nodeType="clickEffect">
+                                  <p:stCondLst>
+                                    <p:cond delay="0"/>
+                                  </p:stCondLst>
+                                  <p:childTnLst>
+                                    <p:set>
+                                      <p:cBhvr>
+                                        <p:cTn id="17" dur="1" fill="hold">
+                                          <p:stCondLst>
+                                            <p:cond delay="0"/>
+                                          </p:stCondLst>
+                                        </p:cTn>
+                                        <p:tgtEl>
+                                          <p:spTgt spid="7"/>
+                                        </p:tgtEl>
+                                        <p:attrNameLst>
+                                          <p:attrName>style.visibility</p:attrName>
+                                        </p:attrNameLst>
+                                      </p:cBhvr>
+                                      <p:to>
+                                        <p:strVal val="visible"/>
+                                      </p:to>
+                                    </p:set>
+                                    <p:animEffect transition="in" filter="fade">
+                                      <p:cBhvr>
+                                        <p:cTn id="18" dur="500"/>
+                                        <p:tgtEl>
+                                          <p:spTgt spid="7"/>
+                                        </p:tgtEl>
+                                      </p:cBhvr>
+                                    </p:animEffect>
+                                    <p:anim calcmode="lin" valueType="num">
+                                      <p:cBhvr>
+                                        <p:cTn id="19" dur="500" fill="hold"/>
+                                        <p:tgtEl>
+                                          <p:spTgt spid="7"/>
+                                        </p:tgtEl>
+                                        <p:attrNameLst>
+                                          <p:attrName>ppt_x</p:attrName>
+                                        </p:attrNameLst>
+                                      </p:cBhvr>
+                                      <p:tavLst>
+                                        <p:tav tm="0">
+                                          <p:val>
+                                            <p:strVal val="#ppt_x"/>
+                                          </p:val>
+                                        </p:tav>
+                                        <p:tav tm="100000">
+                                          <p:val>
+                                            <p:strVal val="#ppt_x"/>
+                                          </p:val>
+                                        </p:tav>
+                                      </p:tavLst>
+                                    </p:anim>
+                                    <p:anim calcmode="lin" valueType="num">
+                                      <p:cBhvr>
+                                        <p:cTn id="20" dur="500" fill="hold"/>
+                                        <p:tgtEl>
+                                          <p:spTgt spid="7"/>
+                                        </p:tgtEl>
+                                        <p:attrNameLst>
+                                          <p:attrName>ppt_y</p:attrName>
+                                        </p:attrNameLst>
+                                      </p:cBhvr>
+                                      <p:tavLst>
+                                        <p:tav tm="0">
+                                          <p:val>
+                                            <p:strVal val="#ppt_y+.1"/>
+                                          </p:val>
+                                        </p:tav>
+                                        <p:tav tm="100000">
+                                          <p:val>
+                                            <p:strVal val="#ppt_y"/>
+                                          </p:val>
+                                        </p:tav>
+                                      </p:tavLst>
+                                    </p:anim>
+                                  </p:childTnLst>
+                                </p:cTn>
+                              </p:par>
+                            </p:childTnLst>
+                          </p:cTn>
+                        </p:par>
+                      </p:childTnLst>
+                    </p:cTn>
+                  </p:par>
+                  <p:par>
+                    <p:cTn id="29" fill="hold">
+                      <p:stCondLst>
+                        <p:cond delay="indefinite"/>
+                      </p:stCondLst>
+                      <p:childTnLst>
+                        <p:par>
+                          <p:cTn id="30" fill="hold">
+                            <p:stCondLst>
+                              <p:cond delay="0"/>
+                            </p:stCondLst>
+                            <p:childTnLst>
+                              <p:par>
+                                <p:cTn id="28" presetID="53" presetClass="entr" presetSubtype="16" fill="hold" nodeType="clickEffect">
+                                  <p:stCondLst>
+                                    <p:cond delay="0"/>
+                                  </p:stCondLst>
+                                  <p:childTnLst>
+                                    <p:set>
+                                      <p:cBhvr>
+                                        <p:cTn id="24" dur="1" fill="hold">
+                                          <p:stCondLst>
+                                            <p:cond delay="0"/>
+                                          </p:stCondLst>
+                                        </p:cTn>
+                                        <p:tgtEl>
+                                          <p:spTgt spid="8"/>
+                                        </p:tgtEl>
+                                        <p:attrNameLst>
+                                          <p:attrName>style.visibility</p:attrName>
+                                        </p:attrNameLst>
+                                      </p:cBhvr>
+                                      <p:to>
+                                        <p:strVal val="visible"/>
+                                      </p:to>
+                                    </p:set>
+                                    <p:animEffect transition="in" filter="fade">
+                                      <p:cBhvr>
+                                        <p:cTn id="25" dur="500"/>
+                                        <p:tgtEl>
+                                          <p:spTgt spid="8"/>
+                                        </p:tgtEl>
+                                      </p:cBhvr>
+                                    </p:animEffect>
+                                    <p:anim calcmode="lin" valueType="num">
+                                      <p:cBhvr>
+                                        <p:cTn id="26" dur="500" fill="hold"/>
+                                        <p:tgtEl>
+                                          <p:spTgt spid="8"/>
+                                        </p:tgtEl>
+                                        <p:attrNameLst>
+                                          <p:attrName>ppt_w</p:attrName>
+                                        </p:attrNameLst>
+                                      </p:cBhvr>
+                                      <p:tavLst>
+                                        <p:tav tm="0">
+                                          <p:val>
+                                            <p:fltVal val="0"/>
+                                          </p:val>
+                                        </p:tav>
+                                        <p:tav tm="100000">
+                                          <p:val>
+                                            <p:strVal val="#ppt_w"/>
+                                          </p:val>
+                                        </p:tav>
+                                      </p:tavLst>
+                                    </p:anim>
+                                    <p:anim calcmode="lin" valueType="num">
+                                      <p:cBhvr>
+                                        <p:cTn id="27" dur="500" fill="hold"/>
+                                        <p:tgtEl>
+                                          <p:spTgt spid="8"/>
+                                        </p:tgtEl>
+                                        <p:attrNameLst>
+                                          <p:attrName>ppt_h</p:attrName>
+                                        </p:attrNameLst>
+                                      </p:cBhvr>
+                                      <p:tavLst>
+                                        <p:tav tm="0">
+                                          <p:val>
+                                            <p:fltVal val="0"/>
+                                          </p:val>
+                                        </p:tav>
+                                        <p:tav tm="100000">
+                                          <p:val>
+                                            <p:strVal val="#ppt_h"/>
+                                          </p:val>
+                                        </p:tav>
+                                      </p:tavLst>
+                                    </p:anim>
+                                  </p:childTnLst>
+                                </p:cTn>
+                              </p:par>
+                            </p:childTnLst>
+                          </p:cTn>
+                        </p:par>
+                      </p:childTnLst>
+                    </p:cTn>
+                  </p:par>
+                  <p:par>
+                    <p:cTn id="36" fill="hold">
+                      <p:stCondLst>
+                        <p:cond delay="indefinite"/>
+                      </p:stCondLst>
+                      <p:childTnLst>
+                        <p:par>
+                          <p:cTn id="37" fill="hold">
+                            <p:stCondLst>
+                              <p:cond delay="0"/>
+                            </p:stCondLst>
+                            <p:childTnLst>
+                              <p:par>
+                                <p:cTn id="35" presetID="42" presetClass="entr" presetSubtype="0" fill="hold" nodeType="clickEffect">
+                                  <p:stCondLst>
+                                    <p:cond delay="0"/>
+                                  </p:stCondLst>
+                                  <p:childTnLst>
+                                    <p:set>
+                                      <p:cBhvr>
+                                        <p:cTn id="31" dur="1" fill="hold">
+                                          <p:stCondLst>
+                                            <p:cond delay="0"/>
+                                          </p:stCondLst>
+                                        </p:cTn>
+                                        <p:tgtEl>
+                                          <p:spTgt spid="11"/>
+                                        </p:tgtEl>
+                                        <p:attrNameLst>
+                                          <p:attrName>style.visibility</p:attrName>
+                                        </p:attrNameLst>
+                                      </p:cBhvr>
+                                      <p:to>
+                                        <p:strVal val="visible"/>
+                                      </p:to>
+                                    </p:set>
+                                    <p:animEffect transition="in" filter="fade">
+                                      <p:cBhvr>
+                                        <p:cTn id="32" dur="500"/>
+                                        <p:tgtEl>
+                                          <p:spTgt spid="11"/>
+                                        </p:tgtEl>
+                                      </p:cBhvr>
+                                    </p:animEffect>
+                                    <p:anim calcmode="lin" valueType="num">
+                                      <p:cBhvr>
+                                        <p:cTn id="33" dur="500" fill="hold"/>
+                                        <p:tgtEl>
+                                          <p:spTgt spid="11"/>
+                                        </p:tgtEl>
+                                        <p:attrNameLst>
+                                          <p:attrName>ppt_x</p:attrName>
+                                        </p:attrNameLst>
+                                      </p:cBhvr>
+                                      <p:tavLst>
+                                        <p:tav tm="0">
+                                          <p:val>
+                                            <p:strVal val="#ppt_x"/>
+                                          </p:val>
+                                        </p:tav>
+                                        <p:tav tm="100000">
+                                          <p:val>
+                                            <p:strVal val="#ppt_x"/>
+                                          </p:val>
+                                        </p:tav>
+                                      </p:tavLst>
+                                    </p:anim>
+                                    <p:anim calcmode="lin" valueType="num">
+                                      <p:cBhvr>
+                                        <p:cTn id="34" dur="500" fill="hold"/>
+                                        <p:tgtEl>
+                                          <p:spTgt spid="11"/>
+                                        </p:tgtEl>
+                                        <p:attrNameLst>
+                                          <p:attrName>ppt_y</p:attrName>
+                                        </p:attrNameLst>
+                                      </p:cBhvr>
+                                      <p:tavLst>
+                                        <p:tav tm="0">
+                                          <p:val>
+                                            <p:strVal val="#ppt_y+.1"/>
+                                          </p:val>
+                                        </p:tav>
+                                        <p:tav tm="100000">
+                                          <p:val>
+                                            <p:strVal val="#ppt_y"/>
+                                          </p:val>
+                                        </p:tav>
+                                      </p:tavLst>
+                                    </p:anim>
+                                  </p:childTnLst>
+                                </p:cTn>
+                              </p:par>
+                            </p:childTnLst>
+                          </p:cTn>
+                        </p:par>
+                      </p:childTnLst>
+                    </p:cTn>
+                  </p:par>
+                  <p:par>
+                    <p:cTn id="43" fill="hold">
+                      <p:stCondLst>
+                        <p:cond delay="indefinite"/>
+                      </p:stCondLst>
+                      <p:childTnLst>
+                        <p:par>
+                          <p:cTn id="44" fill="hold">
+                            <p:stCondLst>
+                              <p:cond delay="0"/>
+                            </p:stCondLst>
+                            <p:childTnLst>
+                              <p:par>
+                                <p:cTn id="42" presetID="42" presetClass="entr" presetSubtype="0" fill="hold" nodeType="clickEffect">
+                                  <p:stCondLst>
+                                    <p:cond delay="0"/>
+                                  </p:stCondLst>
+                                  <p:childTnLst>
+                                    <p:set>
+                                      <p:cBhvr>
+                                        <p:cTn id="38" dur="1" fill="hold">
+                                          <p:stCondLst>
+                                            <p:cond delay="0"/>
+                                          </p:stCondLst>
+                                        </p:cTn>
+                                        <p:tgtEl>
+                                          <p:spTgt spid="12"/>
+                                        </p:tgtEl>
+                                        <p:attrNameLst>
+                                          <p:attrName>style.visibility</p:attrName>
+                                        </p:attrNameLst>
+                                      </p:cBhvr>
+                                      <p:to>
+                                        <p:strVal val="visible"/>
+                                      </p:to>
+                                    </p:set>
+                                    <p:animEffect transition="in" filter="fade">
+                                      <p:cBhvr>
+                                        <p:cTn id="39" dur="500"/>
+                                        <p:tgtEl>
+                                          <p:spTgt spid="12"/>
+                                        </p:tgtEl>
+                                      </p:cBhvr>
+                                    </p:animEffect>
+                                    <p:anim calcmode="lin" valueType="num">
+                                      <p:cBhvr>
+                                        <p:cTn id="40" dur="500" fill="hold"/>
+                                        <p:tgtEl>
+                                          <p:spTgt spid="12"/>
+                                        </p:tgtEl>
+                                        <p:attrNameLst>
+                                          <p:attrName>ppt_x</p:attrName>
+                                        </p:attrNameLst>
+                                      </p:cBhvr>
+                                      <p:tavLst>
+                                        <p:tav tm="0">
+                                          <p:val>
+                                            <p:strVal val="#ppt_x"/>
+                                          </p:val>
+                                        </p:tav>
+                                        <p:tav tm="100000">
+                                          <p:val>
+                                            <p:strVal val="#ppt_x"/>
+                                          </p:val>
+                                        </p:tav>
+                                      </p:tavLst>
+                                    </p:anim>
+                                    <p:anim calcmode="lin" valueType="num">
+                                      <p:cBhvr>
+                                        <p:cTn id="41" dur="500" fill="hold"/>
+                                        <p:tgtEl>
+                                          <p:spTgt spid="12"/>
+                                        </p:tgtEl>
+                                        <p:attrNameLst>
+                                          <p:attrName>ppt_y</p:attrName>
+                                        </p:attrNameLst>
+                                      </p:cBhvr>
+                                      <p:tavLst>
+                                        <p:tav tm="0">
+                                          <p:val>
+                                            <p:strVal val="#ppt_y+.1"/>
+                                          </p:val>
+                                        </p:tav>
+                                        <p:tav tm="100000">
+                                          <p:val>
+                                            <p:strVal val="#ppt_y"/>
+                                          </p:val>
+                                        </p:tav>
+                                      </p:tavLst>
+                                    </p:anim>
+                                  </p:childTnLst>
+                                </p:cTn>
+                              </p:par>
+                            </p:childTnLst>
+                          </p:cTn>
+                        </p:par>
+                      </p:childTnLst>
+                    </p:cTn>
+                  </p:par>
+                  <p:par>
+                    <p:cTn id="50" fill="hold">
+                      <p:stCondLst>
+                        <p:cond delay="indefinite"/>
+                      </p:stCondLst>
+                      <p:childTnLst>
+                        <p:par>
+                          <p:cTn id="51" fill="hold">
+                            <p:stCondLst>
+                              <p:cond delay="0"/>
+                            </p:stCondLst>
+                            <p:childTnLst>
+                              <p:par>
+                                <p:cTn id="49" presetID="42" presetClass="entr" presetSubtype="0" fill="hold" nodeType="clickEffect">
+                                  <p:stCondLst>
+                                    <p:cond delay="0"/>
+                                  </p:stCondLst>
+                                  <p:childTnLst>
+                                    <p:set>
+                                      <p:cBhvr>
+                                        <p:cTn id="45" dur="1" fill="hold">
+                                          <p:stCondLst>
+                                            <p:cond delay="0"/>
+                                          </p:stCondLst>
+                                        </p:cTn>
+                                        <p:tgtEl>
+                                          <p:spTgt spid="13"/>
+                                        </p:tgtEl>
+                                        <p:attrNameLst>
+                                          <p:attrName>style.visibility</p:attrName>
+                                        </p:attrNameLst>
+                                      </p:cBhvr>
+                                      <p:to>
+                                        <p:strVal val="visible"/>
+                                      </p:to>
+                                    </p:set>
+                                    <p:animEffect transition="in" filter="fade">
+                                      <p:cBhvr>
+                                        <p:cTn id="46" dur="500"/>
+                                        <p:tgtEl>
+                                          <p:spTgt spid="13"/>
+                                        </p:tgtEl>
+                                      </p:cBhvr>
+                                    </p:animEffect>
+                                    <p:anim calcmode="lin" valueType="num">
+                                      <p:cBhvr>
+                                        <p:cTn id="47" dur="500" fill="hold"/>
+                                        <p:tgtEl>
+                                          <p:spTgt spid="13"/>
+                                        </p:tgtEl>
+                                        <p:attrNameLst>
+                                          <p:attrName>ppt_x</p:attrName>
+                                        </p:attrNameLst>
+                                      </p:cBhvr>
+                                      <p:tavLst>
+                                        <p:tav tm="0">
+                                          <p:val>
+                                            <p:strVal val="#ppt_x"/>
+                                          </p:val>
+                                        </p:tav>
+                                        <p:tav tm="100000">
+                                          <p:val>
+                                            <p:strVal val="#ppt_x"/>
+                                          </p:val>
+                                        </p:tav>
+                                      </p:tavLst>
+                                    </p:anim>
+                                    <p:anim calcmode="lin" valueType="num">
+                                      <p:cBhvr>
+                                        <p:cTn id="48" dur="500" fill="hold"/>
+                                        <p:tgtEl>
+                                          <p:spTgt spid="13"/>
+                                        </p:tgtEl>
+                                        <p:attrNameLst>
+                                          <p:attrName>ppt_y</p:attrName>
+                                        </p:attrNameLst>
+                                      </p:cBhvr>
+                                      <p:tavLst>
+                                        <p:tav tm="0">
+                                          <p:val>
+                                            <p:strVal val="#ppt_y+.1"/>
+                                          </p:val>
+                                        </p:tav>
+                                        <p:tav tm="100000">
+                                          <p:val>
+                                            <p:strVal val="#ppt_y"/>
+                                          </p:val>
+                                        </p:tav>
+                                      </p:tavLst>
+                                    </p:anim>
+                                  </p:childTnLst>
+                                </p:cTn>
+                              </p:par>
+                            </p:childTnLst>
+                          </p:cTn>
+                        </p:par>
+                      </p:childTnLst>
+                    </p:cTn>
+                  </p:par>
+                  <p:par>
+                    <p:cTn id="57" fill="hold">
+                      <p:stCondLst>
+                        <p:cond delay="indefinite"/>
+                      </p:stCondLst>
+                      <p:childTnLst>
+                        <p:par>
+                          <p:cTn id="58" fill="hold">
+                            <p:stCondLst>
+                              <p:cond delay="0"/>
+                            </p:stCondLst>
+                            <p:childTnLst>
+                              <p:par>
+                                <p:cTn id="56" presetID="53" presetClass="entr" presetSubtype="16" fill="hold" nodeType="clickEffect">
+                                  <p:stCondLst>
+                                    <p:cond delay="0"/>
+                                  </p:stCondLst>
+                                  <p:childTnLst>
+                                    <p:set>
+                                      <p:cBhvr>
+                                        <p:cTn id="52" dur="1" fill="hold">
+                                          <p:stCondLst>
+                                            <p:cond delay="0"/>
+                                          </p:stCondLst>
+                                        </p:cTn>
+                                        <p:tgtEl>
+                                          <p:spTgt spid="14"/>
+                                        </p:tgtEl>
+                                        <p:attrNameLst>
+                                          <p:attrName>style.visibility</p:attrName>
+                                        </p:attrNameLst>
+                                      </p:cBhvr>
+                                      <p:to>
+                                        <p:strVal val="visible"/>
+                                      </p:to>
+                                    </p:set>
+                                    <p:animEffect transition="in" filter="fade">
+                                      <p:cBhvr>
+                                        <p:cTn id="53" dur="500"/>
+                                        <p:tgtEl>
+                                          <p:spTgt spid="14"/>
+                                        </p:tgtEl>
+                                      </p:cBhvr>
+                                    </p:animEffect>
+                                    <p:anim calcmode="lin" valueType="num">
+                                      <p:cBhvr>
+                                        <p:cTn id="54" dur="500" fill="hold"/>
+                                        <p:tgtEl>
+                                          <p:spTgt spid="14"/>
+                                        </p:tgtEl>
+                                        <p:attrNameLst>
+                                          <p:attrName>ppt_w</p:attrName>
+                                        </p:attrNameLst>
+                                      </p:cBhvr>
+                                      <p:tavLst>
+                                        <p:tav tm="0">
+                                          <p:val>
+                                            <p:fltVal val="0"/>
+                                          </p:val>
+                                        </p:tav>
+                                        <p:tav tm="100000">
+                                          <p:val>
+                                            <p:strVal val="#ppt_w"/>
+                                          </p:val>
+                                        </p:tav>
+                                      </p:tavLst>
+                                    </p:anim>
+                                    <p:anim calcmode="lin" valueType="num">
+                                      <p:cBhvr>
+                                        <p:cTn id="55" dur="500" fill="hold"/>
+                                        <p:tgtEl>
+                                          <p:spTgt spid="14"/>
+                                        </p:tgtEl>
+                                        <p:attrNameLst>
+                                          <p:attrName>ppt_h</p:attrName>
+                                        </p:attrNameLst>
+                                      </p:cBhvr>
+                                      <p:tavLst>
+                                        <p:tav tm="0">
+                                          <p:val>
+                                            <p:fltVal val="0"/>
+                                          </p:val>
+                                        </p:tav>
+                                        <p:tav tm="100000">
+                                          <p:val>
+                                            <p:strVal val="#ppt_h"/>
+                                          </p:val>
+                                        </p:tav>
+                                      </p:tavLst>
+                                    </p:anim>
+                                  </p:childTnLst>
+                                </p:cTn>
+                              </p:par>
+                            </p:childTnLst>
+                          </p:cTn>
+                        </p:par>
+                      </p:childTnLst>
+                    </p:cTn>
+                  </p:par>
+                </p:childTnLst>
+              </p:cTn>
+              <p:prevCondLst>
+                <p:cond evt="onPrev" delay="0">
+                  <p:tgtEl>
+                    <p:sldTgt/>
+                  </p:tgtEl>
+                </p:cond>
+              </p:prevCondLst>
+              <p:nextCondLst>
+                <p:cond evt="onNext" delay="0">
+                  <p:tgtEl>
+                    <p:sldTgt/>
+                  </p:tgtEl>
+                </p:cond>
+              </p:nextCondLst>
+            </p:seq>
+          </p:childTnLst>
+        </p:cTn>
+      </p:par>
+    </p:tnLst>
+  </p:timing>
+</p:sld>
+</file>
+
+<file path=ppt/slides/slide12.xml><?xml version="1.0" encoding="utf-8"?>
+<p:sld xmlns:a="http://schemas.openxmlformats.org/drawingml/2006/main" xmlns:r="http://schemas.openxmlformats.org/officeDocument/2006/relationships" xmlns:p="http://schemas.openxmlformats.org/presentationml/2006/main">
+  <p:cSld>
+    <p:spTree>
+      <p:nvGrpSpPr>
+        <p:cNvPr id="1" name=""/>
+        <p:cNvGrpSpPr/>
+        <p:nvPr/>
+      </p:nvGrpSpPr>
+      <p:grpSpPr>
+        <a:xfrm>
+          <a:off x="0" y="0"/>
+          <a:ext cx="0" cy="0"/>
+          <a:chOff x="0" y="0"/>
+          <a:chExt cx="0" cy="0"/>
+        </a:xfrm>
+      </p:grpSpPr>
+      <p:sp>
+        <p:nvSpPr>
+          <p:cNvPr id="2" name="Shape 2"/>
+          <p:cNvSpPr txBox="1"/>
+          <p:nvPr/>
+        </p:nvSpPr>
+        <p:spPr>
+          <a:xfrm>
+            <a:off x="685800" y="457200"/>
+            <a:ext cx="10820095" cy="237744"/>
           </a:xfrm>
           <a:prstGeom prst="rect">
             <a:avLst/>
@@ -3373,6 +5661,134 @@
               </a:lnSpc>
             </a:pPr>
             <a:r>
+              <a:rPr lang="en-US" sz="1200" dirty="0" b="1" spc="150" cap="all">
+                <a:solidFill>
+                  <a:srgbClr val="5F6272"/>
+                </a:solidFill>
+                <a:latin typeface="Segoe UI"/>
+                <a:cs typeface="Segoe UI"/>
+              </a:rPr>
+              <a:t xml:space="preserve">We do · Parallel line</a:t>
+            </a:r>
+            <a:endParaRPr lang="en-US" sz="1200" dirty="0"/>
+          </a:p>
+        </p:txBody>
+      </p:sp>
+      <p:sp>
+        <p:nvSpPr>
+          <p:cNvPr id="3" name="Shape 3"/>
+          <p:cNvSpPr txBox="1"/>
+          <p:nvPr/>
+        </p:nvSpPr>
+        <p:spPr>
+          <a:xfrm>
+            <a:off x="685800" y="866394"/>
+            <a:ext cx="10820095" cy="580644"/>
+          </a:xfrm>
+          <a:prstGeom prst="rect">
+            <a:avLst/>
+          </a:prstGeom>
+          <a:noFill/>
+          <a:ln>
+            <a:noFill/>
+          </a:ln>
+        </p:spPr>
+        <p:txBody>
+          <a:bodyPr wrap="square" lIns="36576" tIns="27432" rIns="36576" bIns="27432" anchor="t">
+            <a:noAutofit/>
+          </a:bodyPr>
+          <a:lstStyle/>
+          <a:p>
+            <a:pPr algn="l">
+              <a:lnSpc>
+                <a:spcPct val="100000"/>
+              </a:lnSpc>
+            </a:pPr>
+            <a:r>
+              <a:rPr lang="en-US" sz="3450" dirty="0" b="1">
+                <a:solidFill>
+                  <a:srgbClr val="16171D"/>
+                </a:solidFill>
+                <a:latin typeface="Segoe UI"/>
+                <a:cs typeface="Segoe UI"/>
+              </a:rPr>
+              <a:t xml:space="preserve">Parallel to </a:t>
+            </a:r>
+            <a:r>
+              <a:rPr lang="en-US" sz="3450" dirty="0" b="1" i="1">
+                <a:solidFill>
+                  <a:srgbClr val="16171D"/>
+                </a:solidFill>
+                <a:latin typeface="Segoe UI"/>
+                <a:cs typeface="Segoe UI"/>
+              </a:rPr>
+              <a:t xml:space="preserve">y</a:t>
+            </a:r>
+            <a:r>
+              <a:rPr lang="en-US" sz="3450" dirty="0" b="1">
+                <a:solidFill>
+                  <a:srgbClr val="16171D"/>
+                </a:solidFill>
+                <a:latin typeface="Segoe UI"/>
+                <a:cs typeface="Segoe UI"/>
+              </a:rPr>
+              <a:t xml:space="preserve"> = −3</a:t>
+            </a:r>
+            <a:r>
+              <a:rPr lang="en-US" sz="3450" dirty="0" b="1" i="1">
+                <a:solidFill>
+                  <a:srgbClr val="16171D"/>
+                </a:solidFill>
+                <a:latin typeface="Segoe UI"/>
+                <a:cs typeface="Segoe UI"/>
+              </a:rPr>
+              <a:t xml:space="preserve">x</a:t>
+            </a:r>
+            <a:r>
+              <a:rPr lang="en-US" sz="3450" dirty="0" b="1">
+                <a:solidFill>
+                  <a:srgbClr val="16171D"/>
+                </a:solidFill>
+                <a:latin typeface="Segoe UI"/>
+                <a:cs typeface="Segoe UI"/>
+              </a:rPr>
+              <a:t xml:space="preserve"> − 1, through (−1, 5)</a:t>
+            </a:r>
+            <a:endParaRPr lang="en-US" sz="3450" dirty="0"/>
+          </a:p>
+        </p:txBody>
+      </p:sp>
+      <p:sp>
+        <p:nvSpPr>
+          <p:cNvPr id="4" name="Shape 4"/>
+          <p:cNvSpPr txBox="1"/>
+          <p:nvPr/>
+        </p:nvSpPr>
+        <p:spPr>
+          <a:xfrm>
+            <a:off x="685800" y="1618488"/>
+            <a:ext cx="10820095" cy="352044"/>
+          </a:xfrm>
+          <a:prstGeom prst="rect">
+            <a:avLst/>
+          </a:prstGeom>
+          <a:noFill/>
+          <a:ln>
+            <a:noFill/>
+          </a:ln>
+        </p:spPr>
+        <p:txBody>
+          <a:bodyPr wrap="square" lIns="36576" tIns="27432" rIns="36576" bIns="27432" anchor="t">
+            <a:noAutofit/>
+          </a:bodyPr>
+          <a:lstStyle/>
+          <a:p>
+            <a:pPr algn="l">
+              <a:lnSpc>
+                <a:spcPct val="100000"/>
+              </a:lnSpc>
+            </a:pPr>
+            <a:r>
               <a:rPr lang="en-US" sz="1950" dirty="0">
                 <a:solidFill>
                   <a:srgbClr val="16171D"/>
@@ -3380,7 +5796,27 @@
                 <a:latin typeface="Segoe UI"/>
                 <a:cs typeface="Segoe UI"/>
               </a:rPr>
-              <a:t xml:space="preserve">Step 3: write it.</a:t>
+              <a:t xml:space="preserve">Step 1: same slope. </a:t>
+            </a:r>
+            <a:r>
+              <a:rPr lang="en-US" sz="1950" dirty="0" i="1">
+                <a:solidFill>
+                  <a:srgbClr val="16171D"/>
+                </a:solidFill>
+                <a:latin typeface="Segoe UI"/>
+                <a:cs typeface="Segoe UI"/>
+              </a:rPr>
+              <a:t xml:space="preserve">m</a:t>
+            </a:r>
+            <a:r>
+              <a:rPr lang="en-US" sz="1950" dirty="0">
+                <a:solidFill>
+                  <a:srgbClr val="16171D"/>
+                </a:solidFill>
+                <a:latin typeface="Segoe UI"/>
+                <a:cs typeface="Segoe UI"/>
+              </a:rPr>
+              <a:t xml:space="preserve"> = ____</a:t>
             </a:r>
             <a:endParaRPr lang="en-US" sz="1950" dirty="0"/>
           </a:p>
@@ -3388,14 +5824,14 @@
       </p:sp>
       <p:sp>
         <p:nvSpPr>
-          <p:cNvPr id="9" name="Shape 9"/>
+          <p:cNvPr id="5" name="Shape 5"/>
           <p:cNvSpPr txBox="1"/>
           <p:nvPr/>
         </p:nvSpPr>
         <p:spPr>
           <a:xfrm>
-            <a:off x="685800" y="4569714"/>
-            <a:ext cx="3737153" cy="518922"/>
+            <a:off x="685800" y="2141982"/>
+            <a:ext cx="2908021" cy="518922"/>
           </a:xfrm>
           <a:prstGeom prst="roundRect">
             <a:avLst>
@@ -3438,6 +5874,270 @@
                 <a:latin typeface="Cambria"/>
                 <a:cs typeface="Cambria"/>
               </a:rPr>
+              <a:t xml:space="preserve">m</a:t>
+            </a:r>
+            <a:r>
+              <a:rPr lang="en-US" sz="2325" dirty="0">
+                <a:solidFill>
+                  <a:srgbClr val="16171D"/>
+                </a:solidFill>
+                <a:latin typeface="Cambria"/>
+                <a:cs typeface="Cambria"/>
+              </a:rPr>
+              <a:t xml:space="preserve"> = −3</a:t>
+            </a:r>
+            <a:endParaRPr lang="en-US" sz="2325" dirty="0"/>
+          </a:p>
+        </p:txBody>
+      </p:sp>
+      <p:sp>
+        <p:nvSpPr>
+          <p:cNvPr id="6" name="Shape 6"/>
+          <p:cNvSpPr txBox="1"/>
+          <p:nvPr/>
+        </p:nvSpPr>
+        <p:spPr>
+          <a:xfrm>
+            <a:off x="685800" y="2832354"/>
+            <a:ext cx="10820095" cy="352044"/>
+          </a:xfrm>
+          <a:prstGeom prst="rect">
+            <a:avLst/>
+          </a:prstGeom>
+          <a:noFill/>
+          <a:ln>
+            <a:noFill/>
+          </a:ln>
+        </p:spPr>
+        <p:txBody>
+          <a:bodyPr wrap="square" lIns="36576" tIns="27432" rIns="36576" bIns="27432" anchor="t">
+            <a:noAutofit/>
+          </a:bodyPr>
+          <a:lstStyle/>
+          <a:p>
+            <a:pPr algn="l">
+              <a:lnSpc>
+                <a:spcPct val="100000"/>
+              </a:lnSpc>
+            </a:pPr>
+            <a:r>
+              <a:rPr lang="en-US" sz="1950" dirty="0">
+                <a:solidFill>
+                  <a:srgbClr val="16171D"/>
+                </a:solidFill>
+                <a:latin typeface="Segoe UI"/>
+                <a:cs typeface="Segoe UI"/>
+              </a:rPr>
+              <a:t xml:space="preserve">Step 2: 5 = −3(−1) + </a:t>
+            </a:r>
+            <a:r>
+              <a:rPr lang="en-US" sz="1950" dirty="0" i="1">
+                <a:solidFill>
+                  <a:srgbClr val="16171D"/>
+                </a:solidFill>
+                <a:latin typeface="Segoe UI"/>
+                <a:cs typeface="Segoe UI"/>
+              </a:rPr>
+              <a:t xml:space="preserve">b</a:t>
+            </a:r>
+            <a:r>
+              <a:rPr lang="en-US" sz="1950" dirty="0">
+                <a:solidFill>
+                  <a:srgbClr val="16171D"/>
+                </a:solidFill>
+                <a:latin typeface="Segoe UI"/>
+                <a:cs typeface="Segoe UI"/>
+              </a:rPr>
+              <a:t xml:space="preserve">, so </a:t>
+            </a:r>
+            <a:r>
+              <a:rPr lang="en-US" sz="1950" dirty="0" i="1">
+                <a:solidFill>
+                  <a:srgbClr val="16171D"/>
+                </a:solidFill>
+                <a:latin typeface="Segoe UI"/>
+                <a:cs typeface="Segoe UI"/>
+              </a:rPr>
+              <a:t xml:space="preserve">b</a:t>
+            </a:r>
+            <a:r>
+              <a:rPr lang="en-US" sz="1950" dirty="0">
+                <a:solidFill>
+                  <a:srgbClr val="16171D"/>
+                </a:solidFill>
+                <a:latin typeface="Segoe UI"/>
+                <a:cs typeface="Segoe UI"/>
+              </a:rPr>
+              <a:t xml:space="preserve"> = ____</a:t>
+            </a:r>
+            <a:endParaRPr lang="en-US" sz="1950" dirty="0"/>
+          </a:p>
+        </p:txBody>
+      </p:sp>
+      <p:sp>
+        <p:nvSpPr>
+          <p:cNvPr id="7" name="Shape 7"/>
+          <p:cNvSpPr txBox="1"/>
+          <p:nvPr/>
+        </p:nvSpPr>
+        <p:spPr>
+          <a:xfrm>
+            <a:off x="685800" y="3355848"/>
+            <a:ext cx="2742194" cy="518922"/>
+          </a:xfrm>
+          <a:prstGeom prst="roundRect">
+            <a:avLst>
+              <a:gd name="adj" fmla="val 8000"/>
+            </a:avLst>
+          </a:prstGeom>
+          <a:solidFill>
+            <a:srgbClr val="EDF5E9"/>
+          </a:solidFill>
+          <a:ln>
+            <a:noFill/>
+          </a:ln>
+        </p:spPr>
+        <p:txBody>
+          <a:bodyPr wrap="square" lIns="164592" tIns="64008" rIns="164592" bIns="64008" anchor="ctr">
+            <a:noAutofit/>
+          </a:bodyPr>
+          <a:lstStyle/>
+          <a:p>
+            <a:pPr algn="l">
+              <a:lnSpc>
+                <a:spcPct val="100000"/>
+              </a:lnSpc>
+            </a:pPr>
+            <a:r>
+              <a:rPr lang="en-US" sz="1125" dirty="0" b="1" spc="100">
+                <a:solidFill>
+                  <a:srgbClr val="4F8A3C"/>
+                </a:solidFill>
+                <a:latin typeface="Segoe UI"/>
+                <a:cs typeface="Segoe UI"/>
+              </a:rPr>
+              <a:t xml:space="preserve">ANSWER   </a:t>
+            </a:r>
+            <a:r>
+              <a:rPr lang="en-US" sz="2325" dirty="0" i="1">
+                <a:solidFill>
+                  <a:srgbClr val="16171D"/>
+                </a:solidFill>
+                <a:latin typeface="Cambria"/>
+                <a:cs typeface="Cambria"/>
+              </a:rPr>
+              <a:t xml:space="preserve">b</a:t>
+            </a:r>
+            <a:r>
+              <a:rPr lang="en-US" sz="2325" dirty="0">
+                <a:solidFill>
+                  <a:srgbClr val="16171D"/>
+                </a:solidFill>
+                <a:latin typeface="Cambria"/>
+                <a:cs typeface="Cambria"/>
+              </a:rPr>
+              <a:t xml:space="preserve"> = 2</a:t>
+            </a:r>
+            <a:endParaRPr lang="en-US" sz="2325" dirty="0"/>
+          </a:p>
+        </p:txBody>
+      </p:sp>
+      <p:sp>
+        <p:nvSpPr>
+          <p:cNvPr id="8" name="Shape 8"/>
+          <p:cNvSpPr txBox="1"/>
+          <p:nvPr/>
+        </p:nvSpPr>
+        <p:spPr>
+          <a:xfrm>
+            <a:off x="685800" y="4046220"/>
+            <a:ext cx="10820095" cy="352044"/>
+          </a:xfrm>
+          <a:prstGeom prst="rect">
+            <a:avLst/>
+          </a:prstGeom>
+          <a:noFill/>
+          <a:ln>
+            <a:noFill/>
+          </a:ln>
+        </p:spPr>
+        <p:txBody>
+          <a:bodyPr wrap="square" lIns="36576" tIns="27432" rIns="36576" bIns="27432" anchor="t">
+            <a:noAutofit/>
+          </a:bodyPr>
+          <a:lstStyle/>
+          <a:p>
+            <a:pPr algn="l">
+              <a:lnSpc>
+                <a:spcPct val="100000"/>
+              </a:lnSpc>
+            </a:pPr>
+            <a:r>
+              <a:rPr lang="en-US" sz="1950" dirty="0">
+                <a:solidFill>
+                  <a:srgbClr val="16171D"/>
+                </a:solidFill>
+                <a:latin typeface="Segoe UI"/>
+                <a:cs typeface="Segoe UI"/>
+              </a:rPr>
+              <a:t xml:space="preserve">Step 3: write it.</a:t>
+            </a:r>
+            <a:endParaRPr lang="en-US" sz="1950" dirty="0"/>
+          </a:p>
+        </p:txBody>
+      </p:sp>
+      <p:sp>
+        <p:nvSpPr>
+          <p:cNvPr id="9" name="Shape 9"/>
+          <p:cNvSpPr txBox="1"/>
+          <p:nvPr/>
+        </p:nvSpPr>
+        <p:spPr>
+          <a:xfrm>
+            <a:off x="685800" y="4569714"/>
+            <a:ext cx="3737153" cy="518922"/>
+          </a:xfrm>
+          <a:prstGeom prst="roundRect">
+            <a:avLst>
+              <a:gd name="adj" fmla="val 8000"/>
+            </a:avLst>
+          </a:prstGeom>
+          <a:solidFill>
+            <a:srgbClr val="EDF5E9"/>
+          </a:solidFill>
+          <a:ln>
+            <a:noFill/>
+          </a:ln>
+        </p:spPr>
+        <p:txBody>
+          <a:bodyPr wrap="square" lIns="164592" tIns="64008" rIns="164592" bIns="64008" anchor="ctr">
+            <a:noAutofit/>
+          </a:bodyPr>
+          <a:lstStyle/>
+          <a:p>
+            <a:pPr algn="l">
+              <a:lnSpc>
+                <a:spcPct val="100000"/>
+              </a:lnSpc>
+            </a:pPr>
+            <a:r>
+              <a:rPr lang="en-US" sz="1125" dirty="0" b="1" spc="100">
+                <a:solidFill>
+                  <a:srgbClr val="4F8A3C"/>
+                </a:solidFill>
+                <a:latin typeface="Segoe UI"/>
+                <a:cs typeface="Segoe UI"/>
+              </a:rPr>
+              <a:t xml:space="preserve">ANSWER   </a:t>
+            </a:r>
+            <a:r>
+              <a:rPr lang="en-US" sz="2325" dirty="0" i="1">
+                <a:solidFill>
+                  <a:srgbClr val="16171D"/>
+                </a:solidFill>
+                <a:latin typeface="Cambria"/>
+                <a:cs typeface="Cambria"/>
+              </a:rPr>
               <a:t xml:space="preserve">y</a:t>
             </a:r>
             <a:r>
@@ -3503,7 +6203,7 @@
                   <a:srgbClr val="5F6272"/>
                 </a:solidFill>
               </a:rPr>
-              <a:t>11</a:t>
+              <a:t>12</a:t>
             </a:fld>
           </a:p>
         </p:txBody>
@@ -3846,7 +6546,7 @@
 </p:sld>
 </file>
 
-<file path=ppt/slides/slide12.xml><?xml version="1.0" encoding="utf-8"?>
+<file path=ppt/slides/slide13.xml><?xml version="1.0" encoding="utf-8"?>
 <p:sld xmlns:a="http://schemas.openxmlformats.org/drawingml/2006/main" xmlns:r="http://schemas.openxmlformats.org/officeDocument/2006/relationships" xmlns:p="http://schemas.openxmlformats.org/presentationml/2006/main">
   <p:cSld>
     <p:spTree>
@@ -4408,7 +7108,7 @@
                   <a:srgbClr val="5F6272"/>
                 </a:solidFill>
               </a:rPr>
-              <a:t>12</a:t>
+              <a:t>13</a:t>
             </a:fld>
           </a:p>
         </p:txBody>
@@ -4652,7 +7352,7 @@
 </p:sld>
 </file>
 
-<file path=ppt/slides/slide13.xml><?xml version="1.0" encoding="utf-8"?>
+<file path=ppt/slides/slide14.xml><?xml version="1.0" encoding="utf-8"?>
 <p:sld xmlns:a="http://schemas.openxmlformats.org/drawingml/2006/main" xmlns:r="http://schemas.openxmlformats.org/officeDocument/2006/relationships" xmlns:p="http://schemas.openxmlformats.org/presentationml/2006/main">
   <p:cSld>
     <p:spTree>
@@ -4707,7 +7407,7 @@
                 <a:latin typeface="Segoe UI"/>
                 <a:cs typeface="Segoe UI"/>
               </a:rPr>
-              <a:t xml:space="preserve">Exit Ticket</a:t>
+              <a:t xml:space="preserve">Check it · Step by step</a:t>
             </a:r>
             <a:endParaRPr lang="en-US" sz="1200" dirty="0"/>
           </a:p>
@@ -4751,7 +7451,37 @@
                 <a:latin typeface="Segoe UI"/>
                 <a:cs typeface="Segoe UI"/>
               </a:rPr>
-              <a:t xml:space="preserve">Show what you know</a:t>
+              <a:t xml:space="preserve">Parallel to </a:t>
+            </a:r>
+            <a:r>
+              <a:rPr lang="en-US" sz="3450" dirty="0" b="1" i="1">
+                <a:solidFill>
+                  <a:srgbClr val="16171D"/>
+                </a:solidFill>
+                <a:latin typeface="Segoe UI"/>
+                <a:cs typeface="Segoe UI"/>
+              </a:rPr>
+              <a:t xml:space="preserve">y</a:t>
+            </a:r>
+            <a:r>
+              <a:rPr lang="en-US" sz="3450" dirty="0" b="1">
+                <a:solidFill>
+                  <a:srgbClr val="16171D"/>
+                </a:solidFill>
+                <a:latin typeface="Segoe UI"/>
+                <a:cs typeface="Segoe UI"/>
+              </a:rPr>
+              <a:t xml:space="preserve"> = 2</a:t>
+            </a:r>
+            <a:r>
+              <a:rPr lang="en-US" sz="3450" dirty="0" b="1" i="1">
+                <a:solidFill>
+                  <a:srgbClr val="16171D"/>
+                </a:solidFill>
+                <a:latin typeface="Segoe UI"/>
+                <a:cs typeface="Segoe UI"/>
+              </a:rPr>
+              <a:t xml:space="preserve">x</a:t>
             </a:r>
             <a:endParaRPr lang="en-US" sz="3450" dirty="0"/>
           </a:p>
@@ -4759,14 +7489,14 @@
       </p:sp>
       <p:sp>
         <p:nvSpPr>
-          <p:cNvPr id="6" name="Shape 6"/>
+          <p:cNvPr id="10" name="Shape 10"/>
           <p:cNvSpPr txBox="1"/>
           <p:nvPr/>
         </p:nvSpPr>
         <p:spPr>
           <a:xfrm>
             <a:off x="685800" y="1618488"/>
-            <a:ext cx="10820095" cy="1309116"/>
+            <a:ext cx="5295748" cy="3132582"/>
           </a:xfrm>
           <a:prstGeom prst="roundRect">
             <a:avLst>
@@ -4806,7 +7536,7 @@
         <p:spPr>
           <a:xfrm>
             <a:off x="895350" y="1789938"/>
-            <a:ext cx="10400995" cy="352044"/>
+            <a:ext cx="4876648" cy="374904"/>
           </a:xfrm>
           <a:prstGeom prst="rect">
             <a:avLst/>
@@ -4828,96 +7558,16 @@
               </a:lnSpc>
             </a:pPr>
             <a:r>
-              <a:rPr lang="en-US" sz="1950" dirty="0">
-                <a:solidFill>
-                  <a:srgbClr val="16171D"/>
-                </a:solidFill>
-                <a:latin typeface="Segoe UI"/>
-                <a:cs typeface="Segoe UI"/>
-              </a:rPr>
-              <a:t xml:space="preserve">1. </a:t>
-            </a:r>
-            <a:r>
-              <a:rPr lang="en-US" sz="1950" dirty="0" i="1">
-                <a:solidFill>
-                  <a:srgbClr val="16171D"/>
-                </a:solidFill>
-                <a:latin typeface="Segoe UI"/>
-                <a:cs typeface="Segoe UI"/>
-              </a:rPr>
-              <a:t xml:space="preserve">g</a:t>
-            </a:r>
-            <a:r>
-              <a:rPr lang="en-US" sz="1950" dirty="0">
-                <a:solidFill>
-                  <a:srgbClr val="16171D"/>
-                </a:solidFill>
-                <a:latin typeface="Segoe UI"/>
-                <a:cs typeface="Segoe UI"/>
-              </a:rPr>
-              <a:t xml:space="preserve">(</a:t>
-            </a:r>
-            <a:r>
-              <a:rPr lang="en-US" sz="1950" dirty="0" i="1">
-                <a:solidFill>
-                  <a:srgbClr val="16171D"/>
-                </a:solidFill>
-                <a:latin typeface="Segoe UI"/>
-                <a:cs typeface="Segoe UI"/>
-              </a:rPr>
-              <a:t xml:space="preserve">x</a:t>
-            </a:r>
-            <a:r>
-              <a:rPr lang="en-US" sz="1950" dirty="0">
-                <a:solidFill>
-                  <a:srgbClr val="16171D"/>
-                </a:solidFill>
-                <a:latin typeface="Segoe UI"/>
-                <a:cs typeface="Segoe UI"/>
-              </a:rPr>
-              <a:t xml:space="preserve">) = </a:t>
-            </a:r>
-            <a:r>
-              <a:rPr lang="en-US" sz="1950" dirty="0" i="1">
-                <a:solidFill>
-                  <a:srgbClr val="16171D"/>
-                </a:solidFill>
-                <a:latin typeface="Segoe UI"/>
-                <a:cs typeface="Segoe UI"/>
-              </a:rPr>
-              <a:t xml:space="preserve">f</a:t>
-            </a:r>
-            <a:r>
-              <a:rPr lang="en-US" sz="1950" dirty="0">
-                <a:solidFill>
-                  <a:srgbClr val="16171D"/>
-                </a:solidFill>
-                <a:latin typeface="Segoe UI"/>
-                <a:cs typeface="Segoe UI"/>
-              </a:rPr>
-              <a:t xml:space="preserve">(</a:t>
-            </a:r>
-            <a:r>
-              <a:rPr lang="en-US" sz="1950" dirty="0" i="1">
-                <a:solidFill>
-                  <a:srgbClr val="16171D"/>
-                </a:solidFill>
-                <a:latin typeface="Segoe UI"/>
-                <a:cs typeface="Segoe UI"/>
-              </a:rPr>
-              <a:t xml:space="preserve">x</a:t>
-            </a:r>
-            <a:r>
-              <a:rPr lang="en-US" sz="1950" dirty="0">
-                <a:solidFill>
-                  <a:srgbClr val="16171D"/>
-                </a:solidFill>
-                <a:latin typeface="Segoe UI"/>
-                <a:cs typeface="Segoe UI"/>
-              </a:rPr>
-              <a:t xml:space="preserve">) + 6. Up or down? How far?</a:t>
-            </a:r>
-            <a:endParaRPr lang="en-US" sz="1950" dirty="0"/>
+              <a:rPr lang="en-US" sz="2100" dirty="0" b="1">
+                <a:solidFill>
+                  <a:srgbClr val="16171D"/>
+                </a:solidFill>
+                <a:latin typeface="Segoe UI"/>
+                <a:cs typeface="Segoe UI"/>
+              </a:rPr>
+              <a:t xml:space="preserve">1. Through (0, 4)</a:t>
+            </a:r>
+            <a:endParaRPr lang="en-US" sz="2100" dirty="0"/>
           </a:p>
         </p:txBody>
       </p:sp>
@@ -4929,8 +7579,464 @@
         </p:nvSpPr>
         <p:spPr>
           <a:xfrm>
-            <a:off x="895350" y="2237232"/>
-            <a:ext cx="2576368" cy="518922"/>
+            <a:off x="895350" y="2260092"/>
+            <a:ext cx="4876648" cy="294894"/>
+          </a:xfrm>
+          <a:prstGeom prst="rect">
+            <a:avLst/>
+          </a:prstGeom>
+          <a:noFill/>
+          <a:ln>
+            <a:noFill/>
+          </a:ln>
+        </p:spPr>
+        <p:txBody>
+          <a:bodyPr wrap="square" lIns="36576" tIns="27432" rIns="36576" bIns="27432" anchor="t">
+            <a:noAutofit/>
+          </a:bodyPr>
+          <a:lstStyle/>
+          <a:p>
+            <a:pPr algn="l">
+              <a:lnSpc>
+                <a:spcPct val="100000"/>
+              </a:lnSpc>
+            </a:pPr>
+            <a:r>
+              <a:rPr lang="en-US" sz="1575" dirty="0" b="1">
+                <a:solidFill>
+                  <a:srgbClr val="16171D"/>
+                </a:solidFill>
+                <a:latin typeface="Segoe UI"/>
+                <a:cs typeface="Segoe UI"/>
+              </a:rPr>
+              <a:t xml:space="preserve">Step 1.</a:t>
+            </a:r>
+            <a:r>
+              <a:rPr lang="en-US" sz="1575" dirty="0">
+                <a:solidFill>
+                  <a:srgbClr val="16171D"/>
+                </a:solidFill>
+                <a:latin typeface="Segoe UI"/>
+                <a:cs typeface="Segoe UI"/>
+              </a:rPr>
+              <a:t xml:space="preserve"> Parallel means the </a:t>
+            </a:r>
+            <a:r>
+              <a:rPr lang="en-US" sz="1575" dirty="0" b="1">
+                <a:solidFill>
+                  <a:srgbClr val="16171D"/>
+                </a:solidFill>
+                <a:latin typeface="Segoe UI"/>
+                <a:cs typeface="Segoe UI"/>
+              </a:rPr>
+              <a:t xml:space="preserve">same slope</a:t>
+            </a:r>
+            <a:r>
+              <a:rPr lang="en-US" sz="1575" dirty="0">
+                <a:solidFill>
+                  <a:srgbClr val="16171D"/>
+                </a:solidFill>
+                <a:latin typeface="Segoe UI"/>
+                <a:cs typeface="Segoe UI"/>
+              </a:rPr>
+              <a:t xml:space="preserve">: </a:t>
+            </a:r>
+            <a:r>
+              <a:rPr lang="en-US" sz="1575" dirty="0" i="1">
+                <a:solidFill>
+                  <a:srgbClr val="16171D"/>
+                </a:solidFill>
+                <a:latin typeface="Segoe UI"/>
+                <a:cs typeface="Segoe UI"/>
+              </a:rPr>
+              <a:t xml:space="preserve">m</a:t>
+            </a:r>
+            <a:r>
+              <a:rPr lang="en-US" sz="1575" dirty="0">
+                <a:solidFill>
+                  <a:srgbClr val="16171D"/>
+                </a:solidFill>
+                <a:latin typeface="Segoe UI"/>
+                <a:cs typeface="Segoe UI"/>
+              </a:rPr>
+              <a:t xml:space="preserve"> = 2.</a:t>
+            </a:r>
+            <a:endParaRPr lang="en-US" sz="1575" dirty="0"/>
+          </a:p>
+        </p:txBody>
+      </p:sp>
+      <p:sp>
+        <p:nvSpPr>
+          <p:cNvPr id="6" name="Shape 6"/>
+          <p:cNvSpPr txBox="1"/>
+          <p:nvPr/>
+        </p:nvSpPr>
+        <p:spPr>
+          <a:xfrm>
+            <a:off x="895350" y="2650236"/>
+            <a:ext cx="4876648" cy="534924"/>
+          </a:xfrm>
+          <a:prstGeom prst="rect">
+            <a:avLst/>
+          </a:prstGeom>
+          <a:noFill/>
+          <a:ln>
+            <a:noFill/>
+          </a:ln>
+        </p:spPr>
+        <p:txBody>
+          <a:bodyPr wrap="square" lIns="36576" tIns="27432" rIns="36576" bIns="27432" anchor="t">
+            <a:noAutofit/>
+          </a:bodyPr>
+          <a:lstStyle/>
+          <a:p>
+            <a:pPr algn="l">
+              <a:lnSpc>
+                <a:spcPct val="100000"/>
+              </a:lnSpc>
+            </a:pPr>
+            <a:r>
+              <a:rPr lang="en-US" sz="1575" dirty="0" b="1">
+                <a:solidFill>
+                  <a:srgbClr val="16171D"/>
+                </a:solidFill>
+                <a:latin typeface="Segoe UI"/>
+                <a:cs typeface="Segoe UI"/>
+              </a:rPr>
+              <a:t xml:space="preserve">Step 2.</a:t>
+            </a:r>
+            <a:r>
+              <a:rPr lang="en-US" sz="1575" dirty="0">
+                <a:solidFill>
+                  <a:srgbClr val="16171D"/>
+                </a:solidFill>
+                <a:latin typeface="Segoe UI"/>
+                <a:cs typeface="Segoe UI"/>
+              </a:rPr>
+              <a:t xml:space="preserve"> Put </a:t>
+            </a:r>
+            <a:r>
+              <a:rPr lang="en-US" sz="1575" dirty="0" i="1">
+                <a:solidFill>
+                  <a:srgbClr val="16171D"/>
+                </a:solidFill>
+                <a:latin typeface="Segoe UI"/>
+                <a:cs typeface="Segoe UI"/>
+              </a:rPr>
+              <a:t xml:space="preserve">x</a:t>
+            </a:r>
+            <a:r>
+              <a:rPr lang="en-US" sz="1575" dirty="0">
+                <a:solidFill>
+                  <a:srgbClr val="16171D"/>
+                </a:solidFill>
+                <a:latin typeface="Segoe UI"/>
+                <a:cs typeface="Segoe UI"/>
+              </a:rPr>
+              <a:t xml:space="preserve"> = 0 and </a:t>
+            </a:r>
+            <a:r>
+              <a:rPr lang="en-US" sz="1575" dirty="0" i="1">
+                <a:solidFill>
+                  <a:srgbClr val="16171D"/>
+                </a:solidFill>
+                <a:latin typeface="Segoe UI"/>
+                <a:cs typeface="Segoe UI"/>
+              </a:rPr>
+              <a:t xml:space="preserve">y</a:t>
+            </a:r>
+            <a:r>
+              <a:rPr lang="en-US" sz="1575" dirty="0">
+                <a:solidFill>
+                  <a:srgbClr val="16171D"/>
+                </a:solidFill>
+                <a:latin typeface="Segoe UI"/>
+                <a:cs typeface="Segoe UI"/>
+              </a:rPr>
+              <a:t xml:space="preserve"> = 4 into </a:t>
+            </a:r>
+            <a:r>
+              <a:rPr lang="en-US" sz="1575" dirty="0" i="1">
+                <a:solidFill>
+                  <a:srgbClr val="16171D"/>
+                </a:solidFill>
+                <a:latin typeface="Segoe UI"/>
+                <a:cs typeface="Segoe UI"/>
+              </a:rPr>
+              <a:t xml:space="preserve">y</a:t>
+            </a:r>
+            <a:r>
+              <a:rPr lang="en-US" sz="1575" dirty="0">
+                <a:solidFill>
+                  <a:srgbClr val="16171D"/>
+                </a:solidFill>
+                <a:latin typeface="Segoe UI"/>
+                <a:cs typeface="Segoe UI"/>
+              </a:rPr>
+              <a:t xml:space="preserve"> = </a:t>
+            </a:r>
+            <a:r>
+              <a:rPr lang="en-US" sz="1575" dirty="0" i="1">
+                <a:solidFill>
+                  <a:srgbClr val="16171D"/>
+                </a:solidFill>
+                <a:latin typeface="Segoe UI"/>
+                <a:cs typeface="Segoe UI"/>
+              </a:rPr>
+              <a:t xml:space="preserve">mx</a:t>
+            </a:r>
+            <a:r>
+              <a:rPr lang="en-US" sz="1575" dirty="0">
+                <a:solidFill>
+                  <a:srgbClr val="16171D"/>
+                </a:solidFill>
+                <a:latin typeface="Segoe UI"/>
+                <a:cs typeface="Segoe UI"/>
+              </a:rPr>
+              <a:t xml:space="preserve"> + </a:t>
+            </a:r>
+            <a:r>
+              <a:rPr lang="en-US" sz="1575" dirty="0" i="1">
+                <a:solidFill>
+                  <a:srgbClr val="16171D"/>
+                </a:solidFill>
+                <a:latin typeface="Segoe UI"/>
+                <a:cs typeface="Segoe UI"/>
+              </a:rPr>
+              <a:t xml:space="preserve">b</a:t>
+            </a:r>
+            <a:r>
+              <a:rPr lang="en-US" sz="1575" dirty="0">
+                <a:solidFill>
+                  <a:srgbClr val="16171D"/>
+                </a:solidFill>
+                <a:latin typeface="Segoe UI"/>
+                <a:cs typeface="Segoe UI"/>
+              </a:rPr>
+              <a:t xml:space="preserve">: 4 = 2(0) + </a:t>
+            </a:r>
+            <a:r>
+              <a:rPr lang="en-US" sz="1575" dirty="0" i="1">
+                <a:solidFill>
+                  <a:srgbClr val="16171D"/>
+                </a:solidFill>
+                <a:latin typeface="Segoe UI"/>
+                <a:cs typeface="Segoe UI"/>
+              </a:rPr>
+              <a:t xml:space="preserve">b</a:t>
+            </a:r>
+            <a:r>
+              <a:rPr lang="en-US" sz="1575" dirty="0">
+                <a:solidFill>
+                  <a:srgbClr val="16171D"/>
+                </a:solidFill>
+                <a:latin typeface="Segoe UI"/>
+                <a:cs typeface="Segoe UI"/>
+              </a:rPr>
+              <a:t xml:space="preserve">.</a:t>
+            </a:r>
+            <a:endParaRPr lang="en-US" sz="1575" dirty="0"/>
+          </a:p>
+        </p:txBody>
+      </p:sp>
+      <p:sp>
+        <p:nvSpPr>
+          <p:cNvPr id="7" name="Shape 7"/>
+          <p:cNvSpPr txBox="1"/>
+          <p:nvPr/>
+        </p:nvSpPr>
+        <p:spPr>
+          <a:xfrm>
+            <a:off x="895350" y="3280410"/>
+            <a:ext cx="4876648" cy="294894"/>
+          </a:xfrm>
+          <a:prstGeom prst="rect">
+            <a:avLst/>
+          </a:prstGeom>
+          <a:noFill/>
+          <a:ln>
+            <a:noFill/>
+          </a:ln>
+        </p:spPr>
+        <p:txBody>
+          <a:bodyPr wrap="square" lIns="36576" tIns="27432" rIns="36576" bIns="27432" anchor="t">
+            <a:noAutofit/>
+          </a:bodyPr>
+          <a:lstStyle/>
+          <a:p>
+            <a:pPr algn="l">
+              <a:lnSpc>
+                <a:spcPct val="100000"/>
+              </a:lnSpc>
+            </a:pPr>
+            <a:r>
+              <a:rPr lang="en-US" sz="1575" dirty="0" b="1">
+                <a:solidFill>
+                  <a:srgbClr val="16171D"/>
+                </a:solidFill>
+                <a:latin typeface="Segoe UI"/>
+                <a:cs typeface="Segoe UI"/>
+              </a:rPr>
+              <a:t xml:space="preserve">Step 3.</a:t>
+            </a:r>
+            <a:r>
+              <a:rPr lang="en-US" sz="1575" dirty="0">
+                <a:solidFill>
+                  <a:srgbClr val="16171D"/>
+                </a:solidFill>
+                <a:latin typeface="Segoe UI"/>
+                <a:cs typeface="Segoe UI"/>
+              </a:rPr>
+              <a:t xml:space="preserve"> 2(0) = 0, so 4 = </a:t>
+            </a:r>
+            <a:r>
+              <a:rPr lang="en-US" sz="1575" dirty="0" i="1">
+                <a:solidFill>
+                  <a:srgbClr val="16171D"/>
+                </a:solidFill>
+                <a:latin typeface="Segoe UI"/>
+                <a:cs typeface="Segoe UI"/>
+              </a:rPr>
+              <a:t xml:space="preserve">b</a:t>
+            </a:r>
+            <a:r>
+              <a:rPr lang="en-US" sz="1575" dirty="0">
+                <a:solidFill>
+                  <a:srgbClr val="16171D"/>
+                </a:solidFill>
+                <a:latin typeface="Segoe UI"/>
+                <a:cs typeface="Segoe UI"/>
+              </a:rPr>
+              <a:t xml:space="preserve">.</a:t>
+            </a:r>
+            <a:endParaRPr lang="en-US" sz="1575" dirty="0"/>
+          </a:p>
+        </p:txBody>
+      </p:sp>
+      <p:sp>
+        <p:nvSpPr>
+          <p:cNvPr id="8" name="Shape 8"/>
+          <p:cNvSpPr txBox="1"/>
+          <p:nvPr/>
+        </p:nvSpPr>
+        <p:spPr>
+          <a:xfrm>
+            <a:off x="895350" y="3670554"/>
+            <a:ext cx="4876648" cy="294894"/>
+          </a:xfrm>
+          <a:prstGeom prst="rect">
+            <a:avLst/>
+          </a:prstGeom>
+          <a:noFill/>
+          <a:ln>
+            <a:noFill/>
+          </a:ln>
+        </p:spPr>
+        <p:txBody>
+          <a:bodyPr wrap="square" lIns="36576" tIns="27432" rIns="36576" bIns="27432" anchor="t">
+            <a:noAutofit/>
+          </a:bodyPr>
+          <a:lstStyle/>
+          <a:p>
+            <a:pPr algn="l">
+              <a:lnSpc>
+                <a:spcPct val="100000"/>
+              </a:lnSpc>
+            </a:pPr>
+            <a:r>
+              <a:rPr lang="en-US" sz="1575" dirty="0" b="1">
+                <a:solidFill>
+                  <a:srgbClr val="16171D"/>
+                </a:solidFill>
+                <a:latin typeface="Segoe UI"/>
+                <a:cs typeface="Segoe UI"/>
+              </a:rPr>
+              <a:t xml:space="preserve">Step 4.</a:t>
+            </a:r>
+            <a:r>
+              <a:rPr lang="en-US" sz="1575" dirty="0">
+                <a:solidFill>
+                  <a:srgbClr val="16171D"/>
+                </a:solidFill>
+                <a:latin typeface="Segoe UI"/>
+                <a:cs typeface="Segoe UI"/>
+              </a:rPr>
+              <a:t xml:space="preserve"> Write the slope and </a:t>
+            </a:r>
+            <a:r>
+              <a:rPr lang="en-US" sz="1575" dirty="0" i="1">
+                <a:solidFill>
+                  <a:srgbClr val="16171D"/>
+                </a:solidFill>
+                <a:latin typeface="Segoe UI"/>
+                <a:cs typeface="Segoe UI"/>
+              </a:rPr>
+              <a:t xml:space="preserve">b</a:t>
+            </a:r>
+            <a:r>
+              <a:rPr lang="en-US" sz="1575" dirty="0">
+                <a:solidFill>
+                  <a:srgbClr val="16171D"/>
+                </a:solidFill>
+                <a:latin typeface="Segoe UI"/>
+                <a:cs typeface="Segoe UI"/>
+              </a:rPr>
+              <a:t xml:space="preserve">: </a:t>
+            </a:r>
+            <a:r>
+              <a:rPr lang="en-US" sz="1575" dirty="0" i="1">
+                <a:solidFill>
+                  <a:srgbClr val="16171D"/>
+                </a:solidFill>
+                <a:latin typeface="Segoe UI"/>
+                <a:cs typeface="Segoe UI"/>
+              </a:rPr>
+              <a:t xml:space="preserve">y</a:t>
+            </a:r>
+            <a:r>
+              <a:rPr lang="en-US" sz="1575" dirty="0">
+                <a:solidFill>
+                  <a:srgbClr val="16171D"/>
+                </a:solidFill>
+                <a:latin typeface="Segoe UI"/>
+                <a:cs typeface="Segoe UI"/>
+              </a:rPr>
+              <a:t xml:space="preserve"> = 2</a:t>
+            </a:r>
+            <a:r>
+              <a:rPr lang="en-US" sz="1575" dirty="0" i="1">
+                <a:solidFill>
+                  <a:srgbClr val="16171D"/>
+                </a:solidFill>
+                <a:latin typeface="Segoe UI"/>
+                <a:cs typeface="Segoe UI"/>
+              </a:rPr>
+              <a:t xml:space="preserve">x</a:t>
+            </a:r>
+            <a:r>
+              <a:rPr lang="en-US" sz="1575" dirty="0">
+                <a:solidFill>
+                  <a:srgbClr val="16171D"/>
+                </a:solidFill>
+                <a:latin typeface="Segoe UI"/>
+                <a:cs typeface="Segoe UI"/>
+              </a:rPr>
+              <a:t xml:space="preserve"> + 4.</a:t>
+            </a:r>
+            <a:endParaRPr lang="en-US" sz="1575" dirty="0"/>
+          </a:p>
+        </p:txBody>
+      </p:sp>
+      <p:sp>
+        <p:nvSpPr>
+          <p:cNvPr id="9" name="Shape 9"/>
+          <p:cNvSpPr txBox="1"/>
+          <p:nvPr/>
+        </p:nvSpPr>
+        <p:spPr>
+          <a:xfrm>
+            <a:off x="895350" y="4060698"/>
+            <a:ext cx="3571326" cy="518922"/>
           </a:xfrm>
           <a:prstGeom prst="roundRect">
             <a:avLst>
@@ -4966,6 +8072,16 @@
               <a:t xml:space="preserve">ANSWER   </a:t>
             </a:r>
             <a:r>
+              <a:rPr lang="en-US" sz="2325" dirty="0" i="1">
+                <a:solidFill>
+                  <a:srgbClr val="16171D"/>
+                </a:solidFill>
+                <a:latin typeface="Cambria"/>
+                <a:cs typeface="Cambria"/>
+              </a:rPr>
+              <a:t xml:space="preserve">y</a:t>
+            </a:r>
+            <a:r>
               <a:rPr lang="en-US" sz="2325" dirty="0">
                 <a:solidFill>
                   <a:srgbClr val="16171D"/>
@@ -4973,7 +8089,27 @@
                 <a:latin typeface="Cambria"/>
                 <a:cs typeface="Cambria"/>
               </a:rPr>
-              <a:t xml:space="preserve">up 6</a:t>
+              <a:t xml:space="preserve"> = 2</a:t>
+            </a:r>
+            <a:r>
+              <a:rPr lang="en-US" sz="2325" dirty="0" i="1">
+                <a:solidFill>
+                  <a:srgbClr val="16171D"/>
+                </a:solidFill>
+                <a:latin typeface="Cambria"/>
+                <a:cs typeface="Cambria"/>
+              </a:rPr>
+              <a:t xml:space="preserve">x</a:t>
+            </a:r>
+            <a:r>
+              <a:rPr lang="en-US" sz="2325" dirty="0">
+                <a:solidFill>
+                  <a:srgbClr val="16171D"/>
+                </a:solidFill>
+                <a:latin typeface="Cambria"/>
+                <a:cs typeface="Cambria"/>
+              </a:rPr>
+              <a:t xml:space="preserve"> + 4</a:t>
             </a:r>
             <a:endParaRPr lang="en-US" sz="2325" dirty="0"/>
           </a:p>
@@ -4981,14 +8117,14 @@
       </p:sp>
       <p:sp>
         <p:nvSpPr>
-          <p:cNvPr id="9" name="Shape 9"/>
+          <p:cNvPr id="17" name="Shape 17"/>
           <p:cNvSpPr txBox="1"/>
           <p:nvPr/>
         </p:nvSpPr>
         <p:spPr>
           <a:xfrm>
-            <a:off x="685800" y="3060954"/>
-            <a:ext cx="10820095" cy="1309116"/>
+            <a:off x="6210148" y="1618488"/>
+            <a:ext cx="5295748" cy="3132582"/>
           </a:xfrm>
           <a:prstGeom prst="roundRect">
             <a:avLst>
@@ -5021,14 +8157,14 @@
       </p:sp>
       <p:sp>
         <p:nvSpPr>
-          <p:cNvPr id="7" name="Shape 7"/>
+          <p:cNvPr id="11" name="Shape 11"/>
           <p:cNvSpPr txBox="1"/>
           <p:nvPr/>
         </p:nvSpPr>
         <p:spPr>
           <a:xfrm>
-            <a:off x="895350" y="3232404"/>
-            <a:ext cx="10400995" cy="352044"/>
+            <a:off x="6419698" y="1789938"/>
+            <a:ext cx="4876648" cy="374904"/>
           </a:xfrm>
           <a:prstGeom prst="rect">
             <a:avLst/>
@@ -5050,109 +8186,425 @@
               </a:lnSpc>
             </a:pPr>
             <a:r>
-              <a:rPr lang="en-US" sz="1950" dirty="0">
-                <a:solidFill>
-                  <a:srgbClr val="16171D"/>
-                </a:solidFill>
-                <a:latin typeface="Segoe UI"/>
-                <a:cs typeface="Segoe UI"/>
-              </a:rPr>
-              <a:t xml:space="preserve">2. What is the slope of </a:t>
-            </a:r>
-            <a:r>
-              <a:rPr lang="en-US" sz="1950" dirty="0" i="1">
-                <a:solidFill>
-                  <a:srgbClr val="16171D"/>
-                </a:solidFill>
-                <a:latin typeface="Segoe UI"/>
-                <a:cs typeface="Segoe UI"/>
-              </a:rPr>
-              <a:t xml:space="preserve">g</a:t>
-            </a:r>
-            <a:r>
-              <a:rPr lang="en-US" sz="1950" dirty="0">
-                <a:solidFill>
-                  <a:srgbClr val="16171D"/>
-                </a:solidFill>
-                <a:latin typeface="Segoe UI"/>
-                <a:cs typeface="Segoe UI"/>
-              </a:rPr>
-              <a:t xml:space="preserve">(</a:t>
-            </a:r>
-            <a:r>
-              <a:rPr lang="en-US" sz="1950" dirty="0" i="1">
-                <a:solidFill>
-                  <a:srgbClr val="16171D"/>
-                </a:solidFill>
-                <a:latin typeface="Segoe UI"/>
-                <a:cs typeface="Segoe UI"/>
-              </a:rPr>
-              <a:t xml:space="preserve">x</a:t>
-            </a:r>
-            <a:r>
-              <a:rPr lang="en-US" sz="1950" dirty="0">
-                <a:solidFill>
-                  <a:srgbClr val="16171D"/>
-                </a:solidFill>
-                <a:latin typeface="Segoe UI"/>
-                <a:cs typeface="Segoe UI"/>
-              </a:rPr>
-              <a:t xml:space="preserve">) = 5 · </a:t>
-            </a:r>
-            <a:r>
-              <a:rPr lang="en-US" sz="1950" dirty="0" i="1">
-                <a:solidFill>
-                  <a:srgbClr val="16171D"/>
-                </a:solidFill>
-                <a:latin typeface="Segoe UI"/>
-                <a:cs typeface="Segoe UI"/>
-              </a:rPr>
-              <a:t xml:space="preserve">f</a:t>
-            </a:r>
-            <a:r>
-              <a:rPr lang="en-US" sz="1950" dirty="0">
-                <a:solidFill>
-                  <a:srgbClr val="16171D"/>
-                </a:solidFill>
-                <a:latin typeface="Segoe UI"/>
-                <a:cs typeface="Segoe UI"/>
-              </a:rPr>
-              <a:t xml:space="preserve">(</a:t>
-            </a:r>
-            <a:r>
-              <a:rPr lang="en-US" sz="1950" dirty="0" i="1">
-                <a:solidFill>
-                  <a:srgbClr val="16171D"/>
-                </a:solidFill>
-                <a:latin typeface="Segoe UI"/>
-                <a:cs typeface="Segoe UI"/>
-              </a:rPr>
-              <a:t xml:space="preserve">x</a:t>
-            </a:r>
-            <a:r>
-              <a:rPr lang="en-US" sz="1950" dirty="0">
-                <a:solidFill>
-                  <a:srgbClr val="16171D"/>
-                </a:solidFill>
-                <a:latin typeface="Segoe UI"/>
-                <a:cs typeface="Segoe UI"/>
-              </a:rPr>
-              <a:t xml:space="preserve">)?</a:t>
-            </a:r>
-            <a:endParaRPr lang="en-US" sz="1950" dirty="0"/>
+              <a:rPr lang="en-US" sz="2100" dirty="0" b="1">
+                <a:solidFill>
+                  <a:srgbClr val="16171D"/>
+                </a:solidFill>
+                <a:latin typeface="Segoe UI"/>
+                <a:cs typeface="Segoe UI"/>
+              </a:rPr>
+              <a:t xml:space="preserve">2. Through (2, 0)</a:t>
+            </a:r>
+            <a:endParaRPr lang="en-US" sz="2100" dirty="0"/>
           </a:p>
         </p:txBody>
       </p:sp>
       <p:sp>
         <p:nvSpPr>
-          <p:cNvPr id="8" name="Shape 8"/>
+          <p:cNvPr id="12" name="Shape 12"/>
           <p:cNvSpPr txBox="1"/>
           <p:nvPr/>
         </p:nvSpPr>
         <p:spPr>
           <a:xfrm>
-            <a:off x="895350" y="3679698"/>
-            <a:ext cx="2078888" cy="518922"/>
+            <a:off x="6419698" y="2260092"/>
+            <a:ext cx="4876648" cy="294894"/>
+          </a:xfrm>
+          <a:prstGeom prst="rect">
+            <a:avLst/>
+          </a:prstGeom>
+          <a:noFill/>
+          <a:ln>
+            <a:noFill/>
+          </a:ln>
+        </p:spPr>
+        <p:txBody>
+          <a:bodyPr wrap="square" lIns="36576" tIns="27432" rIns="36576" bIns="27432" anchor="t">
+            <a:noAutofit/>
+          </a:bodyPr>
+          <a:lstStyle/>
+          <a:p>
+            <a:pPr algn="l">
+              <a:lnSpc>
+                <a:spcPct val="100000"/>
+              </a:lnSpc>
+            </a:pPr>
+            <a:r>
+              <a:rPr lang="en-US" sz="1575" dirty="0" b="1">
+                <a:solidFill>
+                  <a:srgbClr val="16171D"/>
+                </a:solidFill>
+                <a:latin typeface="Segoe UI"/>
+                <a:cs typeface="Segoe UI"/>
+              </a:rPr>
+              <a:t xml:space="preserve">Step 1.</a:t>
+            </a:r>
+            <a:r>
+              <a:rPr lang="en-US" sz="1575" dirty="0">
+                <a:solidFill>
+                  <a:srgbClr val="16171D"/>
+                </a:solidFill>
+                <a:latin typeface="Segoe UI"/>
+                <a:cs typeface="Segoe UI"/>
+              </a:rPr>
+              <a:t xml:space="preserve"> Same slope: </a:t>
+            </a:r>
+            <a:r>
+              <a:rPr lang="en-US" sz="1575" dirty="0" i="1">
+                <a:solidFill>
+                  <a:srgbClr val="16171D"/>
+                </a:solidFill>
+                <a:latin typeface="Segoe UI"/>
+                <a:cs typeface="Segoe UI"/>
+              </a:rPr>
+              <a:t xml:space="preserve">m</a:t>
+            </a:r>
+            <a:r>
+              <a:rPr lang="en-US" sz="1575" dirty="0">
+                <a:solidFill>
+                  <a:srgbClr val="16171D"/>
+                </a:solidFill>
+                <a:latin typeface="Segoe UI"/>
+                <a:cs typeface="Segoe UI"/>
+              </a:rPr>
+              <a:t xml:space="preserve"> = 2.</a:t>
+            </a:r>
+            <a:endParaRPr lang="en-US" sz="1575" dirty="0"/>
+          </a:p>
+        </p:txBody>
+      </p:sp>
+      <p:sp>
+        <p:nvSpPr>
+          <p:cNvPr id="13" name="Shape 13"/>
+          <p:cNvSpPr txBox="1"/>
+          <p:nvPr/>
+        </p:nvSpPr>
+        <p:spPr>
+          <a:xfrm>
+            <a:off x="6419698" y="2650236"/>
+            <a:ext cx="4876648" cy="534924"/>
+          </a:xfrm>
+          <a:prstGeom prst="rect">
+            <a:avLst/>
+          </a:prstGeom>
+          <a:noFill/>
+          <a:ln>
+            <a:noFill/>
+          </a:ln>
+        </p:spPr>
+        <p:txBody>
+          <a:bodyPr wrap="square" lIns="36576" tIns="27432" rIns="36576" bIns="27432" anchor="t">
+            <a:noAutofit/>
+          </a:bodyPr>
+          <a:lstStyle/>
+          <a:p>
+            <a:pPr algn="l">
+              <a:lnSpc>
+                <a:spcPct val="100000"/>
+              </a:lnSpc>
+            </a:pPr>
+            <a:r>
+              <a:rPr lang="en-US" sz="1575" dirty="0" b="1">
+                <a:solidFill>
+                  <a:srgbClr val="16171D"/>
+                </a:solidFill>
+                <a:latin typeface="Segoe UI"/>
+                <a:cs typeface="Segoe UI"/>
+              </a:rPr>
+              <a:t xml:space="preserve">Step 2.</a:t>
+            </a:r>
+            <a:r>
+              <a:rPr lang="en-US" sz="1575" dirty="0">
+                <a:solidFill>
+                  <a:srgbClr val="16171D"/>
+                </a:solidFill>
+                <a:latin typeface="Segoe UI"/>
+                <a:cs typeface="Segoe UI"/>
+              </a:rPr>
+              <a:t xml:space="preserve"> Put </a:t>
+            </a:r>
+            <a:r>
+              <a:rPr lang="en-US" sz="1575" dirty="0" i="1">
+                <a:solidFill>
+                  <a:srgbClr val="16171D"/>
+                </a:solidFill>
+                <a:latin typeface="Segoe UI"/>
+                <a:cs typeface="Segoe UI"/>
+              </a:rPr>
+              <a:t xml:space="preserve">x</a:t>
+            </a:r>
+            <a:r>
+              <a:rPr lang="en-US" sz="1575" dirty="0">
+                <a:solidFill>
+                  <a:srgbClr val="16171D"/>
+                </a:solidFill>
+                <a:latin typeface="Segoe UI"/>
+                <a:cs typeface="Segoe UI"/>
+              </a:rPr>
+              <a:t xml:space="preserve"> = 2 and </a:t>
+            </a:r>
+            <a:r>
+              <a:rPr lang="en-US" sz="1575" dirty="0" i="1">
+                <a:solidFill>
+                  <a:srgbClr val="16171D"/>
+                </a:solidFill>
+                <a:latin typeface="Segoe UI"/>
+                <a:cs typeface="Segoe UI"/>
+              </a:rPr>
+              <a:t xml:space="preserve">y</a:t>
+            </a:r>
+            <a:r>
+              <a:rPr lang="en-US" sz="1575" dirty="0">
+                <a:solidFill>
+                  <a:srgbClr val="16171D"/>
+                </a:solidFill>
+                <a:latin typeface="Segoe UI"/>
+                <a:cs typeface="Segoe UI"/>
+              </a:rPr>
+              <a:t xml:space="preserve"> = 0 into </a:t>
+            </a:r>
+            <a:r>
+              <a:rPr lang="en-US" sz="1575" dirty="0" i="1">
+                <a:solidFill>
+                  <a:srgbClr val="16171D"/>
+                </a:solidFill>
+                <a:latin typeface="Segoe UI"/>
+                <a:cs typeface="Segoe UI"/>
+              </a:rPr>
+              <a:t xml:space="preserve">y</a:t>
+            </a:r>
+            <a:r>
+              <a:rPr lang="en-US" sz="1575" dirty="0">
+                <a:solidFill>
+                  <a:srgbClr val="16171D"/>
+                </a:solidFill>
+                <a:latin typeface="Segoe UI"/>
+                <a:cs typeface="Segoe UI"/>
+              </a:rPr>
+              <a:t xml:space="preserve"> = </a:t>
+            </a:r>
+            <a:r>
+              <a:rPr lang="en-US" sz="1575" dirty="0" i="1">
+                <a:solidFill>
+                  <a:srgbClr val="16171D"/>
+                </a:solidFill>
+                <a:latin typeface="Segoe UI"/>
+                <a:cs typeface="Segoe UI"/>
+              </a:rPr>
+              <a:t xml:space="preserve">mx</a:t>
+            </a:r>
+            <a:r>
+              <a:rPr lang="en-US" sz="1575" dirty="0">
+                <a:solidFill>
+                  <a:srgbClr val="16171D"/>
+                </a:solidFill>
+                <a:latin typeface="Segoe UI"/>
+                <a:cs typeface="Segoe UI"/>
+              </a:rPr>
+              <a:t xml:space="preserve"> + </a:t>
+            </a:r>
+            <a:r>
+              <a:rPr lang="en-US" sz="1575" dirty="0" i="1">
+                <a:solidFill>
+                  <a:srgbClr val="16171D"/>
+                </a:solidFill>
+                <a:latin typeface="Segoe UI"/>
+                <a:cs typeface="Segoe UI"/>
+              </a:rPr>
+              <a:t xml:space="preserve">b</a:t>
+            </a:r>
+            <a:r>
+              <a:rPr lang="en-US" sz="1575" dirty="0">
+                <a:solidFill>
+                  <a:srgbClr val="16171D"/>
+                </a:solidFill>
+                <a:latin typeface="Segoe UI"/>
+                <a:cs typeface="Segoe UI"/>
+              </a:rPr>
+              <a:t xml:space="preserve">: 0 = 2(2) + </a:t>
+            </a:r>
+            <a:r>
+              <a:rPr lang="en-US" sz="1575" dirty="0" i="1">
+                <a:solidFill>
+                  <a:srgbClr val="16171D"/>
+                </a:solidFill>
+                <a:latin typeface="Segoe UI"/>
+                <a:cs typeface="Segoe UI"/>
+              </a:rPr>
+              <a:t xml:space="preserve">b</a:t>
+            </a:r>
+            <a:r>
+              <a:rPr lang="en-US" sz="1575" dirty="0">
+                <a:solidFill>
+                  <a:srgbClr val="16171D"/>
+                </a:solidFill>
+                <a:latin typeface="Segoe UI"/>
+                <a:cs typeface="Segoe UI"/>
+              </a:rPr>
+              <a:t xml:space="preserve">.</a:t>
+            </a:r>
+            <a:endParaRPr lang="en-US" sz="1575" dirty="0"/>
+          </a:p>
+        </p:txBody>
+      </p:sp>
+      <p:sp>
+        <p:nvSpPr>
+          <p:cNvPr id="14" name="Shape 14"/>
+          <p:cNvSpPr txBox="1"/>
+          <p:nvPr/>
+        </p:nvSpPr>
+        <p:spPr>
+          <a:xfrm>
+            <a:off x="6419698" y="3280410"/>
+            <a:ext cx="4876648" cy="294894"/>
+          </a:xfrm>
+          <a:prstGeom prst="rect">
+            <a:avLst/>
+          </a:prstGeom>
+          <a:noFill/>
+          <a:ln>
+            <a:noFill/>
+          </a:ln>
+        </p:spPr>
+        <p:txBody>
+          <a:bodyPr wrap="square" lIns="36576" tIns="27432" rIns="36576" bIns="27432" anchor="t">
+            <a:noAutofit/>
+          </a:bodyPr>
+          <a:lstStyle/>
+          <a:p>
+            <a:pPr algn="l">
+              <a:lnSpc>
+                <a:spcPct val="100000"/>
+              </a:lnSpc>
+            </a:pPr>
+            <a:r>
+              <a:rPr lang="en-US" sz="1575" dirty="0" b="1">
+                <a:solidFill>
+                  <a:srgbClr val="16171D"/>
+                </a:solidFill>
+                <a:latin typeface="Segoe UI"/>
+                <a:cs typeface="Segoe UI"/>
+              </a:rPr>
+              <a:t xml:space="preserve">Step 3.</a:t>
+            </a:r>
+            <a:r>
+              <a:rPr lang="en-US" sz="1575" dirty="0">
+                <a:solidFill>
+                  <a:srgbClr val="16171D"/>
+                </a:solidFill>
+                <a:latin typeface="Segoe UI"/>
+                <a:cs typeface="Segoe UI"/>
+              </a:rPr>
+              <a:t xml:space="preserve"> Multiply: 0 = 4 + </a:t>
+            </a:r>
+            <a:r>
+              <a:rPr lang="en-US" sz="1575" dirty="0" i="1">
+                <a:solidFill>
+                  <a:srgbClr val="16171D"/>
+                </a:solidFill>
+                <a:latin typeface="Segoe UI"/>
+                <a:cs typeface="Segoe UI"/>
+              </a:rPr>
+              <a:t xml:space="preserve">b</a:t>
+            </a:r>
+            <a:r>
+              <a:rPr lang="en-US" sz="1575" dirty="0">
+                <a:solidFill>
+                  <a:srgbClr val="16171D"/>
+                </a:solidFill>
+                <a:latin typeface="Segoe UI"/>
+                <a:cs typeface="Segoe UI"/>
+              </a:rPr>
+              <a:t xml:space="preserve">.</a:t>
+            </a:r>
+            <a:endParaRPr lang="en-US" sz="1575" dirty="0"/>
+          </a:p>
+        </p:txBody>
+      </p:sp>
+      <p:sp>
+        <p:nvSpPr>
+          <p:cNvPr id="15" name="Shape 15"/>
+          <p:cNvSpPr txBox="1"/>
+          <p:nvPr/>
+        </p:nvSpPr>
+        <p:spPr>
+          <a:xfrm>
+            <a:off x="6419698" y="3670554"/>
+            <a:ext cx="4876648" cy="294894"/>
+          </a:xfrm>
+          <a:prstGeom prst="rect">
+            <a:avLst/>
+          </a:prstGeom>
+          <a:noFill/>
+          <a:ln>
+            <a:noFill/>
+          </a:ln>
+        </p:spPr>
+        <p:txBody>
+          <a:bodyPr wrap="square" lIns="36576" tIns="27432" rIns="36576" bIns="27432" anchor="t">
+            <a:noAutofit/>
+          </a:bodyPr>
+          <a:lstStyle/>
+          <a:p>
+            <a:pPr algn="l">
+              <a:lnSpc>
+                <a:spcPct val="100000"/>
+              </a:lnSpc>
+            </a:pPr>
+            <a:r>
+              <a:rPr lang="en-US" sz="1575" dirty="0" b="1">
+                <a:solidFill>
+                  <a:srgbClr val="16171D"/>
+                </a:solidFill>
+                <a:latin typeface="Segoe UI"/>
+                <a:cs typeface="Segoe UI"/>
+              </a:rPr>
+              <a:t xml:space="preserve">Step 4.</a:t>
+            </a:r>
+            <a:r>
+              <a:rPr lang="en-US" sz="1575" dirty="0">
+                <a:solidFill>
+                  <a:srgbClr val="16171D"/>
+                </a:solidFill>
+                <a:latin typeface="Segoe UI"/>
+                <a:cs typeface="Segoe UI"/>
+              </a:rPr>
+              <a:t xml:space="preserve"> Subtract 4 from both sides: −4 = </a:t>
+            </a:r>
+            <a:r>
+              <a:rPr lang="en-US" sz="1575" dirty="0" i="1">
+                <a:solidFill>
+                  <a:srgbClr val="16171D"/>
+                </a:solidFill>
+                <a:latin typeface="Segoe UI"/>
+                <a:cs typeface="Segoe UI"/>
+              </a:rPr>
+              <a:t xml:space="preserve">b</a:t>
+            </a:r>
+            <a:r>
+              <a:rPr lang="en-US" sz="1575" dirty="0">
+                <a:solidFill>
+                  <a:srgbClr val="16171D"/>
+                </a:solidFill>
+                <a:latin typeface="Segoe UI"/>
+                <a:cs typeface="Segoe UI"/>
+              </a:rPr>
+              <a:t xml:space="preserve">.</a:t>
+            </a:r>
+            <a:endParaRPr lang="en-US" sz="1575" dirty="0"/>
+          </a:p>
+        </p:txBody>
+      </p:sp>
+      <p:sp>
+        <p:nvSpPr>
+          <p:cNvPr id="16" name="Shape 16"/>
+          <p:cNvSpPr txBox="1"/>
+          <p:nvPr/>
+        </p:nvSpPr>
+        <p:spPr>
+          <a:xfrm>
+            <a:off x="6419698" y="4060698"/>
+            <a:ext cx="3571326" cy="518922"/>
           </a:xfrm>
           <a:prstGeom prst="roundRect">
             <a:avLst>
@@ -5188,6 +8640,16 @@
               <a:t xml:space="preserve">ANSWER   </a:t>
             </a:r>
             <a:r>
+              <a:rPr lang="en-US" sz="2325" dirty="0" i="1">
+                <a:solidFill>
+                  <a:srgbClr val="16171D"/>
+                </a:solidFill>
+                <a:latin typeface="Cambria"/>
+                <a:cs typeface="Cambria"/>
+              </a:rPr>
+              <a:t xml:space="preserve">y</a:t>
+            </a:r>
+            <a:r>
               <a:rPr lang="en-US" sz="2325" dirty="0">
                 <a:solidFill>
                   <a:srgbClr val="16171D"/>
@@ -5195,7 +8657,27 @@
                 <a:latin typeface="Cambria"/>
                 <a:cs typeface="Cambria"/>
               </a:rPr>
-              <a:t xml:space="preserve">5</a:t>
+              <a:t xml:space="preserve"> = 2</a:t>
+            </a:r>
+            <a:r>
+              <a:rPr lang="en-US" sz="2325" dirty="0" i="1">
+                <a:solidFill>
+                  <a:srgbClr val="16171D"/>
+                </a:solidFill>
+                <a:latin typeface="Cambria"/>
+                <a:cs typeface="Cambria"/>
+              </a:rPr>
+              <a:t xml:space="preserve">x</a:t>
+            </a:r>
+            <a:r>
+              <a:rPr lang="en-US" sz="2325" dirty="0">
+                <a:solidFill>
+                  <a:srgbClr val="16171D"/>
+                </a:solidFill>
+                <a:latin typeface="Cambria"/>
+                <a:cs typeface="Cambria"/>
+              </a:rPr>
+              <a:t xml:space="preserve"> − 4</a:t>
             </a:r>
             <a:endParaRPr lang="en-US" sz="2325" dirty="0"/>
           </a:p>
@@ -5203,13 +8685,1183 @@
       </p:sp>
       <p:sp>
         <p:nvSpPr>
-          <p:cNvPr id="12" name="Shape 12"/>
+          <p:cNvPr id="18" name="Slide Number 18"/>
           <p:cNvSpPr txBox="1"/>
           <p:nvPr/>
         </p:nvSpPr>
         <p:spPr>
           <a:xfrm>
-            <a:off x="685800" y="4503420"/>
+            <a:off x="11277295" y="6611112"/>
+            <a:ext cx="685800" cy="201168"/>
+          </a:xfrm>
+          <a:prstGeom prst="rect">
+            <a:avLst/>
+          </a:prstGeom>
+          <a:noFill/>
+        </p:spPr>
+        <p:txBody>
+          <a:bodyPr wrap="none" lIns="0" tIns="0" rIns="0" bIns="0" anchor="b">
+            <a:noAutofit/>
+          </a:bodyPr>
+          <a:lstStyle/>
+          <a:p>
+            <a:pPr algn="r"/>
+            <a:fld id="{5C1A6E0B-3B1F-4D5E-9C7A-2F4B8D6E1A90}" type="slidenum">
+              <a:rPr lang="en-US" sz="1200" dirty="0">
+                <a:solidFill>
+                  <a:srgbClr val="5F6272"/>
+                </a:solidFill>
+              </a:rPr>
+              <a:t>14</a:t>
+            </a:fld>
+          </a:p>
+        </p:txBody>
+      </p:sp>
+    </p:spTree>
+  </p:cSld>
+  <p:clrMapOvr>
+    <a:masterClrMapping/>
+  </p:clrMapOvr>
+  <p:transition spd="med">
+    <p:fade/>
+  </p:transition>
+  <p:timing>
+    <p:tnLst>
+      <p:par>
+        <p:cTn id="1" dur="indefinite" restart="never" nodeType="tmRoot">
+          <p:childTnLst>
+            <p:seq concurrent="1" nextAc="seek">
+              <p:cTn id="2" dur="indefinite" nodeType="mainSeq">
+                <p:childTnLst>
+                  <p:par>
+                    <p:cTn id="8" fill="hold">
+                      <p:stCondLst>
+                        <p:cond delay="indefinite"/>
+                      </p:stCondLst>
+                      <p:childTnLst>
+                        <p:par>
+                          <p:cTn id="9" fill="hold">
+                            <p:stCondLst>
+                              <p:cond delay="0"/>
+                            </p:stCondLst>
+                            <p:childTnLst>
+                              <p:par>
+                                <p:cTn id="7" presetID="42" presetClass="entr" presetSubtype="0" fill="hold" nodeType="clickEffect">
+                                  <p:stCondLst>
+                                    <p:cond delay="0"/>
+                                  </p:stCondLst>
+                                  <p:childTnLst>
+                                    <p:set>
+                                      <p:cBhvr>
+                                        <p:cTn id="3" dur="1" fill="hold">
+                                          <p:stCondLst>
+                                            <p:cond delay="0"/>
+                                          </p:stCondLst>
+                                        </p:cTn>
+                                        <p:tgtEl>
+                                          <p:spTgt spid="5"/>
+                                        </p:tgtEl>
+                                        <p:attrNameLst>
+                                          <p:attrName>style.visibility</p:attrName>
+                                        </p:attrNameLst>
+                                      </p:cBhvr>
+                                      <p:to>
+                                        <p:strVal val="visible"/>
+                                      </p:to>
+                                    </p:set>
+                                    <p:animEffect transition="in" filter="fade">
+                                      <p:cBhvr>
+                                        <p:cTn id="4" dur="500"/>
+                                        <p:tgtEl>
+                                          <p:spTgt spid="5"/>
+                                        </p:tgtEl>
+                                      </p:cBhvr>
+                                    </p:animEffect>
+                                    <p:anim calcmode="lin" valueType="num">
+                                      <p:cBhvr>
+                                        <p:cTn id="5" dur="500" fill="hold"/>
+                                        <p:tgtEl>
+                                          <p:spTgt spid="5"/>
+                                        </p:tgtEl>
+                                        <p:attrNameLst>
+                                          <p:attrName>ppt_x</p:attrName>
+                                        </p:attrNameLst>
+                                      </p:cBhvr>
+                                      <p:tavLst>
+                                        <p:tav tm="0">
+                                          <p:val>
+                                            <p:strVal val="#ppt_x"/>
+                                          </p:val>
+                                        </p:tav>
+                                        <p:tav tm="100000">
+                                          <p:val>
+                                            <p:strVal val="#ppt_x"/>
+                                          </p:val>
+                                        </p:tav>
+                                      </p:tavLst>
+                                    </p:anim>
+                                    <p:anim calcmode="lin" valueType="num">
+                                      <p:cBhvr>
+                                        <p:cTn id="6" dur="500" fill="hold"/>
+                                        <p:tgtEl>
+                                          <p:spTgt spid="5"/>
+                                        </p:tgtEl>
+                                        <p:attrNameLst>
+                                          <p:attrName>ppt_y</p:attrName>
+                                        </p:attrNameLst>
+                                      </p:cBhvr>
+                                      <p:tavLst>
+                                        <p:tav tm="0">
+                                          <p:val>
+                                            <p:strVal val="#ppt_y+.1"/>
+                                          </p:val>
+                                        </p:tav>
+                                        <p:tav tm="100000">
+                                          <p:val>
+                                            <p:strVal val="#ppt_y"/>
+                                          </p:val>
+                                        </p:tav>
+                                      </p:tavLst>
+                                    </p:anim>
+                                  </p:childTnLst>
+                                </p:cTn>
+                              </p:par>
+                            </p:childTnLst>
+                          </p:cTn>
+                        </p:par>
+                      </p:childTnLst>
+                    </p:cTn>
+                  </p:par>
+                  <p:par>
+                    <p:cTn id="15" fill="hold">
+                      <p:stCondLst>
+                        <p:cond delay="indefinite"/>
+                      </p:stCondLst>
+                      <p:childTnLst>
+                        <p:par>
+                          <p:cTn id="16" fill="hold">
+                            <p:stCondLst>
+                              <p:cond delay="0"/>
+                            </p:stCondLst>
+                            <p:childTnLst>
+                              <p:par>
+                                <p:cTn id="14" presetID="42" presetClass="entr" presetSubtype="0" fill="hold" nodeType="clickEffect">
+                                  <p:stCondLst>
+                                    <p:cond delay="0"/>
+                                  </p:stCondLst>
+                                  <p:childTnLst>
+                                    <p:set>
+                                      <p:cBhvr>
+                                        <p:cTn id="10" dur="1" fill="hold">
+                                          <p:stCondLst>
+                                            <p:cond delay="0"/>
+                                          </p:stCondLst>
+                                        </p:cTn>
+                                        <p:tgtEl>
+                                          <p:spTgt spid="6"/>
+                                        </p:tgtEl>
+                                        <p:attrNameLst>
+                                          <p:attrName>style.visibility</p:attrName>
+                                        </p:attrNameLst>
+                                      </p:cBhvr>
+                                      <p:to>
+                                        <p:strVal val="visible"/>
+                                      </p:to>
+                                    </p:set>
+                                    <p:animEffect transition="in" filter="fade">
+                                      <p:cBhvr>
+                                        <p:cTn id="11" dur="500"/>
+                                        <p:tgtEl>
+                                          <p:spTgt spid="6"/>
+                                        </p:tgtEl>
+                                      </p:cBhvr>
+                                    </p:animEffect>
+                                    <p:anim calcmode="lin" valueType="num">
+                                      <p:cBhvr>
+                                        <p:cTn id="12" dur="500" fill="hold"/>
+                                        <p:tgtEl>
+                                          <p:spTgt spid="6"/>
+                                        </p:tgtEl>
+                                        <p:attrNameLst>
+                                          <p:attrName>ppt_x</p:attrName>
+                                        </p:attrNameLst>
+                                      </p:cBhvr>
+                                      <p:tavLst>
+                                        <p:tav tm="0">
+                                          <p:val>
+                                            <p:strVal val="#ppt_x"/>
+                                          </p:val>
+                                        </p:tav>
+                                        <p:tav tm="100000">
+                                          <p:val>
+                                            <p:strVal val="#ppt_x"/>
+                                          </p:val>
+                                        </p:tav>
+                                      </p:tavLst>
+                                    </p:anim>
+                                    <p:anim calcmode="lin" valueType="num">
+                                      <p:cBhvr>
+                                        <p:cTn id="13" dur="500" fill="hold"/>
+                                        <p:tgtEl>
+                                          <p:spTgt spid="6"/>
+                                        </p:tgtEl>
+                                        <p:attrNameLst>
+                                          <p:attrName>ppt_y</p:attrName>
+                                        </p:attrNameLst>
+                                      </p:cBhvr>
+                                      <p:tavLst>
+                                        <p:tav tm="0">
+                                          <p:val>
+                                            <p:strVal val="#ppt_y+.1"/>
+                                          </p:val>
+                                        </p:tav>
+                                        <p:tav tm="100000">
+                                          <p:val>
+                                            <p:strVal val="#ppt_y"/>
+                                          </p:val>
+                                        </p:tav>
+                                      </p:tavLst>
+                                    </p:anim>
+                                  </p:childTnLst>
+                                </p:cTn>
+                              </p:par>
+                            </p:childTnLst>
+                          </p:cTn>
+                        </p:par>
+                      </p:childTnLst>
+                    </p:cTn>
+                  </p:par>
+                  <p:par>
+                    <p:cTn id="22" fill="hold">
+                      <p:stCondLst>
+                        <p:cond delay="indefinite"/>
+                      </p:stCondLst>
+                      <p:childTnLst>
+                        <p:par>
+                          <p:cTn id="23" fill="hold">
+                            <p:stCondLst>
+                              <p:cond delay="0"/>
+                            </p:stCondLst>
+                            <p:childTnLst>
+                              <p:par>
+                                <p:cTn id="21" presetID="42" presetClass="entr" presetSubtype="0" fill="hold" nodeType="clickEffect">
+                                  <p:stCondLst>
+                                    <p:cond delay="0"/>
+                                  </p:stCondLst>
+                                  <p:childTnLst>
+                                    <p:set>
+                                      <p:cBhvr>
+                                        <p:cTn id="17" dur="1" fill="hold">
+                                          <p:stCondLst>
+                                            <p:cond delay="0"/>
+                                          </p:stCondLst>
+                                        </p:cTn>
+                                        <p:tgtEl>
+                                          <p:spTgt spid="7"/>
+                                        </p:tgtEl>
+                                        <p:attrNameLst>
+                                          <p:attrName>style.visibility</p:attrName>
+                                        </p:attrNameLst>
+                                      </p:cBhvr>
+                                      <p:to>
+                                        <p:strVal val="visible"/>
+                                      </p:to>
+                                    </p:set>
+                                    <p:animEffect transition="in" filter="fade">
+                                      <p:cBhvr>
+                                        <p:cTn id="18" dur="500"/>
+                                        <p:tgtEl>
+                                          <p:spTgt spid="7"/>
+                                        </p:tgtEl>
+                                      </p:cBhvr>
+                                    </p:animEffect>
+                                    <p:anim calcmode="lin" valueType="num">
+                                      <p:cBhvr>
+                                        <p:cTn id="19" dur="500" fill="hold"/>
+                                        <p:tgtEl>
+                                          <p:spTgt spid="7"/>
+                                        </p:tgtEl>
+                                        <p:attrNameLst>
+                                          <p:attrName>ppt_x</p:attrName>
+                                        </p:attrNameLst>
+                                      </p:cBhvr>
+                                      <p:tavLst>
+                                        <p:tav tm="0">
+                                          <p:val>
+                                            <p:strVal val="#ppt_x"/>
+                                          </p:val>
+                                        </p:tav>
+                                        <p:tav tm="100000">
+                                          <p:val>
+                                            <p:strVal val="#ppt_x"/>
+                                          </p:val>
+                                        </p:tav>
+                                      </p:tavLst>
+                                    </p:anim>
+                                    <p:anim calcmode="lin" valueType="num">
+                                      <p:cBhvr>
+                                        <p:cTn id="20" dur="500" fill="hold"/>
+                                        <p:tgtEl>
+                                          <p:spTgt spid="7"/>
+                                        </p:tgtEl>
+                                        <p:attrNameLst>
+                                          <p:attrName>ppt_y</p:attrName>
+                                        </p:attrNameLst>
+                                      </p:cBhvr>
+                                      <p:tavLst>
+                                        <p:tav tm="0">
+                                          <p:val>
+                                            <p:strVal val="#ppt_y+.1"/>
+                                          </p:val>
+                                        </p:tav>
+                                        <p:tav tm="100000">
+                                          <p:val>
+                                            <p:strVal val="#ppt_y"/>
+                                          </p:val>
+                                        </p:tav>
+                                      </p:tavLst>
+                                    </p:anim>
+                                  </p:childTnLst>
+                                </p:cTn>
+                              </p:par>
+                            </p:childTnLst>
+                          </p:cTn>
+                        </p:par>
+                      </p:childTnLst>
+                    </p:cTn>
+                  </p:par>
+                  <p:par>
+                    <p:cTn id="29" fill="hold">
+                      <p:stCondLst>
+                        <p:cond delay="indefinite"/>
+                      </p:stCondLst>
+                      <p:childTnLst>
+                        <p:par>
+                          <p:cTn id="30" fill="hold">
+                            <p:stCondLst>
+                              <p:cond delay="0"/>
+                            </p:stCondLst>
+                            <p:childTnLst>
+                              <p:par>
+                                <p:cTn id="28" presetID="42" presetClass="entr" presetSubtype="0" fill="hold" nodeType="clickEffect">
+                                  <p:stCondLst>
+                                    <p:cond delay="0"/>
+                                  </p:stCondLst>
+                                  <p:childTnLst>
+                                    <p:set>
+                                      <p:cBhvr>
+                                        <p:cTn id="24" dur="1" fill="hold">
+                                          <p:stCondLst>
+                                            <p:cond delay="0"/>
+                                          </p:stCondLst>
+                                        </p:cTn>
+                                        <p:tgtEl>
+                                          <p:spTgt spid="8"/>
+                                        </p:tgtEl>
+                                        <p:attrNameLst>
+                                          <p:attrName>style.visibility</p:attrName>
+                                        </p:attrNameLst>
+                                      </p:cBhvr>
+                                      <p:to>
+                                        <p:strVal val="visible"/>
+                                      </p:to>
+                                    </p:set>
+                                    <p:animEffect transition="in" filter="fade">
+                                      <p:cBhvr>
+                                        <p:cTn id="25" dur="500"/>
+                                        <p:tgtEl>
+                                          <p:spTgt spid="8"/>
+                                        </p:tgtEl>
+                                      </p:cBhvr>
+                                    </p:animEffect>
+                                    <p:anim calcmode="lin" valueType="num">
+                                      <p:cBhvr>
+                                        <p:cTn id="26" dur="500" fill="hold"/>
+                                        <p:tgtEl>
+                                          <p:spTgt spid="8"/>
+                                        </p:tgtEl>
+                                        <p:attrNameLst>
+                                          <p:attrName>ppt_x</p:attrName>
+                                        </p:attrNameLst>
+                                      </p:cBhvr>
+                                      <p:tavLst>
+                                        <p:tav tm="0">
+                                          <p:val>
+                                            <p:strVal val="#ppt_x"/>
+                                          </p:val>
+                                        </p:tav>
+                                        <p:tav tm="100000">
+                                          <p:val>
+                                            <p:strVal val="#ppt_x"/>
+                                          </p:val>
+                                        </p:tav>
+                                      </p:tavLst>
+                                    </p:anim>
+                                    <p:anim calcmode="lin" valueType="num">
+                                      <p:cBhvr>
+                                        <p:cTn id="27" dur="500" fill="hold"/>
+                                        <p:tgtEl>
+                                          <p:spTgt spid="8"/>
+                                        </p:tgtEl>
+                                        <p:attrNameLst>
+                                          <p:attrName>ppt_y</p:attrName>
+                                        </p:attrNameLst>
+                                      </p:cBhvr>
+                                      <p:tavLst>
+                                        <p:tav tm="0">
+                                          <p:val>
+                                            <p:strVal val="#ppt_y+.1"/>
+                                          </p:val>
+                                        </p:tav>
+                                        <p:tav tm="100000">
+                                          <p:val>
+                                            <p:strVal val="#ppt_y"/>
+                                          </p:val>
+                                        </p:tav>
+                                      </p:tavLst>
+                                    </p:anim>
+                                  </p:childTnLst>
+                                </p:cTn>
+                              </p:par>
+                            </p:childTnLst>
+                          </p:cTn>
+                        </p:par>
+                      </p:childTnLst>
+                    </p:cTn>
+                  </p:par>
+                  <p:par>
+                    <p:cTn id="36" fill="hold">
+                      <p:stCondLst>
+                        <p:cond delay="indefinite"/>
+                      </p:stCondLst>
+                      <p:childTnLst>
+                        <p:par>
+                          <p:cTn id="37" fill="hold">
+                            <p:stCondLst>
+                              <p:cond delay="0"/>
+                            </p:stCondLst>
+                            <p:childTnLst>
+                              <p:par>
+                                <p:cTn id="35" presetID="53" presetClass="entr" presetSubtype="16" fill="hold" nodeType="clickEffect">
+                                  <p:stCondLst>
+                                    <p:cond delay="0"/>
+                                  </p:stCondLst>
+                                  <p:childTnLst>
+                                    <p:set>
+                                      <p:cBhvr>
+                                        <p:cTn id="31" dur="1" fill="hold">
+                                          <p:stCondLst>
+                                            <p:cond delay="0"/>
+                                          </p:stCondLst>
+                                        </p:cTn>
+                                        <p:tgtEl>
+                                          <p:spTgt spid="9"/>
+                                        </p:tgtEl>
+                                        <p:attrNameLst>
+                                          <p:attrName>style.visibility</p:attrName>
+                                        </p:attrNameLst>
+                                      </p:cBhvr>
+                                      <p:to>
+                                        <p:strVal val="visible"/>
+                                      </p:to>
+                                    </p:set>
+                                    <p:animEffect transition="in" filter="fade">
+                                      <p:cBhvr>
+                                        <p:cTn id="32" dur="500"/>
+                                        <p:tgtEl>
+                                          <p:spTgt spid="9"/>
+                                        </p:tgtEl>
+                                      </p:cBhvr>
+                                    </p:animEffect>
+                                    <p:anim calcmode="lin" valueType="num">
+                                      <p:cBhvr>
+                                        <p:cTn id="33" dur="500" fill="hold"/>
+                                        <p:tgtEl>
+                                          <p:spTgt spid="9"/>
+                                        </p:tgtEl>
+                                        <p:attrNameLst>
+                                          <p:attrName>ppt_w</p:attrName>
+                                        </p:attrNameLst>
+                                      </p:cBhvr>
+                                      <p:tavLst>
+                                        <p:tav tm="0">
+                                          <p:val>
+                                            <p:fltVal val="0"/>
+                                          </p:val>
+                                        </p:tav>
+                                        <p:tav tm="100000">
+                                          <p:val>
+                                            <p:strVal val="#ppt_w"/>
+                                          </p:val>
+                                        </p:tav>
+                                      </p:tavLst>
+                                    </p:anim>
+                                    <p:anim calcmode="lin" valueType="num">
+                                      <p:cBhvr>
+                                        <p:cTn id="34" dur="500" fill="hold"/>
+                                        <p:tgtEl>
+                                          <p:spTgt spid="9"/>
+                                        </p:tgtEl>
+                                        <p:attrNameLst>
+                                          <p:attrName>ppt_h</p:attrName>
+                                        </p:attrNameLst>
+                                      </p:cBhvr>
+                                      <p:tavLst>
+                                        <p:tav tm="0">
+                                          <p:val>
+                                            <p:fltVal val="0"/>
+                                          </p:val>
+                                        </p:tav>
+                                        <p:tav tm="100000">
+                                          <p:val>
+                                            <p:strVal val="#ppt_h"/>
+                                          </p:val>
+                                        </p:tav>
+                                      </p:tavLst>
+                                    </p:anim>
+                                  </p:childTnLst>
+                                </p:cTn>
+                              </p:par>
+                            </p:childTnLst>
+                          </p:cTn>
+                        </p:par>
+                      </p:childTnLst>
+                    </p:cTn>
+                  </p:par>
+                  <p:par>
+                    <p:cTn id="43" fill="hold">
+                      <p:stCondLst>
+                        <p:cond delay="indefinite"/>
+                      </p:stCondLst>
+                      <p:childTnLst>
+                        <p:par>
+                          <p:cTn id="44" fill="hold">
+                            <p:stCondLst>
+                              <p:cond delay="0"/>
+                            </p:stCondLst>
+                            <p:childTnLst>
+                              <p:par>
+                                <p:cTn id="42" presetID="42" presetClass="entr" presetSubtype="0" fill="hold" nodeType="clickEffect">
+                                  <p:stCondLst>
+                                    <p:cond delay="0"/>
+                                  </p:stCondLst>
+                                  <p:childTnLst>
+                                    <p:set>
+                                      <p:cBhvr>
+                                        <p:cTn id="38" dur="1" fill="hold">
+                                          <p:stCondLst>
+                                            <p:cond delay="0"/>
+                                          </p:stCondLst>
+                                        </p:cTn>
+                                        <p:tgtEl>
+                                          <p:spTgt spid="12"/>
+                                        </p:tgtEl>
+                                        <p:attrNameLst>
+                                          <p:attrName>style.visibility</p:attrName>
+                                        </p:attrNameLst>
+                                      </p:cBhvr>
+                                      <p:to>
+                                        <p:strVal val="visible"/>
+                                      </p:to>
+                                    </p:set>
+                                    <p:animEffect transition="in" filter="fade">
+                                      <p:cBhvr>
+                                        <p:cTn id="39" dur="500"/>
+                                        <p:tgtEl>
+                                          <p:spTgt spid="12"/>
+                                        </p:tgtEl>
+                                      </p:cBhvr>
+                                    </p:animEffect>
+                                    <p:anim calcmode="lin" valueType="num">
+                                      <p:cBhvr>
+                                        <p:cTn id="40" dur="500" fill="hold"/>
+                                        <p:tgtEl>
+                                          <p:spTgt spid="12"/>
+                                        </p:tgtEl>
+                                        <p:attrNameLst>
+                                          <p:attrName>ppt_x</p:attrName>
+                                        </p:attrNameLst>
+                                      </p:cBhvr>
+                                      <p:tavLst>
+                                        <p:tav tm="0">
+                                          <p:val>
+                                            <p:strVal val="#ppt_x"/>
+                                          </p:val>
+                                        </p:tav>
+                                        <p:tav tm="100000">
+                                          <p:val>
+                                            <p:strVal val="#ppt_x"/>
+                                          </p:val>
+                                        </p:tav>
+                                      </p:tavLst>
+                                    </p:anim>
+                                    <p:anim calcmode="lin" valueType="num">
+                                      <p:cBhvr>
+                                        <p:cTn id="41" dur="500" fill="hold"/>
+                                        <p:tgtEl>
+                                          <p:spTgt spid="12"/>
+                                        </p:tgtEl>
+                                        <p:attrNameLst>
+                                          <p:attrName>ppt_y</p:attrName>
+                                        </p:attrNameLst>
+                                      </p:cBhvr>
+                                      <p:tavLst>
+                                        <p:tav tm="0">
+                                          <p:val>
+                                            <p:strVal val="#ppt_y+.1"/>
+                                          </p:val>
+                                        </p:tav>
+                                        <p:tav tm="100000">
+                                          <p:val>
+                                            <p:strVal val="#ppt_y"/>
+                                          </p:val>
+                                        </p:tav>
+                                      </p:tavLst>
+                                    </p:anim>
+                                  </p:childTnLst>
+                                </p:cTn>
+                              </p:par>
+                            </p:childTnLst>
+                          </p:cTn>
+                        </p:par>
+                      </p:childTnLst>
+                    </p:cTn>
+                  </p:par>
+                  <p:par>
+                    <p:cTn id="50" fill="hold">
+                      <p:stCondLst>
+                        <p:cond delay="indefinite"/>
+                      </p:stCondLst>
+                      <p:childTnLst>
+                        <p:par>
+                          <p:cTn id="51" fill="hold">
+                            <p:stCondLst>
+                              <p:cond delay="0"/>
+                            </p:stCondLst>
+                            <p:childTnLst>
+                              <p:par>
+                                <p:cTn id="49" presetID="42" presetClass="entr" presetSubtype="0" fill="hold" nodeType="clickEffect">
+                                  <p:stCondLst>
+                                    <p:cond delay="0"/>
+                                  </p:stCondLst>
+                                  <p:childTnLst>
+                                    <p:set>
+                                      <p:cBhvr>
+                                        <p:cTn id="45" dur="1" fill="hold">
+                                          <p:stCondLst>
+                                            <p:cond delay="0"/>
+                                          </p:stCondLst>
+                                        </p:cTn>
+                                        <p:tgtEl>
+                                          <p:spTgt spid="13"/>
+                                        </p:tgtEl>
+                                        <p:attrNameLst>
+                                          <p:attrName>style.visibility</p:attrName>
+                                        </p:attrNameLst>
+                                      </p:cBhvr>
+                                      <p:to>
+                                        <p:strVal val="visible"/>
+                                      </p:to>
+                                    </p:set>
+                                    <p:animEffect transition="in" filter="fade">
+                                      <p:cBhvr>
+                                        <p:cTn id="46" dur="500"/>
+                                        <p:tgtEl>
+                                          <p:spTgt spid="13"/>
+                                        </p:tgtEl>
+                                      </p:cBhvr>
+                                    </p:animEffect>
+                                    <p:anim calcmode="lin" valueType="num">
+                                      <p:cBhvr>
+                                        <p:cTn id="47" dur="500" fill="hold"/>
+                                        <p:tgtEl>
+                                          <p:spTgt spid="13"/>
+                                        </p:tgtEl>
+                                        <p:attrNameLst>
+                                          <p:attrName>ppt_x</p:attrName>
+                                        </p:attrNameLst>
+                                      </p:cBhvr>
+                                      <p:tavLst>
+                                        <p:tav tm="0">
+                                          <p:val>
+                                            <p:strVal val="#ppt_x"/>
+                                          </p:val>
+                                        </p:tav>
+                                        <p:tav tm="100000">
+                                          <p:val>
+                                            <p:strVal val="#ppt_x"/>
+                                          </p:val>
+                                        </p:tav>
+                                      </p:tavLst>
+                                    </p:anim>
+                                    <p:anim calcmode="lin" valueType="num">
+                                      <p:cBhvr>
+                                        <p:cTn id="48" dur="500" fill="hold"/>
+                                        <p:tgtEl>
+                                          <p:spTgt spid="13"/>
+                                        </p:tgtEl>
+                                        <p:attrNameLst>
+                                          <p:attrName>ppt_y</p:attrName>
+                                        </p:attrNameLst>
+                                      </p:cBhvr>
+                                      <p:tavLst>
+                                        <p:tav tm="0">
+                                          <p:val>
+                                            <p:strVal val="#ppt_y+.1"/>
+                                          </p:val>
+                                        </p:tav>
+                                        <p:tav tm="100000">
+                                          <p:val>
+                                            <p:strVal val="#ppt_y"/>
+                                          </p:val>
+                                        </p:tav>
+                                      </p:tavLst>
+                                    </p:anim>
+                                  </p:childTnLst>
+                                </p:cTn>
+                              </p:par>
+                            </p:childTnLst>
+                          </p:cTn>
+                        </p:par>
+                      </p:childTnLst>
+                    </p:cTn>
+                  </p:par>
+                  <p:par>
+                    <p:cTn id="57" fill="hold">
+                      <p:stCondLst>
+                        <p:cond delay="indefinite"/>
+                      </p:stCondLst>
+                      <p:childTnLst>
+                        <p:par>
+                          <p:cTn id="58" fill="hold">
+                            <p:stCondLst>
+                              <p:cond delay="0"/>
+                            </p:stCondLst>
+                            <p:childTnLst>
+                              <p:par>
+                                <p:cTn id="56" presetID="42" presetClass="entr" presetSubtype="0" fill="hold" nodeType="clickEffect">
+                                  <p:stCondLst>
+                                    <p:cond delay="0"/>
+                                  </p:stCondLst>
+                                  <p:childTnLst>
+                                    <p:set>
+                                      <p:cBhvr>
+                                        <p:cTn id="52" dur="1" fill="hold">
+                                          <p:stCondLst>
+                                            <p:cond delay="0"/>
+                                          </p:stCondLst>
+                                        </p:cTn>
+                                        <p:tgtEl>
+                                          <p:spTgt spid="14"/>
+                                        </p:tgtEl>
+                                        <p:attrNameLst>
+                                          <p:attrName>style.visibility</p:attrName>
+                                        </p:attrNameLst>
+                                      </p:cBhvr>
+                                      <p:to>
+                                        <p:strVal val="visible"/>
+                                      </p:to>
+                                    </p:set>
+                                    <p:animEffect transition="in" filter="fade">
+                                      <p:cBhvr>
+                                        <p:cTn id="53" dur="500"/>
+                                        <p:tgtEl>
+                                          <p:spTgt spid="14"/>
+                                        </p:tgtEl>
+                                      </p:cBhvr>
+                                    </p:animEffect>
+                                    <p:anim calcmode="lin" valueType="num">
+                                      <p:cBhvr>
+                                        <p:cTn id="54" dur="500" fill="hold"/>
+                                        <p:tgtEl>
+                                          <p:spTgt spid="14"/>
+                                        </p:tgtEl>
+                                        <p:attrNameLst>
+                                          <p:attrName>ppt_x</p:attrName>
+                                        </p:attrNameLst>
+                                      </p:cBhvr>
+                                      <p:tavLst>
+                                        <p:tav tm="0">
+                                          <p:val>
+                                            <p:strVal val="#ppt_x"/>
+                                          </p:val>
+                                        </p:tav>
+                                        <p:tav tm="100000">
+                                          <p:val>
+                                            <p:strVal val="#ppt_x"/>
+                                          </p:val>
+                                        </p:tav>
+                                      </p:tavLst>
+                                    </p:anim>
+                                    <p:anim calcmode="lin" valueType="num">
+                                      <p:cBhvr>
+                                        <p:cTn id="55" dur="500" fill="hold"/>
+                                        <p:tgtEl>
+                                          <p:spTgt spid="14"/>
+                                        </p:tgtEl>
+                                        <p:attrNameLst>
+                                          <p:attrName>ppt_y</p:attrName>
+                                        </p:attrNameLst>
+                                      </p:cBhvr>
+                                      <p:tavLst>
+                                        <p:tav tm="0">
+                                          <p:val>
+                                            <p:strVal val="#ppt_y+.1"/>
+                                          </p:val>
+                                        </p:tav>
+                                        <p:tav tm="100000">
+                                          <p:val>
+                                            <p:strVal val="#ppt_y"/>
+                                          </p:val>
+                                        </p:tav>
+                                      </p:tavLst>
+                                    </p:anim>
+                                  </p:childTnLst>
+                                </p:cTn>
+                              </p:par>
+                            </p:childTnLst>
+                          </p:cTn>
+                        </p:par>
+                      </p:childTnLst>
+                    </p:cTn>
+                  </p:par>
+                  <p:par>
+                    <p:cTn id="64" fill="hold">
+                      <p:stCondLst>
+                        <p:cond delay="indefinite"/>
+                      </p:stCondLst>
+                      <p:childTnLst>
+                        <p:par>
+                          <p:cTn id="65" fill="hold">
+                            <p:stCondLst>
+                              <p:cond delay="0"/>
+                            </p:stCondLst>
+                            <p:childTnLst>
+                              <p:par>
+                                <p:cTn id="63" presetID="42" presetClass="entr" presetSubtype="0" fill="hold" nodeType="clickEffect">
+                                  <p:stCondLst>
+                                    <p:cond delay="0"/>
+                                  </p:stCondLst>
+                                  <p:childTnLst>
+                                    <p:set>
+                                      <p:cBhvr>
+                                        <p:cTn id="59" dur="1" fill="hold">
+                                          <p:stCondLst>
+                                            <p:cond delay="0"/>
+                                          </p:stCondLst>
+                                        </p:cTn>
+                                        <p:tgtEl>
+                                          <p:spTgt spid="15"/>
+                                        </p:tgtEl>
+                                        <p:attrNameLst>
+                                          <p:attrName>style.visibility</p:attrName>
+                                        </p:attrNameLst>
+                                      </p:cBhvr>
+                                      <p:to>
+                                        <p:strVal val="visible"/>
+                                      </p:to>
+                                    </p:set>
+                                    <p:animEffect transition="in" filter="fade">
+                                      <p:cBhvr>
+                                        <p:cTn id="60" dur="500"/>
+                                        <p:tgtEl>
+                                          <p:spTgt spid="15"/>
+                                        </p:tgtEl>
+                                      </p:cBhvr>
+                                    </p:animEffect>
+                                    <p:anim calcmode="lin" valueType="num">
+                                      <p:cBhvr>
+                                        <p:cTn id="61" dur="500" fill="hold"/>
+                                        <p:tgtEl>
+                                          <p:spTgt spid="15"/>
+                                        </p:tgtEl>
+                                        <p:attrNameLst>
+                                          <p:attrName>ppt_x</p:attrName>
+                                        </p:attrNameLst>
+                                      </p:cBhvr>
+                                      <p:tavLst>
+                                        <p:tav tm="0">
+                                          <p:val>
+                                            <p:strVal val="#ppt_x"/>
+                                          </p:val>
+                                        </p:tav>
+                                        <p:tav tm="100000">
+                                          <p:val>
+                                            <p:strVal val="#ppt_x"/>
+                                          </p:val>
+                                        </p:tav>
+                                      </p:tavLst>
+                                    </p:anim>
+                                    <p:anim calcmode="lin" valueType="num">
+                                      <p:cBhvr>
+                                        <p:cTn id="62" dur="500" fill="hold"/>
+                                        <p:tgtEl>
+                                          <p:spTgt spid="15"/>
+                                        </p:tgtEl>
+                                        <p:attrNameLst>
+                                          <p:attrName>ppt_y</p:attrName>
+                                        </p:attrNameLst>
+                                      </p:cBhvr>
+                                      <p:tavLst>
+                                        <p:tav tm="0">
+                                          <p:val>
+                                            <p:strVal val="#ppt_y+.1"/>
+                                          </p:val>
+                                        </p:tav>
+                                        <p:tav tm="100000">
+                                          <p:val>
+                                            <p:strVal val="#ppt_y"/>
+                                          </p:val>
+                                        </p:tav>
+                                      </p:tavLst>
+                                    </p:anim>
+                                  </p:childTnLst>
+                                </p:cTn>
+                              </p:par>
+                            </p:childTnLst>
+                          </p:cTn>
+                        </p:par>
+                      </p:childTnLst>
+                    </p:cTn>
+                  </p:par>
+                  <p:par>
+                    <p:cTn id="71" fill="hold">
+                      <p:stCondLst>
+                        <p:cond delay="indefinite"/>
+                      </p:stCondLst>
+                      <p:childTnLst>
+                        <p:par>
+                          <p:cTn id="72" fill="hold">
+                            <p:stCondLst>
+                              <p:cond delay="0"/>
+                            </p:stCondLst>
+                            <p:childTnLst>
+                              <p:par>
+                                <p:cTn id="70" presetID="53" presetClass="entr" presetSubtype="16" fill="hold" nodeType="clickEffect">
+                                  <p:stCondLst>
+                                    <p:cond delay="0"/>
+                                  </p:stCondLst>
+                                  <p:childTnLst>
+                                    <p:set>
+                                      <p:cBhvr>
+                                        <p:cTn id="66" dur="1" fill="hold">
+                                          <p:stCondLst>
+                                            <p:cond delay="0"/>
+                                          </p:stCondLst>
+                                        </p:cTn>
+                                        <p:tgtEl>
+                                          <p:spTgt spid="16"/>
+                                        </p:tgtEl>
+                                        <p:attrNameLst>
+                                          <p:attrName>style.visibility</p:attrName>
+                                        </p:attrNameLst>
+                                      </p:cBhvr>
+                                      <p:to>
+                                        <p:strVal val="visible"/>
+                                      </p:to>
+                                    </p:set>
+                                    <p:animEffect transition="in" filter="fade">
+                                      <p:cBhvr>
+                                        <p:cTn id="67" dur="500"/>
+                                        <p:tgtEl>
+                                          <p:spTgt spid="16"/>
+                                        </p:tgtEl>
+                                      </p:cBhvr>
+                                    </p:animEffect>
+                                    <p:anim calcmode="lin" valueType="num">
+                                      <p:cBhvr>
+                                        <p:cTn id="68" dur="500" fill="hold"/>
+                                        <p:tgtEl>
+                                          <p:spTgt spid="16"/>
+                                        </p:tgtEl>
+                                        <p:attrNameLst>
+                                          <p:attrName>ppt_w</p:attrName>
+                                        </p:attrNameLst>
+                                      </p:cBhvr>
+                                      <p:tavLst>
+                                        <p:tav tm="0">
+                                          <p:val>
+                                            <p:fltVal val="0"/>
+                                          </p:val>
+                                        </p:tav>
+                                        <p:tav tm="100000">
+                                          <p:val>
+                                            <p:strVal val="#ppt_w"/>
+                                          </p:val>
+                                        </p:tav>
+                                      </p:tavLst>
+                                    </p:anim>
+                                    <p:anim calcmode="lin" valueType="num">
+                                      <p:cBhvr>
+                                        <p:cTn id="69" dur="500" fill="hold"/>
+                                        <p:tgtEl>
+                                          <p:spTgt spid="16"/>
+                                        </p:tgtEl>
+                                        <p:attrNameLst>
+                                          <p:attrName>ppt_h</p:attrName>
+                                        </p:attrNameLst>
+                                      </p:cBhvr>
+                                      <p:tavLst>
+                                        <p:tav tm="0">
+                                          <p:val>
+                                            <p:fltVal val="0"/>
+                                          </p:val>
+                                        </p:tav>
+                                        <p:tav tm="100000">
+                                          <p:val>
+                                            <p:strVal val="#ppt_h"/>
+                                          </p:val>
+                                        </p:tav>
+                                      </p:tavLst>
+                                    </p:anim>
+                                  </p:childTnLst>
+                                </p:cTn>
+                              </p:par>
+                            </p:childTnLst>
+                          </p:cTn>
+                        </p:par>
+                      </p:childTnLst>
+                    </p:cTn>
+                  </p:par>
+                </p:childTnLst>
+              </p:cTn>
+              <p:prevCondLst>
+                <p:cond evt="onPrev" delay="0">
+                  <p:tgtEl>
+                    <p:sldTgt/>
+                  </p:tgtEl>
+                </p:cond>
+              </p:prevCondLst>
+              <p:nextCondLst>
+                <p:cond evt="onNext" delay="0">
+                  <p:tgtEl>
+                    <p:sldTgt/>
+                  </p:tgtEl>
+                </p:cond>
+              </p:nextCondLst>
+            </p:seq>
+          </p:childTnLst>
+        </p:cTn>
+      </p:par>
+    </p:tnLst>
+  </p:timing>
+</p:sld>
+</file>
+
+<file path=ppt/slides/slide15.xml><?xml version="1.0" encoding="utf-8"?>
+<p:sld xmlns:a="http://schemas.openxmlformats.org/drawingml/2006/main" xmlns:r="http://schemas.openxmlformats.org/officeDocument/2006/relationships" xmlns:p="http://schemas.openxmlformats.org/presentationml/2006/main">
+  <p:cSld>
+    <p:spTree>
+      <p:nvGrpSpPr>
+        <p:cNvPr id="1" name=""/>
+        <p:cNvGrpSpPr/>
+        <p:nvPr/>
+      </p:nvGrpSpPr>
+      <p:grpSpPr>
+        <a:xfrm>
+          <a:off x="0" y="0"/>
+          <a:ext cx="0" cy="0"/>
+          <a:chOff x="0" y="0"/>
+          <a:chExt cx="0" cy="0"/>
+        </a:xfrm>
+      </p:grpSpPr>
+      <p:sp>
+        <p:nvSpPr>
+          <p:cNvPr id="2" name="Shape 2"/>
+          <p:cNvSpPr txBox="1"/>
+          <p:nvPr/>
+        </p:nvSpPr>
+        <p:spPr>
+          <a:xfrm>
+            <a:off x="685800" y="457200"/>
+            <a:ext cx="10820095" cy="237744"/>
+          </a:xfrm>
+          <a:prstGeom prst="rect">
+            <a:avLst/>
+          </a:prstGeom>
+          <a:noFill/>
+          <a:ln>
+            <a:noFill/>
+          </a:ln>
+        </p:spPr>
+        <p:txBody>
+          <a:bodyPr wrap="square" lIns="36576" tIns="27432" rIns="36576" bIns="27432" anchor="t">
+            <a:noAutofit/>
+          </a:bodyPr>
+          <a:lstStyle/>
+          <a:p>
+            <a:pPr algn="l">
+              <a:lnSpc>
+                <a:spcPct val="100000"/>
+              </a:lnSpc>
+            </a:pPr>
+            <a:r>
+              <a:rPr lang="en-US" sz="1200" dirty="0" b="1" spc="150" cap="all">
+                <a:solidFill>
+                  <a:srgbClr val="5F6272"/>
+                </a:solidFill>
+                <a:latin typeface="Segoe UI"/>
+                <a:cs typeface="Segoe UI"/>
+              </a:rPr>
+              <a:t xml:space="preserve">Exit Ticket</a:t>
+            </a:r>
+            <a:endParaRPr lang="en-US" sz="1200" dirty="0"/>
+          </a:p>
+        </p:txBody>
+      </p:sp>
+      <p:sp>
+        <p:nvSpPr>
+          <p:cNvPr id="3" name="Shape 3"/>
+          <p:cNvSpPr txBox="1"/>
+          <p:nvPr/>
+        </p:nvSpPr>
+        <p:spPr>
+          <a:xfrm>
+            <a:off x="685800" y="866394"/>
+            <a:ext cx="10820095" cy="580644"/>
+          </a:xfrm>
+          <a:prstGeom prst="rect">
+            <a:avLst/>
+          </a:prstGeom>
+          <a:noFill/>
+          <a:ln>
+            <a:noFill/>
+          </a:ln>
+        </p:spPr>
+        <p:txBody>
+          <a:bodyPr wrap="square" lIns="36576" tIns="27432" rIns="36576" bIns="27432" anchor="t">
+            <a:noAutofit/>
+          </a:bodyPr>
+          <a:lstStyle/>
+          <a:p>
+            <a:pPr algn="l">
+              <a:lnSpc>
+                <a:spcPct val="100000"/>
+              </a:lnSpc>
+            </a:pPr>
+            <a:r>
+              <a:rPr lang="en-US" sz="3450" dirty="0" b="1">
+                <a:solidFill>
+                  <a:srgbClr val="16171D"/>
+                </a:solidFill>
+                <a:latin typeface="Segoe UI"/>
+                <a:cs typeface="Segoe UI"/>
+              </a:rPr>
+              <a:t xml:space="preserve">Show what you know</a:t>
+            </a:r>
+            <a:endParaRPr lang="en-US" sz="3450" dirty="0"/>
+          </a:p>
+        </p:txBody>
+      </p:sp>
+      <p:sp>
+        <p:nvSpPr>
+          <p:cNvPr id="6" name="Shape 6"/>
+          <p:cNvSpPr txBox="1"/>
+          <p:nvPr/>
+        </p:nvSpPr>
+        <p:spPr>
+          <a:xfrm>
+            <a:off x="685800" y="1618488"/>
             <a:ext cx="10820095" cy="1309116"/>
           </a:xfrm>
           <a:prstGeom prst="roundRect">
@@ -5243,13 +9895,13 @@
       </p:sp>
       <p:sp>
         <p:nvSpPr>
-          <p:cNvPr id="10" name="Shape 10"/>
+          <p:cNvPr id="4" name="Shape 4"/>
           <p:cNvSpPr txBox="1"/>
           <p:nvPr/>
         </p:nvSpPr>
         <p:spPr>
           <a:xfrm>
-            <a:off x="895350" y="4674870"/>
+            <a:off x="895350" y="1789938"/>
             <a:ext cx="10400995" cy="352044"/>
           </a:xfrm>
           <a:prstGeom prst="rect">
@@ -5279,7 +9931,7 @@
                 <a:latin typeface="Segoe UI"/>
                 <a:cs typeface="Segoe UI"/>
               </a:rPr>
-              <a:t xml:space="preserve">3. Write the line parallel to </a:t>
+              <a:t xml:space="preserve">1. </a:t>
             </a:r>
             <a:r>
               <a:rPr lang="en-US" sz="1950" dirty="0" i="1">
@@ -5289,7 +9941,7 @@
                 <a:latin typeface="Segoe UI"/>
                 <a:cs typeface="Segoe UI"/>
               </a:rPr>
-              <a:t xml:space="preserve">y</a:t>
+              <a:t xml:space="preserve">g</a:t>
             </a:r>
             <a:r>
               <a:rPr lang="en-US" sz="1950" dirty="0">
@@ -5299,7 +9951,7 @@
                 <a:latin typeface="Segoe UI"/>
                 <a:cs typeface="Segoe UI"/>
               </a:rPr>
-              <a:t xml:space="preserve"> = 4</a:t>
+              <a:t xml:space="preserve">(</a:t>
             </a:r>
             <a:r>
               <a:rPr lang="en-US" sz="1950" dirty="0" i="1">
@@ -5319,7 +9971,47 @@
                 <a:latin typeface="Segoe UI"/>
                 <a:cs typeface="Segoe UI"/>
               </a:rPr>
-              <a:t xml:space="preserve"> + 1 through (0, −2).</a:t>
+              <a:t xml:space="preserve">) = </a:t>
+            </a:r>
+            <a:r>
+              <a:rPr lang="en-US" sz="1950" dirty="0" i="1">
+                <a:solidFill>
+                  <a:srgbClr val="16171D"/>
+                </a:solidFill>
+                <a:latin typeface="Segoe UI"/>
+                <a:cs typeface="Segoe UI"/>
+              </a:rPr>
+              <a:t xml:space="preserve">f</a:t>
+            </a:r>
+            <a:r>
+              <a:rPr lang="en-US" sz="1950" dirty="0">
+                <a:solidFill>
+                  <a:srgbClr val="16171D"/>
+                </a:solidFill>
+                <a:latin typeface="Segoe UI"/>
+                <a:cs typeface="Segoe UI"/>
+              </a:rPr>
+              <a:t xml:space="preserve">(</a:t>
+            </a:r>
+            <a:r>
+              <a:rPr lang="en-US" sz="1950" dirty="0" i="1">
+                <a:solidFill>
+                  <a:srgbClr val="16171D"/>
+                </a:solidFill>
+                <a:latin typeface="Segoe UI"/>
+                <a:cs typeface="Segoe UI"/>
+              </a:rPr>
+              <a:t xml:space="preserve">x</a:t>
+            </a:r>
+            <a:r>
+              <a:rPr lang="en-US" sz="1950" dirty="0">
+                <a:solidFill>
+                  <a:srgbClr val="16171D"/>
+                </a:solidFill>
+                <a:latin typeface="Segoe UI"/>
+                <a:cs typeface="Segoe UI"/>
+              </a:rPr>
+              <a:t xml:space="preserve">) + 6. Up or down? How far?</a:t>
             </a:r>
             <a:endParaRPr lang="en-US" sz="1950" dirty="0"/>
           </a:p>
@@ -5327,14 +10019,14 @@
       </p:sp>
       <p:sp>
         <p:nvSpPr>
-          <p:cNvPr id="11" name="Shape 11"/>
+          <p:cNvPr id="5" name="Shape 5"/>
           <p:cNvSpPr txBox="1"/>
           <p:nvPr/>
         </p:nvSpPr>
         <p:spPr>
           <a:xfrm>
-            <a:off x="895350" y="5122164"/>
-            <a:ext cx="3571326" cy="518922"/>
+            <a:off x="895350" y="2237232"/>
+            <a:ext cx="2576368" cy="518922"/>
           </a:xfrm>
           <a:prstGeom prst="roundRect">
             <a:avLst>
@@ -5370,6 +10062,410 @@
               <a:t xml:space="preserve">ANSWER   </a:t>
             </a:r>
             <a:r>
+              <a:rPr lang="en-US" sz="2325" dirty="0">
+                <a:solidFill>
+                  <a:srgbClr val="16171D"/>
+                </a:solidFill>
+                <a:latin typeface="Cambria"/>
+                <a:cs typeface="Cambria"/>
+              </a:rPr>
+              <a:t xml:space="preserve">up 6</a:t>
+            </a:r>
+            <a:endParaRPr lang="en-US" sz="2325" dirty="0"/>
+          </a:p>
+        </p:txBody>
+      </p:sp>
+      <p:sp>
+        <p:nvSpPr>
+          <p:cNvPr id="9" name="Shape 9"/>
+          <p:cNvSpPr txBox="1"/>
+          <p:nvPr/>
+        </p:nvSpPr>
+        <p:spPr>
+          <a:xfrm>
+            <a:off x="685800" y="3060954"/>
+            <a:ext cx="10820095" cy="1309116"/>
+          </a:xfrm>
+          <a:prstGeom prst="roundRect">
+            <a:avLst>
+              <a:gd name="adj" fmla="val 8000"/>
+            </a:avLst>
+          </a:prstGeom>
+          <a:solidFill>
+            <a:srgbClr val="FFFFFF"/>
+          </a:solidFill>
+          <a:ln w="12700">
+            <a:solidFill>
+              <a:srgbClr val="E3E4EC"/>
+            </a:solidFill>
+          </a:ln>
+        </p:spPr>
+        <p:txBody>
+          <a:bodyPr wrap="square" lIns="36576" tIns="27432" rIns="36576" bIns="27432" anchor="t">
+            <a:noAutofit/>
+          </a:bodyPr>
+          <a:lstStyle/>
+          <a:p>
+            <a:pPr algn="l">
+              <a:lnSpc>
+                <a:spcPct val="100000"/>
+              </a:lnSpc>
+            </a:pPr>
+            <a:endParaRPr lang="en-US" sz="1950" dirty="0"/>
+          </a:p>
+        </p:txBody>
+      </p:sp>
+      <p:sp>
+        <p:nvSpPr>
+          <p:cNvPr id="7" name="Shape 7"/>
+          <p:cNvSpPr txBox="1"/>
+          <p:nvPr/>
+        </p:nvSpPr>
+        <p:spPr>
+          <a:xfrm>
+            <a:off x="895350" y="3232404"/>
+            <a:ext cx="10400995" cy="352044"/>
+          </a:xfrm>
+          <a:prstGeom prst="rect">
+            <a:avLst/>
+          </a:prstGeom>
+          <a:noFill/>
+          <a:ln>
+            <a:noFill/>
+          </a:ln>
+        </p:spPr>
+        <p:txBody>
+          <a:bodyPr wrap="square" lIns="36576" tIns="27432" rIns="36576" bIns="27432" anchor="t">
+            <a:noAutofit/>
+          </a:bodyPr>
+          <a:lstStyle/>
+          <a:p>
+            <a:pPr algn="l">
+              <a:lnSpc>
+                <a:spcPct val="100000"/>
+              </a:lnSpc>
+            </a:pPr>
+            <a:r>
+              <a:rPr lang="en-US" sz="1950" dirty="0">
+                <a:solidFill>
+                  <a:srgbClr val="16171D"/>
+                </a:solidFill>
+                <a:latin typeface="Segoe UI"/>
+                <a:cs typeface="Segoe UI"/>
+              </a:rPr>
+              <a:t xml:space="preserve">2. What is the slope of </a:t>
+            </a:r>
+            <a:r>
+              <a:rPr lang="en-US" sz="1950" dirty="0" i="1">
+                <a:solidFill>
+                  <a:srgbClr val="16171D"/>
+                </a:solidFill>
+                <a:latin typeface="Segoe UI"/>
+                <a:cs typeface="Segoe UI"/>
+              </a:rPr>
+              <a:t xml:space="preserve">g</a:t>
+            </a:r>
+            <a:r>
+              <a:rPr lang="en-US" sz="1950" dirty="0">
+                <a:solidFill>
+                  <a:srgbClr val="16171D"/>
+                </a:solidFill>
+                <a:latin typeface="Segoe UI"/>
+                <a:cs typeface="Segoe UI"/>
+              </a:rPr>
+              <a:t xml:space="preserve">(</a:t>
+            </a:r>
+            <a:r>
+              <a:rPr lang="en-US" sz="1950" dirty="0" i="1">
+                <a:solidFill>
+                  <a:srgbClr val="16171D"/>
+                </a:solidFill>
+                <a:latin typeface="Segoe UI"/>
+                <a:cs typeface="Segoe UI"/>
+              </a:rPr>
+              <a:t xml:space="preserve">x</a:t>
+            </a:r>
+            <a:r>
+              <a:rPr lang="en-US" sz="1950" dirty="0">
+                <a:solidFill>
+                  <a:srgbClr val="16171D"/>
+                </a:solidFill>
+                <a:latin typeface="Segoe UI"/>
+                <a:cs typeface="Segoe UI"/>
+              </a:rPr>
+              <a:t xml:space="preserve">) = 5 · </a:t>
+            </a:r>
+            <a:r>
+              <a:rPr lang="en-US" sz="1950" dirty="0" i="1">
+                <a:solidFill>
+                  <a:srgbClr val="16171D"/>
+                </a:solidFill>
+                <a:latin typeface="Segoe UI"/>
+                <a:cs typeface="Segoe UI"/>
+              </a:rPr>
+              <a:t xml:space="preserve">f</a:t>
+            </a:r>
+            <a:r>
+              <a:rPr lang="en-US" sz="1950" dirty="0">
+                <a:solidFill>
+                  <a:srgbClr val="16171D"/>
+                </a:solidFill>
+                <a:latin typeface="Segoe UI"/>
+                <a:cs typeface="Segoe UI"/>
+              </a:rPr>
+              <a:t xml:space="preserve">(</a:t>
+            </a:r>
+            <a:r>
+              <a:rPr lang="en-US" sz="1950" dirty="0" i="1">
+                <a:solidFill>
+                  <a:srgbClr val="16171D"/>
+                </a:solidFill>
+                <a:latin typeface="Segoe UI"/>
+                <a:cs typeface="Segoe UI"/>
+              </a:rPr>
+              <a:t xml:space="preserve">x</a:t>
+            </a:r>
+            <a:r>
+              <a:rPr lang="en-US" sz="1950" dirty="0">
+                <a:solidFill>
+                  <a:srgbClr val="16171D"/>
+                </a:solidFill>
+                <a:latin typeface="Segoe UI"/>
+                <a:cs typeface="Segoe UI"/>
+              </a:rPr>
+              <a:t xml:space="preserve">)?</a:t>
+            </a:r>
+            <a:endParaRPr lang="en-US" sz="1950" dirty="0"/>
+          </a:p>
+        </p:txBody>
+      </p:sp>
+      <p:sp>
+        <p:nvSpPr>
+          <p:cNvPr id="8" name="Shape 8"/>
+          <p:cNvSpPr txBox="1"/>
+          <p:nvPr/>
+        </p:nvSpPr>
+        <p:spPr>
+          <a:xfrm>
+            <a:off x="895350" y="3679698"/>
+            <a:ext cx="2078888" cy="518922"/>
+          </a:xfrm>
+          <a:prstGeom prst="roundRect">
+            <a:avLst>
+              <a:gd name="adj" fmla="val 8000"/>
+            </a:avLst>
+          </a:prstGeom>
+          <a:solidFill>
+            <a:srgbClr val="EDF5E9"/>
+          </a:solidFill>
+          <a:ln>
+            <a:noFill/>
+          </a:ln>
+        </p:spPr>
+        <p:txBody>
+          <a:bodyPr wrap="square" lIns="164592" tIns="64008" rIns="164592" bIns="64008" anchor="ctr">
+            <a:noAutofit/>
+          </a:bodyPr>
+          <a:lstStyle/>
+          <a:p>
+            <a:pPr algn="l">
+              <a:lnSpc>
+                <a:spcPct val="100000"/>
+              </a:lnSpc>
+            </a:pPr>
+            <a:r>
+              <a:rPr lang="en-US" sz="1125" dirty="0" b="1" spc="100">
+                <a:solidFill>
+                  <a:srgbClr val="4F8A3C"/>
+                </a:solidFill>
+                <a:latin typeface="Segoe UI"/>
+                <a:cs typeface="Segoe UI"/>
+              </a:rPr>
+              <a:t xml:space="preserve">ANSWER   </a:t>
+            </a:r>
+            <a:r>
+              <a:rPr lang="en-US" sz="2325" dirty="0">
+                <a:solidFill>
+                  <a:srgbClr val="16171D"/>
+                </a:solidFill>
+                <a:latin typeface="Cambria"/>
+                <a:cs typeface="Cambria"/>
+              </a:rPr>
+              <a:t xml:space="preserve">5</a:t>
+            </a:r>
+            <a:endParaRPr lang="en-US" sz="2325" dirty="0"/>
+          </a:p>
+        </p:txBody>
+      </p:sp>
+      <p:sp>
+        <p:nvSpPr>
+          <p:cNvPr id="12" name="Shape 12"/>
+          <p:cNvSpPr txBox="1"/>
+          <p:nvPr/>
+        </p:nvSpPr>
+        <p:spPr>
+          <a:xfrm>
+            <a:off x="685800" y="4503420"/>
+            <a:ext cx="10820095" cy="1309116"/>
+          </a:xfrm>
+          <a:prstGeom prst="roundRect">
+            <a:avLst>
+              <a:gd name="adj" fmla="val 8000"/>
+            </a:avLst>
+          </a:prstGeom>
+          <a:solidFill>
+            <a:srgbClr val="FFFFFF"/>
+          </a:solidFill>
+          <a:ln w="12700">
+            <a:solidFill>
+              <a:srgbClr val="E3E4EC"/>
+            </a:solidFill>
+          </a:ln>
+        </p:spPr>
+        <p:txBody>
+          <a:bodyPr wrap="square" lIns="36576" tIns="27432" rIns="36576" bIns="27432" anchor="t">
+            <a:noAutofit/>
+          </a:bodyPr>
+          <a:lstStyle/>
+          <a:p>
+            <a:pPr algn="l">
+              <a:lnSpc>
+                <a:spcPct val="100000"/>
+              </a:lnSpc>
+            </a:pPr>
+            <a:endParaRPr lang="en-US" sz="1950" dirty="0"/>
+          </a:p>
+        </p:txBody>
+      </p:sp>
+      <p:sp>
+        <p:nvSpPr>
+          <p:cNvPr id="10" name="Shape 10"/>
+          <p:cNvSpPr txBox="1"/>
+          <p:nvPr/>
+        </p:nvSpPr>
+        <p:spPr>
+          <a:xfrm>
+            <a:off x="895350" y="4674870"/>
+            <a:ext cx="10400995" cy="352044"/>
+          </a:xfrm>
+          <a:prstGeom prst="rect">
+            <a:avLst/>
+          </a:prstGeom>
+          <a:noFill/>
+          <a:ln>
+            <a:noFill/>
+          </a:ln>
+        </p:spPr>
+        <p:txBody>
+          <a:bodyPr wrap="square" lIns="36576" tIns="27432" rIns="36576" bIns="27432" anchor="t">
+            <a:noAutofit/>
+          </a:bodyPr>
+          <a:lstStyle/>
+          <a:p>
+            <a:pPr algn="l">
+              <a:lnSpc>
+                <a:spcPct val="100000"/>
+              </a:lnSpc>
+            </a:pPr>
+            <a:r>
+              <a:rPr lang="en-US" sz="1950" dirty="0">
+                <a:solidFill>
+                  <a:srgbClr val="16171D"/>
+                </a:solidFill>
+                <a:latin typeface="Segoe UI"/>
+                <a:cs typeface="Segoe UI"/>
+              </a:rPr>
+              <a:t xml:space="preserve">3. Write the line parallel to </a:t>
+            </a:r>
+            <a:r>
+              <a:rPr lang="en-US" sz="1950" dirty="0" i="1">
+                <a:solidFill>
+                  <a:srgbClr val="16171D"/>
+                </a:solidFill>
+                <a:latin typeface="Segoe UI"/>
+                <a:cs typeface="Segoe UI"/>
+              </a:rPr>
+              <a:t xml:space="preserve">y</a:t>
+            </a:r>
+            <a:r>
+              <a:rPr lang="en-US" sz="1950" dirty="0">
+                <a:solidFill>
+                  <a:srgbClr val="16171D"/>
+                </a:solidFill>
+                <a:latin typeface="Segoe UI"/>
+                <a:cs typeface="Segoe UI"/>
+              </a:rPr>
+              <a:t xml:space="preserve"> = 4</a:t>
+            </a:r>
+            <a:r>
+              <a:rPr lang="en-US" sz="1950" dirty="0" i="1">
+                <a:solidFill>
+                  <a:srgbClr val="16171D"/>
+                </a:solidFill>
+                <a:latin typeface="Segoe UI"/>
+                <a:cs typeface="Segoe UI"/>
+              </a:rPr>
+              <a:t xml:space="preserve">x</a:t>
+            </a:r>
+            <a:r>
+              <a:rPr lang="en-US" sz="1950" dirty="0">
+                <a:solidFill>
+                  <a:srgbClr val="16171D"/>
+                </a:solidFill>
+                <a:latin typeface="Segoe UI"/>
+                <a:cs typeface="Segoe UI"/>
+              </a:rPr>
+              <a:t xml:space="preserve"> + 1 through (0, −2).</a:t>
+            </a:r>
+            <a:endParaRPr lang="en-US" sz="1950" dirty="0"/>
+          </a:p>
+        </p:txBody>
+      </p:sp>
+      <p:sp>
+        <p:nvSpPr>
+          <p:cNvPr id="11" name="Shape 11"/>
+          <p:cNvSpPr txBox="1"/>
+          <p:nvPr/>
+        </p:nvSpPr>
+        <p:spPr>
+          <a:xfrm>
+            <a:off x="895350" y="5122164"/>
+            <a:ext cx="3571326" cy="518922"/>
+          </a:xfrm>
+          <a:prstGeom prst="roundRect">
+            <a:avLst>
+              <a:gd name="adj" fmla="val 8000"/>
+            </a:avLst>
+          </a:prstGeom>
+          <a:solidFill>
+            <a:srgbClr val="EDF5E9"/>
+          </a:solidFill>
+          <a:ln>
+            <a:noFill/>
+          </a:ln>
+        </p:spPr>
+        <p:txBody>
+          <a:bodyPr wrap="square" lIns="164592" tIns="64008" rIns="164592" bIns="64008" anchor="ctr">
+            <a:noAutofit/>
+          </a:bodyPr>
+          <a:lstStyle/>
+          <a:p>
+            <a:pPr algn="l">
+              <a:lnSpc>
+                <a:spcPct val="100000"/>
+              </a:lnSpc>
+            </a:pPr>
+            <a:r>
+              <a:rPr lang="en-US" sz="1125" dirty="0" b="1" spc="100">
+                <a:solidFill>
+                  <a:srgbClr val="4F8A3C"/>
+                </a:solidFill>
+                <a:latin typeface="Segoe UI"/>
+                <a:cs typeface="Segoe UI"/>
+              </a:rPr>
+              <a:t xml:space="preserve">ANSWER   </a:t>
+            </a:r>
+            <a:r>
               <a:rPr lang="en-US" sz="2325" dirty="0" i="1">
                 <a:solidFill>
                   <a:srgbClr val="16171D"/>
@@ -5442,7 +10538,7 @@
                   <a:srgbClr val="5F6272"/>
                 </a:solidFill>
               </a:rPr>
-              <a:t>13</a:t>
+              <a:t>15</a:t>
             </a:fld>
           </a:p>
         </p:txBody>
@@ -5785,7 +10881,7 @@
 </p:sld>
 </file>
 
-<file path=ppt/slides/slide14.xml><?xml version="1.0" encoding="utf-8"?>
+<file path=ppt/slides/slide16.xml><?xml version="1.0" encoding="utf-8"?>
 <p:sld xmlns:a="http://schemas.openxmlformats.org/drawingml/2006/main" xmlns:r="http://schemas.openxmlformats.org/officeDocument/2006/relationships" xmlns:p="http://schemas.openxmlformats.org/presentationml/2006/main">
   <p:cSld>
     <p:spTree>
@@ -6102,7 +11198,7 @@
                   <a:srgbClr val="5F6272"/>
                 </a:solidFill>
               </a:rPr>
-              <a:t>14</a:t>
+              <a:t>16</a:t>
             </a:fld>
           </a:p>
         </p:txBody>

--- a/IEP/t2-lesson1-transforming-linear-functions-IEP.pptx
+++ b/IEP/t2-lesson1-transforming-linear-functions-IEP.pptx
@@ -521,7 +521,7 @@
           <a:p>
             <a:r>
               <a:rPr lang="en-US" dirty="0"/>
-              <a:t>Give students time to try all items before revealing. Students may use the steps slide and their notes.</a:t>
+              <a:t>Give students time to try all items before revealing. Students may use the steps slide and their notes. After each answer, click once per step and read it aloud so students can find where their work went wrong.</a:t>
             </a:r>
           </a:p>
         </p:txBody>
@@ -9855,14 +9855,14 @@
       </p:sp>
       <p:sp>
         <p:nvSpPr>
-          <p:cNvPr id="6" name="Shape 6"/>
+          <p:cNvPr id="8" name="Shape 8"/>
           <p:cNvSpPr txBox="1"/>
           <p:nvPr/>
         </p:nvSpPr>
         <p:spPr>
           <a:xfrm>
             <a:off x="685800" y="1618488"/>
-            <a:ext cx="10820095" cy="1309116"/>
+            <a:ext cx="3479698" cy="2626614"/>
           </a:xfrm>
           <a:prstGeom prst="roundRect">
             <a:avLst>
@@ -9902,7 +9902,7 @@
         <p:spPr>
           <a:xfrm>
             <a:off x="895350" y="1789938"/>
-            <a:ext cx="10400995" cy="352044"/>
+            <a:ext cx="3060598" cy="649224"/>
           </a:xfrm>
           <a:prstGeom prst="rect">
             <a:avLst/>
@@ -10025,7 +10025,7 @@
         </p:nvSpPr>
         <p:spPr>
           <a:xfrm>
-            <a:off x="895350" y="2237232"/>
+            <a:off x="895350" y="2534412"/>
             <a:ext cx="2576368" cy="518922"/>
           </a:xfrm>
           <a:prstGeom prst="roundRect">
@@ -10077,14 +10077,122 @@
       </p:sp>
       <p:sp>
         <p:nvSpPr>
-          <p:cNvPr id="9" name="Shape 9"/>
+          <p:cNvPr id="6" name="Shape 6"/>
           <p:cNvSpPr txBox="1"/>
           <p:nvPr/>
         </p:nvSpPr>
         <p:spPr>
           <a:xfrm>
-            <a:off x="685800" y="3060954"/>
-            <a:ext cx="10820095" cy="1309116"/>
+            <a:off x="895350" y="3148584"/>
+            <a:ext cx="3060598" cy="534924"/>
+          </a:xfrm>
+          <a:prstGeom prst="rect">
+            <a:avLst/>
+          </a:prstGeom>
+          <a:noFill/>
+          <a:ln>
+            <a:noFill/>
+          </a:ln>
+        </p:spPr>
+        <p:txBody>
+          <a:bodyPr wrap="square" lIns="36576" tIns="27432" rIns="36576" bIns="27432" anchor="t">
+            <a:noAutofit/>
+          </a:bodyPr>
+          <a:lstStyle/>
+          <a:p>
+            <a:pPr algn="l">
+              <a:lnSpc>
+                <a:spcPct val="100000"/>
+              </a:lnSpc>
+            </a:pPr>
+            <a:r>
+              <a:rPr lang="en-US" sz="1575" dirty="0" b="1">
+                <a:solidFill>
+                  <a:srgbClr val="16171D"/>
+                </a:solidFill>
+                <a:latin typeface="Segoe UI"/>
+                <a:cs typeface="Segoe UI"/>
+              </a:rPr>
+              <a:t xml:space="preserve">1.</a:t>
+            </a:r>
+            <a:r>
+              <a:rPr lang="en-US" sz="1575" dirty="0">
+                <a:solidFill>
+                  <a:srgbClr val="16171D"/>
+                </a:solidFill>
+                <a:latin typeface="Segoe UI"/>
+                <a:cs typeface="Segoe UI"/>
+              </a:rPr>
+              <a:t xml:space="preserve"> The + 6 is outside f(x), so the graph moves up or down.</a:t>
+            </a:r>
+            <a:endParaRPr lang="en-US" sz="1575" dirty="0"/>
+          </a:p>
+        </p:txBody>
+      </p:sp>
+      <p:sp>
+        <p:nvSpPr>
+          <p:cNvPr id="7" name="Shape 7"/>
+          <p:cNvSpPr txBox="1"/>
+          <p:nvPr/>
+        </p:nvSpPr>
+        <p:spPr>
+          <a:xfrm>
+            <a:off x="895350" y="3778758"/>
+            <a:ext cx="3060598" cy="294894"/>
+          </a:xfrm>
+          <a:prstGeom prst="rect">
+            <a:avLst/>
+          </a:prstGeom>
+          <a:noFill/>
+          <a:ln>
+            <a:noFill/>
+          </a:ln>
+        </p:spPr>
+        <p:txBody>
+          <a:bodyPr wrap="square" lIns="36576" tIns="27432" rIns="36576" bIns="27432" anchor="t">
+            <a:noAutofit/>
+          </a:bodyPr>
+          <a:lstStyle/>
+          <a:p>
+            <a:pPr algn="l">
+              <a:lnSpc>
+                <a:spcPct val="100000"/>
+              </a:lnSpc>
+            </a:pPr>
+            <a:r>
+              <a:rPr lang="en-US" sz="1575" dirty="0" b="1">
+                <a:solidFill>
+                  <a:srgbClr val="16171D"/>
+                </a:solidFill>
+                <a:latin typeface="Segoe UI"/>
+                <a:cs typeface="Segoe UI"/>
+              </a:rPr>
+              <a:t xml:space="preserve">2.</a:t>
+            </a:r>
+            <a:r>
+              <a:rPr lang="en-US" sz="1575" dirty="0">
+                <a:solidFill>
+                  <a:srgbClr val="16171D"/>
+                </a:solidFill>
+                <a:latin typeface="Segoe UI"/>
+                <a:cs typeface="Segoe UI"/>
+              </a:rPr>
+              <a:t xml:space="preserve"> Plus means up: up 6.</a:t>
+            </a:r>
+            <a:endParaRPr lang="en-US" sz="1575" dirty="0"/>
+          </a:p>
+        </p:txBody>
+      </p:sp>
+      <p:sp>
+        <p:nvSpPr>
+          <p:cNvPr id="13" name="Shape 13"/>
+          <p:cNvSpPr txBox="1"/>
+          <p:nvPr/>
+        </p:nvSpPr>
+        <p:spPr>
+          <a:xfrm>
+            <a:off x="4355998" y="1618488"/>
+            <a:ext cx="3479698" cy="2866644"/>
           </a:xfrm>
           <a:prstGeom prst="roundRect">
             <a:avLst>
@@ -10117,14 +10225,14 @@
       </p:sp>
       <p:sp>
         <p:nvSpPr>
-          <p:cNvPr id="7" name="Shape 7"/>
+          <p:cNvPr id="9" name="Shape 9"/>
           <p:cNvSpPr txBox="1"/>
           <p:nvPr/>
         </p:nvSpPr>
         <p:spPr>
           <a:xfrm>
-            <a:off x="895350" y="3232404"/>
-            <a:ext cx="10400995" cy="352044"/>
+            <a:off x="4565548" y="1789938"/>
+            <a:ext cx="3060598" cy="649224"/>
           </a:xfrm>
           <a:prstGeom prst="rect">
             <a:avLst/>
@@ -10241,13 +10349,13 @@
       </p:sp>
       <p:sp>
         <p:nvSpPr>
-          <p:cNvPr id="8" name="Shape 8"/>
+          <p:cNvPr id="10" name="Shape 10"/>
           <p:cNvSpPr txBox="1"/>
           <p:nvPr/>
         </p:nvSpPr>
         <p:spPr>
           <a:xfrm>
-            <a:off x="895350" y="3679698"/>
+            <a:off x="4565548" y="2534412"/>
             <a:ext cx="2078888" cy="518922"/>
           </a:xfrm>
           <a:prstGeom prst="roundRect">
@@ -10299,14 +10407,122 @@
       </p:sp>
       <p:sp>
         <p:nvSpPr>
+          <p:cNvPr id="11" name="Shape 11"/>
+          <p:cNvSpPr txBox="1"/>
+          <p:nvPr/>
+        </p:nvSpPr>
+        <p:spPr>
+          <a:xfrm>
+            <a:off x="4565548" y="3148584"/>
+            <a:ext cx="3060598" cy="534924"/>
+          </a:xfrm>
+          <a:prstGeom prst="rect">
+            <a:avLst/>
+          </a:prstGeom>
+          <a:noFill/>
+          <a:ln>
+            <a:noFill/>
+          </a:ln>
+        </p:spPr>
+        <p:txBody>
+          <a:bodyPr wrap="square" lIns="36576" tIns="27432" rIns="36576" bIns="27432" anchor="t">
+            <a:noAutofit/>
+          </a:bodyPr>
+          <a:lstStyle/>
+          <a:p>
+            <a:pPr algn="l">
+              <a:lnSpc>
+                <a:spcPct val="100000"/>
+              </a:lnSpc>
+            </a:pPr>
+            <a:r>
+              <a:rPr lang="en-US" sz="1575" dirty="0" b="1">
+                <a:solidFill>
+                  <a:srgbClr val="16171D"/>
+                </a:solidFill>
+                <a:latin typeface="Segoe UI"/>
+                <a:cs typeface="Segoe UI"/>
+              </a:rPr>
+              <a:t xml:space="preserve">1.</a:t>
+            </a:r>
+            <a:r>
+              <a:rPr lang="en-US" sz="1575" dirty="0">
+                <a:solidFill>
+                  <a:srgbClr val="16171D"/>
+                </a:solidFill>
+                <a:latin typeface="Segoe UI"/>
+                <a:cs typeface="Segoe UI"/>
+              </a:rPr>
+              <a:t xml:space="preserve"> Replace f(x) with x: g(x) = 5x.</a:t>
+            </a:r>
+            <a:endParaRPr lang="en-US" sz="1575" dirty="0"/>
+          </a:p>
+        </p:txBody>
+      </p:sp>
+      <p:sp>
+        <p:nvSpPr>
           <p:cNvPr id="12" name="Shape 12"/>
           <p:cNvSpPr txBox="1"/>
           <p:nvPr/>
         </p:nvSpPr>
         <p:spPr>
           <a:xfrm>
-            <a:off x="685800" y="4503420"/>
-            <a:ext cx="10820095" cy="1309116"/>
+            <a:off x="4565548" y="3778758"/>
+            <a:ext cx="3060598" cy="534924"/>
+          </a:xfrm>
+          <a:prstGeom prst="rect">
+            <a:avLst/>
+          </a:prstGeom>
+          <a:noFill/>
+          <a:ln>
+            <a:noFill/>
+          </a:ln>
+        </p:spPr>
+        <p:txBody>
+          <a:bodyPr wrap="square" lIns="36576" tIns="27432" rIns="36576" bIns="27432" anchor="t">
+            <a:noAutofit/>
+          </a:bodyPr>
+          <a:lstStyle/>
+          <a:p>
+            <a:pPr algn="l">
+              <a:lnSpc>
+                <a:spcPct val="100000"/>
+              </a:lnSpc>
+            </a:pPr>
+            <a:r>
+              <a:rPr lang="en-US" sz="1575" dirty="0" b="1">
+                <a:solidFill>
+                  <a:srgbClr val="16171D"/>
+                </a:solidFill>
+                <a:latin typeface="Segoe UI"/>
+                <a:cs typeface="Segoe UI"/>
+              </a:rPr>
+              <a:t xml:space="preserve">2.</a:t>
+            </a:r>
+            <a:r>
+              <a:rPr lang="en-US" sz="1575" dirty="0">
+                <a:solidFill>
+                  <a:srgbClr val="16171D"/>
+                </a:solidFill>
+                <a:latin typeface="Segoe UI"/>
+                <a:cs typeface="Segoe UI"/>
+              </a:rPr>
+              <a:t xml:space="preserve"> The number with x is 5, so the slope is 5.</a:t>
+            </a:r>
+            <a:endParaRPr lang="en-US" sz="1575" dirty="0"/>
+          </a:p>
+        </p:txBody>
+      </p:sp>
+      <p:sp>
+        <p:nvSpPr>
+          <p:cNvPr id="19" name="Shape 19"/>
+          <p:cNvSpPr txBox="1"/>
+          <p:nvPr/>
+        </p:nvSpPr>
+        <p:spPr>
+          <a:xfrm>
+            <a:off x="8026197" y="1618488"/>
+            <a:ext cx="3479698" cy="4148328"/>
           </a:xfrm>
           <a:prstGeom prst="roundRect">
             <a:avLst>
@@ -10339,14 +10555,14 @@
       </p:sp>
       <p:sp>
         <p:nvSpPr>
-          <p:cNvPr id="10" name="Shape 10"/>
+          <p:cNvPr id="14" name="Shape 14"/>
           <p:cNvSpPr txBox="1"/>
           <p:nvPr/>
         </p:nvSpPr>
         <p:spPr>
           <a:xfrm>
-            <a:off x="895350" y="4674870"/>
-            <a:ext cx="10400995" cy="352044"/>
+            <a:off x="8235747" y="1789938"/>
+            <a:ext cx="3060598" cy="946404"/>
           </a:xfrm>
           <a:prstGeom prst="rect">
             <a:avLst/>
@@ -10423,14 +10639,14 @@
       </p:sp>
       <p:sp>
         <p:nvSpPr>
-          <p:cNvPr id="11" name="Shape 11"/>
+          <p:cNvPr id="15" name="Shape 15"/>
           <p:cNvSpPr txBox="1"/>
           <p:nvPr/>
         </p:nvSpPr>
         <p:spPr>
           <a:xfrm>
-            <a:off x="895350" y="5122164"/>
-            <a:ext cx="3571326" cy="518922"/>
+            <a:off x="8235747" y="2831592"/>
+            <a:ext cx="3060598" cy="873252"/>
           </a:xfrm>
           <a:prstGeom prst="roundRect">
             <a:avLst>
@@ -10511,7 +10727,169 @@
       </p:sp>
       <p:sp>
         <p:nvSpPr>
-          <p:cNvPr id="13" name="Slide Number 13"/>
+          <p:cNvPr id="16" name="Shape 16"/>
+          <p:cNvSpPr txBox="1"/>
+          <p:nvPr/>
+        </p:nvSpPr>
+        <p:spPr>
+          <a:xfrm>
+            <a:off x="8235747" y="3800094"/>
+            <a:ext cx="3060598" cy="534924"/>
+          </a:xfrm>
+          <a:prstGeom prst="rect">
+            <a:avLst/>
+          </a:prstGeom>
+          <a:noFill/>
+          <a:ln>
+            <a:noFill/>
+          </a:ln>
+        </p:spPr>
+        <p:txBody>
+          <a:bodyPr wrap="square" lIns="36576" tIns="27432" rIns="36576" bIns="27432" anchor="t">
+            <a:noAutofit/>
+          </a:bodyPr>
+          <a:lstStyle/>
+          <a:p>
+            <a:pPr algn="l">
+              <a:lnSpc>
+                <a:spcPct val="100000"/>
+              </a:lnSpc>
+            </a:pPr>
+            <a:r>
+              <a:rPr lang="en-US" sz="1575" dirty="0" b="1">
+                <a:solidFill>
+                  <a:srgbClr val="16171D"/>
+                </a:solidFill>
+                <a:latin typeface="Segoe UI"/>
+                <a:cs typeface="Segoe UI"/>
+              </a:rPr>
+              <a:t xml:space="preserve">1.</a:t>
+            </a:r>
+            <a:r>
+              <a:rPr lang="en-US" sz="1575" dirty="0">
+                <a:solidFill>
+                  <a:srgbClr val="16171D"/>
+                </a:solidFill>
+                <a:latin typeface="Segoe UI"/>
+                <a:cs typeface="Segoe UI"/>
+              </a:rPr>
+              <a:t xml:space="preserve"> Parallel means the same slope: m = 4.</a:t>
+            </a:r>
+            <a:endParaRPr lang="en-US" sz="1575" dirty="0"/>
+          </a:p>
+        </p:txBody>
+      </p:sp>
+      <p:sp>
+        <p:nvSpPr>
+          <p:cNvPr id="17" name="Shape 17"/>
+          <p:cNvSpPr txBox="1"/>
+          <p:nvPr/>
+        </p:nvSpPr>
+        <p:spPr>
+          <a:xfrm>
+            <a:off x="8235747" y="4430268"/>
+            <a:ext cx="3060598" cy="774954"/>
+          </a:xfrm>
+          <a:prstGeom prst="rect">
+            <a:avLst/>
+          </a:prstGeom>
+          <a:noFill/>
+          <a:ln>
+            <a:noFill/>
+          </a:ln>
+        </p:spPr>
+        <p:txBody>
+          <a:bodyPr wrap="square" lIns="36576" tIns="27432" rIns="36576" bIns="27432" anchor="t">
+            <a:noAutofit/>
+          </a:bodyPr>
+          <a:lstStyle/>
+          <a:p>
+            <a:pPr algn="l">
+              <a:lnSpc>
+                <a:spcPct val="100000"/>
+              </a:lnSpc>
+            </a:pPr>
+            <a:r>
+              <a:rPr lang="en-US" sz="1575" dirty="0" b="1">
+                <a:solidFill>
+                  <a:srgbClr val="16171D"/>
+                </a:solidFill>
+                <a:latin typeface="Segoe UI"/>
+                <a:cs typeface="Segoe UI"/>
+              </a:rPr>
+              <a:t xml:space="preserve">2.</a:t>
+            </a:r>
+            <a:r>
+              <a:rPr lang="en-US" sz="1575" dirty="0">
+                <a:solidFill>
+                  <a:srgbClr val="16171D"/>
+                </a:solidFill>
+                <a:latin typeface="Segoe UI"/>
+                <a:cs typeface="Segoe UI"/>
+              </a:rPr>
+              <a:t xml:space="preserve"> Put x = 0, y = −2 into y = mx + b: −2 = 4(0) + b, so b = −2.</a:t>
+            </a:r>
+            <a:endParaRPr lang="en-US" sz="1575" dirty="0"/>
+          </a:p>
+        </p:txBody>
+      </p:sp>
+      <p:sp>
+        <p:nvSpPr>
+          <p:cNvPr id="18" name="Shape 18"/>
+          <p:cNvSpPr txBox="1"/>
+          <p:nvPr/>
+        </p:nvSpPr>
+        <p:spPr>
+          <a:xfrm>
+            <a:off x="8235747" y="5300472"/>
+            <a:ext cx="3060598" cy="294894"/>
+          </a:xfrm>
+          <a:prstGeom prst="rect">
+            <a:avLst/>
+          </a:prstGeom>
+          <a:noFill/>
+          <a:ln>
+            <a:noFill/>
+          </a:ln>
+        </p:spPr>
+        <p:txBody>
+          <a:bodyPr wrap="square" lIns="36576" tIns="27432" rIns="36576" bIns="27432" anchor="t">
+            <a:noAutofit/>
+          </a:bodyPr>
+          <a:lstStyle/>
+          <a:p>
+            <a:pPr algn="l">
+              <a:lnSpc>
+                <a:spcPct val="100000"/>
+              </a:lnSpc>
+            </a:pPr>
+            <a:r>
+              <a:rPr lang="en-US" sz="1575" dirty="0" b="1">
+                <a:solidFill>
+                  <a:srgbClr val="16171D"/>
+                </a:solidFill>
+                <a:latin typeface="Segoe UI"/>
+                <a:cs typeface="Segoe UI"/>
+              </a:rPr>
+              <a:t xml:space="preserve">3.</a:t>
+            </a:r>
+            <a:r>
+              <a:rPr lang="en-US" sz="1575" dirty="0">
+                <a:solidFill>
+                  <a:srgbClr val="16171D"/>
+                </a:solidFill>
+                <a:latin typeface="Segoe UI"/>
+                <a:cs typeface="Segoe UI"/>
+              </a:rPr>
+              <a:t xml:space="preserve"> Write it: y = 4x − 2.</a:t>
+            </a:r>
+            <a:endParaRPr lang="en-US" sz="1575" dirty="0"/>
+          </a:p>
+        </p:txBody>
+      </p:sp>
+      <p:sp>
+        <p:nvSpPr>
+          <p:cNvPr id="20" name="Slide Number 20"/>
           <p:cNvSpPr txBox="1"/>
           <p:nvPr/>
         </p:nvSpPr>
@@ -10671,7 +11049,7 @@
                             </p:stCondLst>
                             <p:childTnLst>
                               <p:par>
-                                <p:cTn id="14" presetID="53" presetClass="entr" presetSubtype="16" fill="hold" nodeType="clickEffect">
+                                <p:cTn id="14" presetID="42" presetClass="entr" presetSubtype="0" fill="hold" nodeType="clickEffect">
                                   <p:stCondLst>
                                     <p:cond delay="0"/>
                                   </p:stCondLst>
@@ -10684,7 +11062,7 @@
                                           </p:stCondLst>
                                         </p:cTn>
                                         <p:tgtEl>
-                                          <p:spTgt spid="8"/>
+                                          <p:spTgt spid="6"/>
                                         </p:tgtEl>
                                         <p:attrNameLst>
                                           <p:attrName>style.visibility</p:attrName>
@@ -10698,7 +11076,7 @@
                                       <p:cBhvr>
                                         <p:cTn id="11" dur="500"/>
                                         <p:tgtEl>
-                                          <p:spTgt spid="8"/>
+                                          <p:spTgt spid="6"/>
                                         </p:tgtEl>
                                       </p:cBhvr>
                                     </p:animEffect>
@@ -10706,7 +11084,205 @@
                                       <p:cBhvr>
                                         <p:cTn id="12" dur="500" fill="hold"/>
                                         <p:tgtEl>
-                                          <p:spTgt spid="8"/>
+                                          <p:spTgt spid="6"/>
+                                        </p:tgtEl>
+                                        <p:attrNameLst>
+                                          <p:attrName>ppt_x</p:attrName>
+                                        </p:attrNameLst>
+                                      </p:cBhvr>
+                                      <p:tavLst>
+                                        <p:tav tm="0">
+                                          <p:val>
+                                            <p:strVal val="#ppt_x"/>
+                                          </p:val>
+                                        </p:tav>
+                                        <p:tav tm="100000">
+                                          <p:val>
+                                            <p:strVal val="#ppt_x"/>
+                                          </p:val>
+                                        </p:tav>
+                                      </p:tavLst>
+                                    </p:anim>
+                                    <p:anim calcmode="lin" valueType="num">
+                                      <p:cBhvr>
+                                        <p:cTn id="13" dur="500" fill="hold"/>
+                                        <p:tgtEl>
+                                          <p:spTgt spid="6"/>
+                                        </p:tgtEl>
+                                        <p:attrNameLst>
+                                          <p:attrName>ppt_y</p:attrName>
+                                        </p:attrNameLst>
+                                      </p:cBhvr>
+                                      <p:tavLst>
+                                        <p:tav tm="0">
+                                          <p:val>
+                                            <p:strVal val="#ppt_y+.1"/>
+                                          </p:val>
+                                        </p:tav>
+                                        <p:tav tm="100000">
+                                          <p:val>
+                                            <p:strVal val="#ppt_y"/>
+                                          </p:val>
+                                        </p:tav>
+                                      </p:tavLst>
+                                    </p:anim>
+                                  </p:childTnLst>
+                                </p:cTn>
+                              </p:par>
+                            </p:childTnLst>
+                          </p:cTn>
+                        </p:par>
+                      </p:childTnLst>
+                    </p:cTn>
+                  </p:par>
+                  <p:par>
+                    <p:cTn id="22" fill="hold">
+                      <p:stCondLst>
+                        <p:cond delay="indefinite"/>
+                      </p:stCondLst>
+                      <p:childTnLst>
+                        <p:par>
+                          <p:cTn id="23" fill="hold">
+                            <p:stCondLst>
+                              <p:cond delay="0"/>
+                            </p:stCondLst>
+                            <p:childTnLst>
+                              <p:par>
+                                <p:cTn id="21" presetID="42" presetClass="entr" presetSubtype="0" fill="hold" nodeType="clickEffect">
+                                  <p:stCondLst>
+                                    <p:cond delay="0"/>
+                                  </p:stCondLst>
+                                  <p:childTnLst>
+                                    <p:set>
+                                      <p:cBhvr>
+                                        <p:cTn id="17" dur="1" fill="hold">
+                                          <p:stCondLst>
+                                            <p:cond delay="0"/>
+                                          </p:stCondLst>
+                                        </p:cTn>
+                                        <p:tgtEl>
+                                          <p:spTgt spid="7"/>
+                                        </p:tgtEl>
+                                        <p:attrNameLst>
+                                          <p:attrName>style.visibility</p:attrName>
+                                        </p:attrNameLst>
+                                      </p:cBhvr>
+                                      <p:to>
+                                        <p:strVal val="visible"/>
+                                      </p:to>
+                                    </p:set>
+                                    <p:animEffect transition="in" filter="fade">
+                                      <p:cBhvr>
+                                        <p:cTn id="18" dur="500"/>
+                                        <p:tgtEl>
+                                          <p:spTgt spid="7"/>
+                                        </p:tgtEl>
+                                      </p:cBhvr>
+                                    </p:animEffect>
+                                    <p:anim calcmode="lin" valueType="num">
+                                      <p:cBhvr>
+                                        <p:cTn id="19" dur="500" fill="hold"/>
+                                        <p:tgtEl>
+                                          <p:spTgt spid="7"/>
+                                        </p:tgtEl>
+                                        <p:attrNameLst>
+                                          <p:attrName>ppt_x</p:attrName>
+                                        </p:attrNameLst>
+                                      </p:cBhvr>
+                                      <p:tavLst>
+                                        <p:tav tm="0">
+                                          <p:val>
+                                            <p:strVal val="#ppt_x"/>
+                                          </p:val>
+                                        </p:tav>
+                                        <p:tav tm="100000">
+                                          <p:val>
+                                            <p:strVal val="#ppt_x"/>
+                                          </p:val>
+                                        </p:tav>
+                                      </p:tavLst>
+                                    </p:anim>
+                                    <p:anim calcmode="lin" valueType="num">
+                                      <p:cBhvr>
+                                        <p:cTn id="20" dur="500" fill="hold"/>
+                                        <p:tgtEl>
+                                          <p:spTgt spid="7"/>
+                                        </p:tgtEl>
+                                        <p:attrNameLst>
+                                          <p:attrName>ppt_y</p:attrName>
+                                        </p:attrNameLst>
+                                      </p:cBhvr>
+                                      <p:tavLst>
+                                        <p:tav tm="0">
+                                          <p:val>
+                                            <p:strVal val="#ppt_y+.1"/>
+                                          </p:val>
+                                        </p:tav>
+                                        <p:tav tm="100000">
+                                          <p:val>
+                                            <p:strVal val="#ppt_y"/>
+                                          </p:val>
+                                        </p:tav>
+                                      </p:tavLst>
+                                    </p:anim>
+                                  </p:childTnLst>
+                                </p:cTn>
+                              </p:par>
+                            </p:childTnLst>
+                          </p:cTn>
+                        </p:par>
+                      </p:childTnLst>
+                    </p:cTn>
+                  </p:par>
+                  <p:par>
+                    <p:cTn id="29" fill="hold">
+                      <p:stCondLst>
+                        <p:cond delay="indefinite"/>
+                      </p:stCondLst>
+                      <p:childTnLst>
+                        <p:par>
+                          <p:cTn id="30" fill="hold">
+                            <p:stCondLst>
+                              <p:cond delay="0"/>
+                            </p:stCondLst>
+                            <p:childTnLst>
+                              <p:par>
+                                <p:cTn id="28" presetID="53" presetClass="entr" presetSubtype="16" fill="hold" nodeType="clickEffect">
+                                  <p:stCondLst>
+                                    <p:cond delay="0"/>
+                                  </p:stCondLst>
+                                  <p:childTnLst>
+                                    <p:set>
+                                      <p:cBhvr>
+                                        <p:cTn id="24" dur="1" fill="hold">
+                                          <p:stCondLst>
+                                            <p:cond delay="0"/>
+                                          </p:stCondLst>
+                                        </p:cTn>
+                                        <p:tgtEl>
+                                          <p:spTgt spid="10"/>
+                                        </p:tgtEl>
+                                        <p:attrNameLst>
+                                          <p:attrName>style.visibility</p:attrName>
+                                        </p:attrNameLst>
+                                      </p:cBhvr>
+                                      <p:to>
+                                        <p:strVal val="visible"/>
+                                      </p:to>
+                                    </p:set>
+                                    <p:animEffect transition="in" filter="fade">
+                                      <p:cBhvr>
+                                        <p:cTn id="25" dur="500"/>
+                                        <p:tgtEl>
+                                          <p:spTgt spid="10"/>
+                                        </p:tgtEl>
+                                      </p:cBhvr>
+                                    </p:animEffect>
+                                    <p:anim calcmode="lin" valueType="num">
+                                      <p:cBhvr>
+                                        <p:cTn id="26" dur="500" fill="hold"/>
+                                        <p:tgtEl>
+                                          <p:spTgt spid="10"/>
                                         </p:tgtEl>
                                         <p:attrNameLst>
                                           <p:attrName>ppt_w</p:attrName>
@@ -10727,9 +11303,9 @@
                                     </p:anim>
                                     <p:anim calcmode="lin" valueType="num">
                                       <p:cBhvr>
-                                        <p:cTn id="13" dur="500" fill="hold"/>
+                                        <p:cTn id="27" dur="500" fill="hold"/>
                                         <p:tgtEl>
-                                          <p:spTgt spid="8"/>
+                                          <p:spTgt spid="10"/>
                                         </p:tgtEl>
                                         <p:attrNameLst>
                                           <p:attrName>ppt_h</p:attrName>
@@ -10758,26 +11334,26 @@
                     </p:cTn>
                   </p:par>
                   <p:par>
-                    <p:cTn id="22" fill="hold">
+                    <p:cTn id="36" fill="hold">
                       <p:stCondLst>
                         <p:cond delay="indefinite"/>
                       </p:stCondLst>
                       <p:childTnLst>
                         <p:par>
-                          <p:cTn id="23" fill="hold">
+                          <p:cTn id="37" fill="hold">
                             <p:stCondLst>
                               <p:cond delay="0"/>
                             </p:stCondLst>
                             <p:childTnLst>
                               <p:par>
-                                <p:cTn id="21" presetID="53" presetClass="entr" presetSubtype="16" fill="hold" nodeType="clickEffect">
+                                <p:cTn id="35" presetID="42" presetClass="entr" presetSubtype="0" fill="hold" nodeType="clickEffect">
                                   <p:stCondLst>
                                     <p:cond delay="0"/>
                                   </p:stCondLst>
                                   <p:childTnLst>
                                     <p:set>
                                       <p:cBhvr>
-                                        <p:cTn id="17" dur="1" fill="hold">
+                                        <p:cTn id="31" dur="1" fill="hold">
                                           <p:stCondLst>
                                             <p:cond delay="0"/>
                                           </p:stCondLst>
@@ -10795,7 +11371,7 @@
                                     </p:set>
                                     <p:animEffect transition="in" filter="fade">
                                       <p:cBhvr>
-                                        <p:cTn id="18" dur="500"/>
+                                        <p:cTn id="32" dur="500"/>
                                         <p:tgtEl>
                                           <p:spTgt spid="11"/>
                                         </p:tgtEl>
@@ -10803,9 +11379,207 @@
                                     </p:animEffect>
                                     <p:anim calcmode="lin" valueType="num">
                                       <p:cBhvr>
-                                        <p:cTn id="19" dur="500" fill="hold"/>
+                                        <p:cTn id="33" dur="500" fill="hold"/>
                                         <p:tgtEl>
                                           <p:spTgt spid="11"/>
+                                        </p:tgtEl>
+                                        <p:attrNameLst>
+                                          <p:attrName>ppt_x</p:attrName>
+                                        </p:attrNameLst>
+                                      </p:cBhvr>
+                                      <p:tavLst>
+                                        <p:tav tm="0">
+                                          <p:val>
+                                            <p:strVal val="#ppt_x"/>
+                                          </p:val>
+                                        </p:tav>
+                                        <p:tav tm="100000">
+                                          <p:val>
+                                            <p:strVal val="#ppt_x"/>
+                                          </p:val>
+                                        </p:tav>
+                                      </p:tavLst>
+                                    </p:anim>
+                                    <p:anim calcmode="lin" valueType="num">
+                                      <p:cBhvr>
+                                        <p:cTn id="34" dur="500" fill="hold"/>
+                                        <p:tgtEl>
+                                          <p:spTgt spid="11"/>
+                                        </p:tgtEl>
+                                        <p:attrNameLst>
+                                          <p:attrName>ppt_y</p:attrName>
+                                        </p:attrNameLst>
+                                      </p:cBhvr>
+                                      <p:tavLst>
+                                        <p:tav tm="0">
+                                          <p:val>
+                                            <p:strVal val="#ppt_y+.1"/>
+                                          </p:val>
+                                        </p:tav>
+                                        <p:tav tm="100000">
+                                          <p:val>
+                                            <p:strVal val="#ppt_y"/>
+                                          </p:val>
+                                        </p:tav>
+                                      </p:tavLst>
+                                    </p:anim>
+                                  </p:childTnLst>
+                                </p:cTn>
+                              </p:par>
+                            </p:childTnLst>
+                          </p:cTn>
+                        </p:par>
+                      </p:childTnLst>
+                    </p:cTn>
+                  </p:par>
+                  <p:par>
+                    <p:cTn id="43" fill="hold">
+                      <p:stCondLst>
+                        <p:cond delay="indefinite"/>
+                      </p:stCondLst>
+                      <p:childTnLst>
+                        <p:par>
+                          <p:cTn id="44" fill="hold">
+                            <p:stCondLst>
+                              <p:cond delay="0"/>
+                            </p:stCondLst>
+                            <p:childTnLst>
+                              <p:par>
+                                <p:cTn id="42" presetID="42" presetClass="entr" presetSubtype="0" fill="hold" nodeType="clickEffect">
+                                  <p:stCondLst>
+                                    <p:cond delay="0"/>
+                                  </p:stCondLst>
+                                  <p:childTnLst>
+                                    <p:set>
+                                      <p:cBhvr>
+                                        <p:cTn id="38" dur="1" fill="hold">
+                                          <p:stCondLst>
+                                            <p:cond delay="0"/>
+                                          </p:stCondLst>
+                                        </p:cTn>
+                                        <p:tgtEl>
+                                          <p:spTgt spid="12"/>
+                                        </p:tgtEl>
+                                        <p:attrNameLst>
+                                          <p:attrName>style.visibility</p:attrName>
+                                        </p:attrNameLst>
+                                      </p:cBhvr>
+                                      <p:to>
+                                        <p:strVal val="visible"/>
+                                      </p:to>
+                                    </p:set>
+                                    <p:animEffect transition="in" filter="fade">
+                                      <p:cBhvr>
+                                        <p:cTn id="39" dur="500"/>
+                                        <p:tgtEl>
+                                          <p:spTgt spid="12"/>
+                                        </p:tgtEl>
+                                      </p:cBhvr>
+                                    </p:animEffect>
+                                    <p:anim calcmode="lin" valueType="num">
+                                      <p:cBhvr>
+                                        <p:cTn id="40" dur="500" fill="hold"/>
+                                        <p:tgtEl>
+                                          <p:spTgt spid="12"/>
+                                        </p:tgtEl>
+                                        <p:attrNameLst>
+                                          <p:attrName>ppt_x</p:attrName>
+                                        </p:attrNameLst>
+                                      </p:cBhvr>
+                                      <p:tavLst>
+                                        <p:tav tm="0">
+                                          <p:val>
+                                            <p:strVal val="#ppt_x"/>
+                                          </p:val>
+                                        </p:tav>
+                                        <p:tav tm="100000">
+                                          <p:val>
+                                            <p:strVal val="#ppt_x"/>
+                                          </p:val>
+                                        </p:tav>
+                                      </p:tavLst>
+                                    </p:anim>
+                                    <p:anim calcmode="lin" valueType="num">
+                                      <p:cBhvr>
+                                        <p:cTn id="41" dur="500" fill="hold"/>
+                                        <p:tgtEl>
+                                          <p:spTgt spid="12"/>
+                                        </p:tgtEl>
+                                        <p:attrNameLst>
+                                          <p:attrName>ppt_y</p:attrName>
+                                        </p:attrNameLst>
+                                      </p:cBhvr>
+                                      <p:tavLst>
+                                        <p:tav tm="0">
+                                          <p:val>
+                                            <p:strVal val="#ppt_y+.1"/>
+                                          </p:val>
+                                        </p:tav>
+                                        <p:tav tm="100000">
+                                          <p:val>
+                                            <p:strVal val="#ppt_y"/>
+                                          </p:val>
+                                        </p:tav>
+                                      </p:tavLst>
+                                    </p:anim>
+                                  </p:childTnLst>
+                                </p:cTn>
+                              </p:par>
+                            </p:childTnLst>
+                          </p:cTn>
+                        </p:par>
+                      </p:childTnLst>
+                    </p:cTn>
+                  </p:par>
+                  <p:par>
+                    <p:cTn id="50" fill="hold">
+                      <p:stCondLst>
+                        <p:cond delay="indefinite"/>
+                      </p:stCondLst>
+                      <p:childTnLst>
+                        <p:par>
+                          <p:cTn id="51" fill="hold">
+                            <p:stCondLst>
+                              <p:cond delay="0"/>
+                            </p:stCondLst>
+                            <p:childTnLst>
+                              <p:par>
+                                <p:cTn id="49" presetID="53" presetClass="entr" presetSubtype="16" fill="hold" nodeType="clickEffect">
+                                  <p:stCondLst>
+                                    <p:cond delay="0"/>
+                                  </p:stCondLst>
+                                  <p:childTnLst>
+                                    <p:set>
+                                      <p:cBhvr>
+                                        <p:cTn id="45" dur="1" fill="hold">
+                                          <p:stCondLst>
+                                            <p:cond delay="0"/>
+                                          </p:stCondLst>
+                                        </p:cTn>
+                                        <p:tgtEl>
+                                          <p:spTgt spid="15"/>
+                                        </p:tgtEl>
+                                        <p:attrNameLst>
+                                          <p:attrName>style.visibility</p:attrName>
+                                        </p:attrNameLst>
+                                      </p:cBhvr>
+                                      <p:to>
+                                        <p:strVal val="visible"/>
+                                      </p:to>
+                                    </p:set>
+                                    <p:animEffect transition="in" filter="fade">
+                                      <p:cBhvr>
+                                        <p:cTn id="46" dur="500"/>
+                                        <p:tgtEl>
+                                          <p:spTgt spid="15"/>
+                                        </p:tgtEl>
+                                      </p:cBhvr>
+                                    </p:animEffect>
+                                    <p:anim calcmode="lin" valueType="num">
+                                      <p:cBhvr>
+                                        <p:cTn id="47" dur="500" fill="hold"/>
+                                        <p:tgtEl>
+                                          <p:spTgt spid="15"/>
                                         </p:tgtEl>
                                         <p:attrNameLst>
                                           <p:attrName>ppt_w</p:attrName>
@@ -10826,9 +11600,9 @@
                                     </p:anim>
                                     <p:anim calcmode="lin" valueType="num">
                                       <p:cBhvr>
-                                        <p:cTn id="20" dur="500" fill="hold"/>
+                                        <p:cTn id="48" dur="500" fill="hold"/>
                                         <p:tgtEl>
-                                          <p:spTgt spid="11"/>
+                                          <p:spTgt spid="15"/>
                                         </p:tgtEl>
                                         <p:attrNameLst>
                                           <p:attrName>ppt_h</p:attrName>
@@ -10843,6 +11617,303 @@
                                         <p:tav tm="100000">
                                           <p:val>
                                             <p:strVal val="#ppt_h"/>
+                                          </p:val>
+                                        </p:tav>
+                                      </p:tavLst>
+                                    </p:anim>
+                                  </p:childTnLst>
+                                </p:cTn>
+                              </p:par>
+                            </p:childTnLst>
+                          </p:cTn>
+                        </p:par>
+                      </p:childTnLst>
+                    </p:cTn>
+                  </p:par>
+                  <p:par>
+                    <p:cTn id="57" fill="hold">
+                      <p:stCondLst>
+                        <p:cond delay="indefinite"/>
+                      </p:stCondLst>
+                      <p:childTnLst>
+                        <p:par>
+                          <p:cTn id="58" fill="hold">
+                            <p:stCondLst>
+                              <p:cond delay="0"/>
+                            </p:stCondLst>
+                            <p:childTnLst>
+                              <p:par>
+                                <p:cTn id="56" presetID="42" presetClass="entr" presetSubtype="0" fill="hold" nodeType="clickEffect">
+                                  <p:stCondLst>
+                                    <p:cond delay="0"/>
+                                  </p:stCondLst>
+                                  <p:childTnLst>
+                                    <p:set>
+                                      <p:cBhvr>
+                                        <p:cTn id="52" dur="1" fill="hold">
+                                          <p:stCondLst>
+                                            <p:cond delay="0"/>
+                                          </p:stCondLst>
+                                        </p:cTn>
+                                        <p:tgtEl>
+                                          <p:spTgt spid="16"/>
+                                        </p:tgtEl>
+                                        <p:attrNameLst>
+                                          <p:attrName>style.visibility</p:attrName>
+                                        </p:attrNameLst>
+                                      </p:cBhvr>
+                                      <p:to>
+                                        <p:strVal val="visible"/>
+                                      </p:to>
+                                    </p:set>
+                                    <p:animEffect transition="in" filter="fade">
+                                      <p:cBhvr>
+                                        <p:cTn id="53" dur="500"/>
+                                        <p:tgtEl>
+                                          <p:spTgt spid="16"/>
+                                        </p:tgtEl>
+                                      </p:cBhvr>
+                                    </p:animEffect>
+                                    <p:anim calcmode="lin" valueType="num">
+                                      <p:cBhvr>
+                                        <p:cTn id="54" dur="500" fill="hold"/>
+                                        <p:tgtEl>
+                                          <p:spTgt spid="16"/>
+                                        </p:tgtEl>
+                                        <p:attrNameLst>
+                                          <p:attrName>ppt_x</p:attrName>
+                                        </p:attrNameLst>
+                                      </p:cBhvr>
+                                      <p:tavLst>
+                                        <p:tav tm="0">
+                                          <p:val>
+                                            <p:strVal val="#ppt_x"/>
+                                          </p:val>
+                                        </p:tav>
+                                        <p:tav tm="100000">
+                                          <p:val>
+                                            <p:strVal val="#ppt_x"/>
+                                          </p:val>
+                                        </p:tav>
+                                      </p:tavLst>
+                                    </p:anim>
+                                    <p:anim calcmode="lin" valueType="num">
+                                      <p:cBhvr>
+                                        <p:cTn id="55" dur="500" fill="hold"/>
+                                        <p:tgtEl>
+                                          <p:spTgt spid="16"/>
+                                        </p:tgtEl>
+                                        <p:attrNameLst>
+                                          <p:attrName>ppt_y</p:attrName>
+                                        </p:attrNameLst>
+                                      </p:cBhvr>
+                                      <p:tavLst>
+                                        <p:tav tm="0">
+                                          <p:val>
+                                            <p:strVal val="#ppt_y+.1"/>
+                                          </p:val>
+                                        </p:tav>
+                                        <p:tav tm="100000">
+                                          <p:val>
+                                            <p:strVal val="#ppt_y"/>
+                                          </p:val>
+                                        </p:tav>
+                                      </p:tavLst>
+                                    </p:anim>
+                                  </p:childTnLst>
+                                </p:cTn>
+                              </p:par>
+                            </p:childTnLst>
+                          </p:cTn>
+                        </p:par>
+                      </p:childTnLst>
+                    </p:cTn>
+                  </p:par>
+                  <p:par>
+                    <p:cTn id="64" fill="hold">
+                      <p:stCondLst>
+                        <p:cond delay="indefinite"/>
+                      </p:stCondLst>
+                      <p:childTnLst>
+                        <p:par>
+                          <p:cTn id="65" fill="hold">
+                            <p:stCondLst>
+                              <p:cond delay="0"/>
+                            </p:stCondLst>
+                            <p:childTnLst>
+                              <p:par>
+                                <p:cTn id="63" presetID="42" presetClass="entr" presetSubtype="0" fill="hold" nodeType="clickEffect">
+                                  <p:stCondLst>
+                                    <p:cond delay="0"/>
+                                  </p:stCondLst>
+                                  <p:childTnLst>
+                                    <p:set>
+                                      <p:cBhvr>
+                                        <p:cTn id="59" dur="1" fill="hold">
+                                          <p:stCondLst>
+                                            <p:cond delay="0"/>
+                                          </p:stCondLst>
+                                        </p:cTn>
+                                        <p:tgtEl>
+                                          <p:spTgt spid="17"/>
+                                        </p:tgtEl>
+                                        <p:attrNameLst>
+                                          <p:attrName>style.visibility</p:attrName>
+                                        </p:attrNameLst>
+                                      </p:cBhvr>
+                                      <p:to>
+                                        <p:strVal val="visible"/>
+                                      </p:to>
+                                    </p:set>
+                                    <p:animEffect transition="in" filter="fade">
+                                      <p:cBhvr>
+                                        <p:cTn id="60" dur="500"/>
+                                        <p:tgtEl>
+                                          <p:spTgt spid="17"/>
+                                        </p:tgtEl>
+                                      </p:cBhvr>
+                                    </p:animEffect>
+                                    <p:anim calcmode="lin" valueType="num">
+                                      <p:cBhvr>
+                                        <p:cTn id="61" dur="500" fill="hold"/>
+                                        <p:tgtEl>
+                                          <p:spTgt spid="17"/>
+                                        </p:tgtEl>
+                                        <p:attrNameLst>
+                                          <p:attrName>ppt_x</p:attrName>
+                                        </p:attrNameLst>
+                                      </p:cBhvr>
+                                      <p:tavLst>
+                                        <p:tav tm="0">
+                                          <p:val>
+                                            <p:strVal val="#ppt_x"/>
+                                          </p:val>
+                                        </p:tav>
+                                        <p:tav tm="100000">
+                                          <p:val>
+                                            <p:strVal val="#ppt_x"/>
+                                          </p:val>
+                                        </p:tav>
+                                      </p:tavLst>
+                                    </p:anim>
+                                    <p:anim calcmode="lin" valueType="num">
+                                      <p:cBhvr>
+                                        <p:cTn id="62" dur="500" fill="hold"/>
+                                        <p:tgtEl>
+                                          <p:spTgt spid="17"/>
+                                        </p:tgtEl>
+                                        <p:attrNameLst>
+                                          <p:attrName>ppt_y</p:attrName>
+                                        </p:attrNameLst>
+                                      </p:cBhvr>
+                                      <p:tavLst>
+                                        <p:tav tm="0">
+                                          <p:val>
+                                            <p:strVal val="#ppt_y+.1"/>
+                                          </p:val>
+                                        </p:tav>
+                                        <p:tav tm="100000">
+                                          <p:val>
+                                            <p:strVal val="#ppt_y"/>
+                                          </p:val>
+                                        </p:tav>
+                                      </p:tavLst>
+                                    </p:anim>
+                                  </p:childTnLst>
+                                </p:cTn>
+                              </p:par>
+                            </p:childTnLst>
+                          </p:cTn>
+                        </p:par>
+                      </p:childTnLst>
+                    </p:cTn>
+                  </p:par>
+                  <p:par>
+                    <p:cTn id="71" fill="hold">
+                      <p:stCondLst>
+                        <p:cond delay="indefinite"/>
+                      </p:stCondLst>
+                      <p:childTnLst>
+                        <p:par>
+                          <p:cTn id="72" fill="hold">
+                            <p:stCondLst>
+                              <p:cond delay="0"/>
+                            </p:stCondLst>
+                            <p:childTnLst>
+                              <p:par>
+                                <p:cTn id="70" presetID="42" presetClass="entr" presetSubtype="0" fill="hold" nodeType="clickEffect">
+                                  <p:stCondLst>
+                                    <p:cond delay="0"/>
+                                  </p:stCondLst>
+                                  <p:childTnLst>
+                                    <p:set>
+                                      <p:cBhvr>
+                                        <p:cTn id="66" dur="1" fill="hold">
+                                          <p:stCondLst>
+                                            <p:cond delay="0"/>
+                                          </p:stCondLst>
+                                        </p:cTn>
+                                        <p:tgtEl>
+                                          <p:spTgt spid="18"/>
+                                        </p:tgtEl>
+                                        <p:attrNameLst>
+                                          <p:attrName>style.visibility</p:attrName>
+                                        </p:attrNameLst>
+                                      </p:cBhvr>
+                                      <p:to>
+                                        <p:strVal val="visible"/>
+                                      </p:to>
+                                    </p:set>
+                                    <p:animEffect transition="in" filter="fade">
+                                      <p:cBhvr>
+                                        <p:cTn id="67" dur="500"/>
+                                        <p:tgtEl>
+                                          <p:spTgt spid="18"/>
+                                        </p:tgtEl>
+                                      </p:cBhvr>
+                                    </p:animEffect>
+                                    <p:anim calcmode="lin" valueType="num">
+                                      <p:cBhvr>
+                                        <p:cTn id="68" dur="500" fill="hold"/>
+                                        <p:tgtEl>
+                                          <p:spTgt spid="18"/>
+                                        </p:tgtEl>
+                                        <p:attrNameLst>
+                                          <p:attrName>ppt_x</p:attrName>
+                                        </p:attrNameLst>
+                                      </p:cBhvr>
+                                      <p:tavLst>
+                                        <p:tav tm="0">
+                                          <p:val>
+                                            <p:strVal val="#ppt_x"/>
+                                          </p:val>
+                                        </p:tav>
+                                        <p:tav tm="100000">
+                                          <p:val>
+                                            <p:strVal val="#ppt_x"/>
+                                          </p:val>
+                                        </p:tav>
+                                      </p:tavLst>
+                                    </p:anim>
+                                    <p:anim calcmode="lin" valueType="num">
+                                      <p:cBhvr>
+                                        <p:cTn id="69" dur="500" fill="hold"/>
+                                        <p:tgtEl>
+                                          <p:spTgt spid="18"/>
+                                        </p:tgtEl>
+                                        <p:attrNameLst>
+                                          <p:attrName>ppt_y</p:attrName>
+                                        </p:attrNameLst>
+                                      </p:cBhvr>
+                                      <p:tavLst>
+                                        <p:tav tm="0">
+                                          <p:val>
+                                            <p:strVal val="#ppt_y+.1"/>
+                                          </p:val>
+                                        </p:tav>
+                                        <p:tav tm="100000">
+                                          <p:val>
+                                            <p:strVal val="#ppt_y"/>
                                           </p:val>
                                         </p:tav>
                                       </p:tavLst>

--- a/IEP/t2-lesson1-transforming-linear-functions-IEP.pptx
+++ b/IEP/t2-lesson1-transforming-linear-functions-IEP.pptx
@@ -14259,7 +14259,7 @@
         <p:spPr>
           <a:xfrm>
             <a:off x="6210148" y="3793998"/>
-            <a:ext cx="5295748" cy="2042160"/>
+            <a:ext cx="5295748" cy="2499360"/>
           </a:xfrm>
           <a:prstGeom prst="roundRect">
             <a:avLst>
@@ -14299,7 +14299,7 @@
         <p:spPr>
           <a:xfrm>
             <a:off x="6419698" y="3965448"/>
-            <a:ext cx="4876648" cy="294894"/>
+            <a:ext cx="4876648" cy="534924"/>
           </a:xfrm>
           <a:prstGeom prst="rect">
             <a:avLst/>
@@ -14338,7 +14338,7 @@
                 <a:latin typeface="Segoe UI"/>
                 <a:cs typeface="Segoe UI"/>
               </a:rPr>
-              <a:t xml:space="preserve"> Which line is parallel to </a:t>
+              <a:t xml:space="preserve"> Which equation in slope-intercept form is parallel to </a:t>
             </a:r>
             <a:r>
               <a:rPr lang="en-US" sz="1575" dirty="0" i="1">
@@ -14379,6 +14379,26 @@
                 <a:cs typeface="Cambria"/>
               </a:rPr>
               <a:t xml:space="preserve"> + 1</a:t>
+            </a:r>
+            <a:r>
+              <a:rPr lang="en-US" sz="1575" dirty="0">
+                <a:solidFill>
+                  <a:srgbClr val="16171D"/>
+                </a:solidFill>
+                <a:latin typeface="Segoe UI"/>
+                <a:cs typeface="Segoe UI"/>
+              </a:rPr>
+              <a:t xml:space="preserve"> and passes through </a:t>
+            </a:r>
+            <a:r>
+              <a:rPr lang="en-US" sz="1575" dirty="0">
+                <a:solidFill>
+                  <a:srgbClr val="16171D"/>
+                </a:solidFill>
+                <a:latin typeface="Cambria"/>
+                <a:cs typeface="Cambria"/>
+              </a:rPr>
+              <a:t xml:space="preserve">(1, 5)</a:t>
             </a:r>
             <a:r>
               <a:rPr lang="en-US" sz="1575" dirty="0">
@@ -14402,7 +14422,7 @@
         </p:nvSpPr>
         <p:spPr>
           <a:xfrm>
-            <a:off x="6419698" y="4298442"/>
+            <a:off x="6419698" y="4538472"/>
             <a:ext cx="4876648" cy="294894"/>
           </a:xfrm>
           <a:prstGeom prst="rect">
@@ -14442,7 +14462,67 @@
                 <a:latin typeface="Segoe UI"/>
                 <a:cs typeface="Segoe UI"/>
               </a:rPr>
-              <a:t xml:space="preserve"> parallel lines have the same slope</a:t>
+              <a:t xml:space="preserve"> parallel: same slope · </a:t>
+            </a:r>
+            <a:r>
+              <a:rPr lang="en-US" sz="1575" dirty="0" i="1">
+                <a:solidFill>
+                  <a:srgbClr val="16171D"/>
+                </a:solidFill>
+                <a:latin typeface="Cambria"/>
+                <a:cs typeface="Cambria"/>
+              </a:rPr>
+              <a:t xml:space="preserve">y</a:t>
+            </a:r>
+            <a:r>
+              <a:rPr lang="en-US" sz="1575" dirty="0">
+                <a:solidFill>
+                  <a:srgbClr val="16171D"/>
+                </a:solidFill>
+                <a:latin typeface="Cambria"/>
+                <a:cs typeface="Cambria"/>
+              </a:rPr>
+              <a:t xml:space="preserve"> = </a:t>
+            </a:r>
+            <a:r>
+              <a:rPr lang="en-US" sz="1575" dirty="0" i="1">
+                <a:solidFill>
+                  <a:srgbClr val="16171D"/>
+                </a:solidFill>
+                <a:latin typeface="Cambria"/>
+                <a:cs typeface="Cambria"/>
+              </a:rPr>
+              <a:t xml:space="preserve">m</a:t>
+            </a:r>
+            <a:r>
+              <a:rPr lang="en-US" sz="1575" dirty="0" i="1">
+                <a:solidFill>
+                  <a:srgbClr val="16171D"/>
+                </a:solidFill>
+                <a:latin typeface="Cambria"/>
+                <a:cs typeface="Cambria"/>
+              </a:rPr>
+              <a:t xml:space="preserve">x</a:t>
+            </a:r>
+            <a:r>
+              <a:rPr lang="en-US" sz="1575" dirty="0">
+                <a:solidFill>
+                  <a:srgbClr val="16171D"/>
+                </a:solidFill>
+                <a:latin typeface="Cambria"/>
+                <a:cs typeface="Cambria"/>
+              </a:rPr>
+              <a:t xml:space="preserve"> + </a:t>
+            </a:r>
+            <a:r>
+              <a:rPr lang="en-US" sz="1575" dirty="0" i="1">
+                <a:solidFill>
+                  <a:srgbClr val="16171D"/>
+                </a:solidFill>
+                <a:latin typeface="Cambria"/>
+                <a:cs typeface="Cambria"/>
+              </a:rPr>
+              <a:t xml:space="preserve">b</a:t>
             </a:r>
             <a:endParaRPr lang="en-US" sz="1575" dirty="0"/>
           </a:p>
@@ -14456,8 +14536,8 @@
         </p:nvSpPr>
         <p:spPr>
           <a:xfrm>
-            <a:off x="6419698" y="4631436"/>
-            <a:ext cx="4876648" cy="1033272"/>
+            <a:off x="6419698" y="4871466"/>
+            <a:ext cx="4876648" cy="1250442"/>
           </a:xfrm>
           <a:prstGeom prst="roundRect">
             <a:avLst>
@@ -14530,7 +14610,7 @@
                 <a:latin typeface="Cambria"/>
                 <a:cs typeface="Cambria"/>
               </a:rPr>
-              <a:t xml:space="preserve"> − 5</a:t>
+              <a:t xml:space="preserve"> + 2</a:t>
             </a:r>
             <a:br>
               <a:rPr lang="en-US" sz="1425" dirty="0">
@@ -14559,7 +14639,7 @@
                 <a:latin typeface="Segoe UI"/>
                 <a:cs typeface="Segoe UI"/>
               </a:rPr>
-              <a:t xml:space="preserve"> The slope of </a:t>
+              <a:t xml:space="preserve"> Parallel to </a:t>
             </a:r>
             <a:r>
               <a:rPr lang="en-US" sz="1425" dirty="0" i="1">
@@ -14609,7 +14689,7 @@
                 <a:latin typeface="Segoe UI"/>
                 <a:cs typeface="Segoe UI"/>
               </a:rPr>
-              <a:t xml:space="preserve"> is 3, the number with </a:t>
+              <a:t xml:space="preserve"> means the same slope: </a:t>
             </a:r>
             <a:r>
               <a:rPr lang="en-US" sz="1425" dirty="0" i="1">
@@ -14619,7 +14699,17 @@
                 <a:latin typeface="Cambria"/>
                 <a:cs typeface="Cambria"/>
               </a:rPr>
-              <a:t xml:space="preserve">x</a:t>
+              <a:t xml:space="preserve">m</a:t>
+            </a:r>
+            <a:r>
+              <a:rPr lang="en-US" sz="1425" dirty="0">
+                <a:solidFill>
+                  <a:srgbClr val="16171D"/>
+                </a:solidFill>
+                <a:latin typeface="Cambria"/>
+                <a:cs typeface="Cambria"/>
+              </a:rPr>
+              <a:t xml:space="preserve"> = 3</a:t>
             </a:r>
             <a:r>
               <a:rPr lang="en-US" sz="1425" dirty="0">
@@ -14658,7 +14748,37 @@
                 <a:latin typeface="Segoe UI"/>
                 <a:cs typeface="Segoe UI"/>
               </a:rPr>
-              <a:t xml:space="preserve"> Find the choice with slope 3: </a:t>
+              <a:t xml:space="preserve"> Put in the point </a:t>
+            </a:r>
+            <a:r>
+              <a:rPr lang="en-US" sz="1425" dirty="0">
+                <a:solidFill>
+                  <a:srgbClr val="16171D"/>
+                </a:solidFill>
+                <a:latin typeface="Cambria"/>
+                <a:cs typeface="Cambria"/>
+              </a:rPr>
+              <a:t xml:space="preserve">(1, 5)</a:t>
+            </a:r>
+            <a:r>
+              <a:rPr lang="en-US" sz="1425" dirty="0">
+                <a:solidFill>
+                  <a:srgbClr val="16171D"/>
+                </a:solidFill>
+                <a:latin typeface="Segoe UI"/>
+                <a:cs typeface="Segoe UI"/>
+              </a:rPr>
+              <a:t xml:space="preserve">: </a:t>
+            </a:r>
+            <a:r>
+              <a:rPr lang="en-US" sz="1425" dirty="0">
+                <a:solidFill>
+                  <a:srgbClr val="16171D"/>
+                </a:solidFill>
+                <a:latin typeface="Cambria"/>
+                <a:cs typeface="Cambria"/>
+              </a:rPr>
+              <a:t xml:space="preserve">5 = 3(1) + </a:t>
             </a:r>
             <a:r>
               <a:rPr lang="en-US" sz="1425" dirty="0" i="1">
@@ -14668,6 +14788,115 @@
                 <a:latin typeface="Cambria"/>
                 <a:cs typeface="Cambria"/>
               </a:rPr>
+              <a:t xml:space="preserve">b</a:t>
+            </a:r>
+            <a:r>
+              <a:rPr lang="en-US" sz="1425" dirty="0">
+                <a:solidFill>
+                  <a:srgbClr val="16171D"/>
+                </a:solidFill>
+                <a:latin typeface="Segoe UI"/>
+                <a:cs typeface="Segoe UI"/>
+              </a:rPr>
+              <a:t xml:space="preserve">.</a:t>
+            </a:r>
+            <a:br>
+              <a:rPr lang="en-US" sz="1425" dirty="0">
+                <a:solidFill>
+                  <a:srgbClr val="16171D"/>
+                </a:solidFill>
+                <a:latin typeface="Segoe UI"/>
+                <a:cs typeface="Segoe UI"/>
+              </a:rPr>
+            </a:br>
+            <a:r>
+              <a:rPr lang="en-US" sz="1425" dirty="0" b="1">
+                <a:solidFill>
+                  <a:srgbClr val="16171D"/>
+                </a:solidFill>
+                <a:latin typeface="Segoe UI"/>
+                <a:cs typeface="Segoe UI"/>
+              </a:rPr>
+              <a:t xml:space="preserve">3.</a:t>
+            </a:r>
+            <a:r>
+              <a:rPr lang="en-US" sz="1425" dirty="0">
+                <a:solidFill>
+                  <a:srgbClr val="16171D"/>
+                </a:solidFill>
+                <a:latin typeface="Segoe UI"/>
+                <a:cs typeface="Segoe UI"/>
+              </a:rPr>
+              <a:t xml:space="preserve"> </a:t>
+            </a:r>
+            <a:r>
+              <a:rPr lang="en-US" sz="1425" dirty="0">
+                <a:solidFill>
+                  <a:srgbClr val="16171D"/>
+                </a:solidFill>
+                <a:latin typeface="Cambria"/>
+                <a:cs typeface="Cambria"/>
+              </a:rPr>
+              <a:t xml:space="preserve">5 = 3 + </a:t>
+            </a:r>
+            <a:r>
+              <a:rPr lang="en-US" sz="1425" dirty="0" i="1">
+                <a:solidFill>
+                  <a:srgbClr val="16171D"/>
+                </a:solidFill>
+                <a:latin typeface="Cambria"/>
+                <a:cs typeface="Cambria"/>
+              </a:rPr>
+              <a:t xml:space="preserve">b</a:t>
+            </a:r>
+            <a:r>
+              <a:rPr lang="en-US" sz="1425" dirty="0">
+                <a:solidFill>
+                  <a:srgbClr val="16171D"/>
+                </a:solidFill>
+                <a:latin typeface="Segoe UI"/>
+                <a:cs typeface="Segoe UI"/>
+              </a:rPr>
+              <a:t xml:space="preserve">, so </a:t>
+            </a:r>
+            <a:r>
+              <a:rPr lang="en-US" sz="1425" dirty="0" i="1">
+                <a:solidFill>
+                  <a:srgbClr val="16171D"/>
+                </a:solidFill>
+                <a:latin typeface="Cambria"/>
+                <a:cs typeface="Cambria"/>
+              </a:rPr>
+              <a:t xml:space="preserve">b</a:t>
+            </a:r>
+            <a:r>
+              <a:rPr lang="en-US" sz="1425" dirty="0">
+                <a:solidFill>
+                  <a:srgbClr val="16171D"/>
+                </a:solidFill>
+                <a:latin typeface="Cambria"/>
+                <a:cs typeface="Cambria"/>
+              </a:rPr>
+              <a:t xml:space="preserve"> = 2</a:t>
+            </a:r>
+            <a:r>
+              <a:rPr lang="en-US" sz="1425" dirty="0">
+                <a:solidFill>
+                  <a:srgbClr val="16171D"/>
+                </a:solidFill>
+                <a:latin typeface="Segoe UI"/>
+                <a:cs typeface="Segoe UI"/>
+              </a:rPr>
+              <a:t xml:space="preserve">: </a:t>
+            </a:r>
+            <a:r>
+              <a:rPr lang="en-US" sz="1425" dirty="0" i="1">
+                <a:solidFill>
+                  <a:srgbClr val="16171D"/>
+                </a:solidFill>
+                <a:latin typeface="Cambria"/>
+                <a:cs typeface="Cambria"/>
+              </a:rPr>
               <a:t xml:space="preserve">y</a:t>
             </a:r>
             <a:r>
@@ -14698,7 +14927,7 @@
                 <a:latin typeface="Cambria"/>
                 <a:cs typeface="Cambria"/>
               </a:rPr>
-              <a:t xml:space="preserve"> − 5</a:t>
+              <a:t xml:space="preserve"> + 2</a:t>
             </a:r>
             <a:r>
               <a:rPr lang="en-US" sz="1425" dirty="0">
@@ -17100,7 +17329,7 @@
         <p:spPr>
           <a:xfrm>
             <a:off x="6210148" y="4274058"/>
-            <a:ext cx="5295748" cy="2499360"/>
+            <a:ext cx="5295748" cy="2282190"/>
           </a:xfrm>
           <a:prstGeom prst="roundRect">
             <a:avLst>
@@ -17179,7 +17408,7 @@
                 <a:latin typeface="Segoe UI"/>
                 <a:cs typeface="Segoe UI"/>
               </a:rPr>
-              <a:t xml:space="preserve"> </a:t>
+              <a:t xml:space="preserve"> The graph of </a:t>
             </a:r>
             <a:r>
               <a:rPr lang="en-US" sz="1575" dirty="0" i="1">
@@ -17219,7 +17448,7 @@
                 <a:latin typeface="Cambria"/>
                 <a:cs typeface="Cambria"/>
               </a:rPr>
-              <a:t xml:space="preserve">) = 2</a:t>
+              <a:t xml:space="preserve">) = </a:t>
             </a:r>
             <a:r>
               <a:rPr lang="en-US" sz="1575" dirty="0" i="1">
@@ -17236,20 +17465,30 @@
                 <a:solidFill>
                   <a:srgbClr val="16171D"/>
                 </a:solidFill>
-                <a:latin typeface="Cambria"/>
-                <a:cs typeface="Cambria"/>
-              </a:rPr>
-              <a:t xml:space="preserve"> − 1</a:t>
+                <a:latin typeface="Segoe UI"/>
+                <a:cs typeface="Segoe UI"/>
+              </a:rPr>
+              <a:t xml:space="preserve"> is transformed to make </a:t>
+            </a:r>
+            <a:r>
+              <a:rPr lang="en-US" sz="1575" dirty="0" i="1">
+                <a:solidFill>
+                  <a:srgbClr val="16171D"/>
+                </a:solidFill>
+                <a:latin typeface="Cambria"/>
+                <a:cs typeface="Cambria"/>
+              </a:rPr>
+              <a:t xml:space="preserve">g</a:t>
             </a:r>
             <a:r>
               <a:rPr lang="en-US" sz="1575" dirty="0">
                 <a:solidFill>
                   <a:srgbClr val="16171D"/>
                 </a:solidFill>
-                <a:latin typeface="Segoe UI"/>
-                <a:cs typeface="Segoe UI"/>
-              </a:rPr>
-              <a:t xml:space="preserve">. What is the </a:t>
+                <a:latin typeface="Cambria"/>
+                <a:cs typeface="Cambria"/>
+              </a:rPr>
+              <a:t xml:space="preserve">(</a:t>
             </a:r>
             <a:r>
               <a:rPr lang="en-US" sz="1575" dirty="0" i="1">
@@ -17259,17 +17498,17 @@
                 <a:latin typeface="Cambria"/>
                 <a:cs typeface="Cambria"/>
               </a:rPr>
-              <a:t xml:space="preserve">y</a:t>
+              <a:t xml:space="preserve">x</a:t>
             </a:r>
             <a:r>
               <a:rPr lang="en-US" sz="1575" dirty="0">
                 <a:solidFill>
                   <a:srgbClr val="16171D"/>
                 </a:solidFill>
-                <a:latin typeface="Segoe UI"/>
-                <a:cs typeface="Segoe UI"/>
-              </a:rPr>
-              <a:t xml:space="preserve">-intercept of </a:t>
+                <a:latin typeface="Cambria"/>
+                <a:cs typeface="Cambria"/>
+              </a:rPr>
+              <a:t xml:space="preserve">) = </a:t>
             </a:r>
             <a:r>
               <a:rPr lang="en-US" sz="1575" dirty="0" i="1">
@@ -17279,7 +17518,7 @@
                 <a:latin typeface="Cambria"/>
                 <a:cs typeface="Cambria"/>
               </a:rPr>
-              <a:t xml:space="preserve">g</a:t>
+              <a:t xml:space="preserve">x</a:t>
             </a:r>
             <a:r>
               <a:rPr lang="en-US" sz="1575" dirty="0">
@@ -17289,77 +17528,17 @@
                 <a:latin typeface="Cambria"/>
                 <a:cs typeface="Cambria"/>
               </a:rPr>
-              <a:t xml:space="preserve">(</a:t>
-            </a:r>
-            <a:r>
-              <a:rPr lang="en-US" sz="1575" dirty="0" i="1">
-                <a:solidFill>
-                  <a:srgbClr val="16171D"/>
-                </a:solidFill>
-                <a:latin typeface="Cambria"/>
-                <a:cs typeface="Cambria"/>
-              </a:rPr>
-              <a:t xml:space="preserve">x</a:t>
+              <a:t xml:space="preserve"> − 2</a:t>
             </a:r>
             <a:r>
               <a:rPr lang="en-US" sz="1575" dirty="0">
                 <a:solidFill>
                   <a:srgbClr val="16171D"/>
                 </a:solidFill>
-                <a:latin typeface="Cambria"/>
-                <a:cs typeface="Cambria"/>
-              </a:rPr>
-              <a:t xml:space="preserve">) = </a:t>
-            </a:r>
-            <a:r>
-              <a:rPr lang="en-US" sz="1575" dirty="0" i="1">
-                <a:solidFill>
-                  <a:srgbClr val="16171D"/>
-                </a:solidFill>
-                <a:latin typeface="Cambria"/>
-                <a:cs typeface="Cambria"/>
-              </a:rPr>
-              <a:t xml:space="preserve">f</a:t>
-            </a:r>
-            <a:r>
-              <a:rPr lang="en-US" sz="1575" dirty="0">
-                <a:solidFill>
-                  <a:srgbClr val="16171D"/>
-                </a:solidFill>
-                <a:latin typeface="Cambria"/>
-                <a:cs typeface="Cambria"/>
-              </a:rPr>
-              <a:t xml:space="preserve">(</a:t>
-            </a:r>
-            <a:r>
-              <a:rPr lang="en-US" sz="1575" dirty="0" i="1">
-                <a:solidFill>
-                  <a:srgbClr val="16171D"/>
-                </a:solidFill>
-                <a:latin typeface="Cambria"/>
-                <a:cs typeface="Cambria"/>
-              </a:rPr>
-              <a:t xml:space="preserve">x</a:t>
-            </a:r>
-            <a:r>
-              <a:rPr lang="en-US" sz="1575" dirty="0">
-                <a:solidFill>
-                  <a:srgbClr val="16171D"/>
-                </a:solidFill>
-                <a:latin typeface="Cambria"/>
-                <a:cs typeface="Cambria"/>
-              </a:rPr>
-              <a:t xml:space="preserve">) + 6</a:t>
-            </a:r>
-            <a:r>
-              <a:rPr lang="en-US" sz="1575" dirty="0">
-                <a:solidFill>
-                  <a:srgbClr val="16171D"/>
-                </a:solidFill>
-                <a:latin typeface="Segoe UI"/>
-                <a:cs typeface="Segoe UI"/>
-              </a:rPr>
-              <a:t xml:space="preserve">?</a:t>
+                <a:latin typeface="Segoe UI"/>
+                <a:cs typeface="Segoe UI"/>
+              </a:rPr>
+              <a:t xml:space="preserve">. Which describes the transformation?</a:t>
             </a:r>
             <a:endParaRPr lang="en-US" sz="1575" dirty="0"/>
           </a:p>
@@ -17413,127 +17592,7 @@
                 <a:latin typeface="Segoe UI"/>
                 <a:cs typeface="Segoe UI"/>
               </a:rPr>
-              <a:t xml:space="preserve"> </a:t>
-            </a:r>
-            <a:r>
-              <a:rPr lang="en-US" sz="1575" dirty="0" i="1">
-                <a:solidFill>
-                  <a:srgbClr val="16171D"/>
-                </a:solidFill>
-                <a:latin typeface="Cambria"/>
-                <a:cs typeface="Cambria"/>
-              </a:rPr>
-              <a:t xml:space="preserve">y</a:t>
-            </a:r>
-            <a:r>
-              <a:rPr lang="en-US" sz="1575" dirty="0">
-                <a:solidFill>
-                  <a:srgbClr val="16171D"/>
-                </a:solidFill>
-                <a:latin typeface="Cambria"/>
-                <a:cs typeface="Cambria"/>
-              </a:rPr>
-              <a:t xml:space="preserve"> = </a:t>
-            </a:r>
-            <a:r>
-              <a:rPr lang="en-US" sz="1575" dirty="0" i="1">
-                <a:solidFill>
-                  <a:srgbClr val="16171D"/>
-                </a:solidFill>
-                <a:latin typeface="Cambria"/>
-                <a:cs typeface="Cambria"/>
-              </a:rPr>
-              <a:t xml:space="preserve">m</a:t>
-            </a:r>
-            <a:r>
-              <a:rPr lang="en-US" sz="1575" dirty="0" i="1">
-                <a:solidFill>
-                  <a:srgbClr val="16171D"/>
-                </a:solidFill>
-                <a:latin typeface="Cambria"/>
-                <a:cs typeface="Cambria"/>
-              </a:rPr>
-              <a:t xml:space="preserve">x</a:t>
-            </a:r>
-            <a:r>
-              <a:rPr lang="en-US" sz="1575" dirty="0">
-                <a:solidFill>
-                  <a:srgbClr val="16171D"/>
-                </a:solidFill>
-                <a:latin typeface="Cambria"/>
-                <a:cs typeface="Cambria"/>
-              </a:rPr>
-              <a:t xml:space="preserve"> + </a:t>
-            </a:r>
-            <a:r>
-              <a:rPr lang="en-US" sz="1575" dirty="0" i="1">
-                <a:solidFill>
-                  <a:srgbClr val="16171D"/>
-                </a:solidFill>
-                <a:latin typeface="Cambria"/>
-                <a:cs typeface="Cambria"/>
-              </a:rPr>
-              <a:t xml:space="preserve">b</a:t>
-            </a:r>
-            <a:r>
-              <a:rPr lang="en-US" sz="1575" dirty="0">
-                <a:solidFill>
-                  <a:srgbClr val="16171D"/>
-                </a:solidFill>
-                <a:latin typeface="Segoe UI"/>
-                <a:cs typeface="Segoe UI"/>
-              </a:rPr>
-              <a:t xml:space="preserve">, </a:t>
-            </a:r>
-            <a:r>
-              <a:rPr lang="en-US" sz="1575" dirty="0" i="1">
-                <a:solidFill>
-                  <a:srgbClr val="16171D"/>
-                </a:solidFill>
-                <a:latin typeface="Cambria"/>
-                <a:cs typeface="Cambria"/>
-              </a:rPr>
-              <a:t xml:space="preserve">y</a:t>
-            </a:r>
-            <a:r>
-              <a:rPr lang="en-US" sz="1575" dirty="0">
-                <a:solidFill>
-                  <a:srgbClr val="16171D"/>
-                </a:solidFill>
-                <a:latin typeface="Segoe UI"/>
-                <a:cs typeface="Segoe UI"/>
-              </a:rPr>
-              <a:t xml:space="preserve">-intercept </a:t>
-            </a:r>
-            <a:r>
-              <a:rPr lang="en-US" sz="1575" dirty="0">
-                <a:solidFill>
-                  <a:srgbClr val="16171D"/>
-                </a:solidFill>
-                <a:latin typeface="Cambria"/>
-                <a:cs typeface="Cambria"/>
-              </a:rPr>
-              <a:t xml:space="preserve">(0, </a:t>
-            </a:r>
-            <a:r>
-              <a:rPr lang="en-US" sz="1575" dirty="0" i="1">
-                <a:solidFill>
-                  <a:srgbClr val="16171D"/>
-                </a:solidFill>
-                <a:latin typeface="Cambria"/>
-                <a:cs typeface="Cambria"/>
-              </a:rPr>
-              <a:t xml:space="preserve">b</a:t>
-            </a:r>
-            <a:r>
-              <a:rPr lang="en-US" sz="1575" dirty="0">
-                <a:solidFill>
-                  <a:srgbClr val="16171D"/>
-                </a:solidFill>
-                <a:latin typeface="Cambria"/>
-                <a:cs typeface="Cambria"/>
-              </a:rPr>
-              <a:t xml:space="preserve">)</a:t>
+              <a:t xml:space="preserve"> outside: + moves up, − moves down</a:t>
             </a:r>
             <a:endParaRPr lang="en-US" sz="1575" dirty="0"/>
           </a:p>
@@ -17548,7 +17607,7 @@
         <p:spPr>
           <a:xfrm>
             <a:off x="6419698" y="5351526"/>
-            <a:ext cx="4876648" cy="1250442"/>
+            <a:ext cx="4876648" cy="1033272"/>
           </a:xfrm>
           <a:prstGeom prst="roundRect">
             <a:avLst>
@@ -17588,10 +17647,10 @@
                 <a:solidFill>
                   <a:srgbClr val="16171D"/>
                 </a:solidFill>
-                <a:latin typeface="Cambria"/>
-                <a:cs typeface="Cambria"/>
-              </a:rPr>
-              <a:t xml:space="preserve">(0, 5)</a:t>
+                <a:latin typeface="Segoe UI"/>
+                <a:cs typeface="Segoe UI"/>
+              </a:rPr>
+              <a:t xml:space="preserve">A translation down 2 units</a:t>
             </a:r>
             <a:br>
               <a:rPr lang="en-US" sz="1425" dirty="0">
@@ -17620,7 +17679,27 @@
                 <a:latin typeface="Segoe UI"/>
                 <a:cs typeface="Segoe UI"/>
               </a:rPr>
-              <a:t xml:space="preserve"> </a:t>
+              <a:t xml:space="preserve"> The </a:t>
+            </a:r>
+            <a:r>
+              <a:rPr lang="en-US" sz="1425" dirty="0">
+                <a:solidFill>
+                  <a:srgbClr val="16171D"/>
+                </a:solidFill>
+                <a:latin typeface="Cambria"/>
+                <a:cs typeface="Cambria"/>
+              </a:rPr>
+              <a:t xml:space="preserve">− 2</a:t>
+            </a:r>
+            <a:r>
+              <a:rPr lang="en-US" sz="1425" dirty="0">
+                <a:solidFill>
+                  <a:srgbClr val="16171D"/>
+                </a:solidFill>
+                <a:latin typeface="Segoe UI"/>
+                <a:cs typeface="Segoe UI"/>
+              </a:rPr>
+              <a:t xml:space="preserve"> is outside </a:t>
             </a:r>
             <a:r>
               <a:rPr lang="en-US" sz="1425" dirty="0" i="1">
@@ -17630,7 +17709,7 @@
                 <a:latin typeface="Cambria"/>
                 <a:cs typeface="Cambria"/>
               </a:rPr>
-              <a:t xml:space="preserve">g</a:t>
+              <a:t xml:space="preserve">f</a:t>
             </a:r>
             <a:r>
               <a:rPr lang="en-US" sz="1425" dirty="0">
@@ -17660,7 +17739,17 @@
                 <a:latin typeface="Cambria"/>
                 <a:cs typeface="Cambria"/>
               </a:rPr>
-              <a:t xml:space="preserve">) = 2</a:t>
+              <a:t xml:space="preserve">)</a:t>
+            </a:r>
+            <a:r>
+              <a:rPr lang="en-US" sz="1425" dirty="0">
+                <a:solidFill>
+                  <a:srgbClr val="16171D"/>
+                </a:solidFill>
+                <a:latin typeface="Segoe UI"/>
+                <a:cs typeface="Segoe UI"/>
+              </a:rPr>
+              <a:t xml:space="preserve">: it changes every output (</a:t>
             </a:r>
             <a:r>
               <a:rPr lang="en-US" sz="1425" dirty="0" i="1">
@@ -17670,27 +17759,17 @@
                 <a:latin typeface="Cambria"/>
                 <a:cs typeface="Cambria"/>
               </a:rPr>
-              <a:t xml:space="preserve">x</a:t>
+              <a:t xml:space="preserve">y</a:t>
             </a:r>
             <a:r>
               <a:rPr lang="en-US" sz="1425" dirty="0">
                 <a:solidFill>
                   <a:srgbClr val="16171D"/>
                 </a:solidFill>
-                <a:latin typeface="Cambria"/>
-                <a:cs typeface="Cambria"/>
-              </a:rPr>
-              <a:t xml:space="preserve"> − 1 + 6</a:t>
-            </a:r>
-            <a:r>
-              <a:rPr lang="en-US" sz="1425" dirty="0">
-                <a:solidFill>
-                  <a:srgbClr val="16171D"/>
-                </a:solidFill>
-                <a:latin typeface="Segoe UI"/>
-                <a:cs typeface="Segoe UI"/>
-              </a:rPr>
-              <a:t xml:space="preserve">.</a:t>
+                <a:latin typeface="Segoe UI"/>
+                <a:cs typeface="Segoe UI"/>
+              </a:rPr>
+              <a:t xml:space="preserve">-value).</a:t>
             </a:r>
             <a:br>
               <a:rPr lang="en-US" sz="1425" dirty="0">
@@ -17719,216 +17798,7 @@
                 <a:latin typeface="Segoe UI"/>
                 <a:cs typeface="Segoe UI"/>
               </a:rPr>
-              <a:t xml:space="preserve"> Combine: </a:t>
-            </a:r>
-            <a:r>
-              <a:rPr lang="en-US" sz="1425" dirty="0">
-                <a:solidFill>
-                  <a:srgbClr val="16171D"/>
-                </a:solidFill>
-                <a:latin typeface="Cambria"/>
-                <a:cs typeface="Cambria"/>
-              </a:rPr>
-              <a:t xml:space="preserve">−1 + 6 = 5</a:t>
-            </a:r>
-            <a:r>
-              <a:rPr lang="en-US" sz="1425" dirty="0">
-                <a:solidFill>
-                  <a:srgbClr val="16171D"/>
-                </a:solidFill>
-                <a:latin typeface="Segoe UI"/>
-                <a:cs typeface="Segoe UI"/>
-              </a:rPr>
-              <a:t xml:space="preserve">, so </a:t>
-            </a:r>
-            <a:r>
-              <a:rPr lang="en-US" sz="1425" dirty="0" i="1">
-                <a:solidFill>
-                  <a:srgbClr val="16171D"/>
-                </a:solidFill>
-                <a:latin typeface="Cambria"/>
-                <a:cs typeface="Cambria"/>
-              </a:rPr>
-              <a:t xml:space="preserve">g</a:t>
-            </a:r>
-            <a:r>
-              <a:rPr lang="en-US" sz="1425" dirty="0">
-                <a:solidFill>
-                  <a:srgbClr val="16171D"/>
-                </a:solidFill>
-                <a:latin typeface="Cambria"/>
-                <a:cs typeface="Cambria"/>
-              </a:rPr>
-              <a:t xml:space="preserve">(</a:t>
-            </a:r>
-            <a:r>
-              <a:rPr lang="en-US" sz="1425" dirty="0" i="1">
-                <a:solidFill>
-                  <a:srgbClr val="16171D"/>
-                </a:solidFill>
-                <a:latin typeface="Cambria"/>
-                <a:cs typeface="Cambria"/>
-              </a:rPr>
-              <a:t xml:space="preserve">x</a:t>
-            </a:r>
-            <a:r>
-              <a:rPr lang="en-US" sz="1425" dirty="0">
-                <a:solidFill>
-                  <a:srgbClr val="16171D"/>
-                </a:solidFill>
-                <a:latin typeface="Cambria"/>
-                <a:cs typeface="Cambria"/>
-              </a:rPr>
-              <a:t xml:space="preserve">) = 2</a:t>
-            </a:r>
-            <a:r>
-              <a:rPr lang="en-US" sz="1425" dirty="0" i="1">
-                <a:solidFill>
-                  <a:srgbClr val="16171D"/>
-                </a:solidFill>
-                <a:latin typeface="Cambria"/>
-                <a:cs typeface="Cambria"/>
-              </a:rPr>
-              <a:t xml:space="preserve">x</a:t>
-            </a:r>
-            <a:r>
-              <a:rPr lang="en-US" sz="1425" dirty="0">
-                <a:solidFill>
-                  <a:srgbClr val="16171D"/>
-                </a:solidFill>
-                <a:latin typeface="Cambria"/>
-                <a:cs typeface="Cambria"/>
-              </a:rPr>
-              <a:t xml:space="preserve"> + 5</a:t>
-            </a:r>
-            <a:r>
-              <a:rPr lang="en-US" sz="1425" dirty="0">
-                <a:solidFill>
-                  <a:srgbClr val="16171D"/>
-                </a:solidFill>
-                <a:latin typeface="Segoe UI"/>
-                <a:cs typeface="Segoe UI"/>
-              </a:rPr>
-              <a:t xml:space="preserve">.</a:t>
-            </a:r>
-            <a:br>
-              <a:rPr lang="en-US" sz="1425" dirty="0">
-                <a:solidFill>
-                  <a:srgbClr val="16171D"/>
-                </a:solidFill>
-                <a:latin typeface="Segoe UI"/>
-                <a:cs typeface="Segoe UI"/>
-              </a:rPr>
-            </a:br>
-            <a:r>
-              <a:rPr lang="en-US" sz="1425" dirty="0" b="1">
-                <a:solidFill>
-                  <a:srgbClr val="16171D"/>
-                </a:solidFill>
-                <a:latin typeface="Segoe UI"/>
-                <a:cs typeface="Segoe UI"/>
-              </a:rPr>
-              <a:t xml:space="preserve">3.</a:t>
-            </a:r>
-            <a:r>
-              <a:rPr lang="en-US" sz="1425" dirty="0">
-                <a:solidFill>
-                  <a:srgbClr val="16171D"/>
-                </a:solidFill>
-                <a:latin typeface="Segoe UI"/>
-                <a:cs typeface="Segoe UI"/>
-              </a:rPr>
-              <a:t xml:space="preserve"> </a:t>
-            </a:r>
-            <a:r>
-              <a:rPr lang="en-US" sz="1425" dirty="0" i="1">
-                <a:solidFill>
-                  <a:srgbClr val="16171D"/>
-                </a:solidFill>
-                <a:latin typeface="Cambria"/>
-                <a:cs typeface="Cambria"/>
-              </a:rPr>
-              <a:t xml:space="preserve">b</a:t>
-            </a:r>
-            <a:r>
-              <a:rPr lang="en-US" sz="1425" dirty="0">
-                <a:solidFill>
-                  <a:srgbClr val="16171D"/>
-                </a:solidFill>
-                <a:latin typeface="Cambria"/>
-                <a:cs typeface="Cambria"/>
-              </a:rPr>
-              <a:t xml:space="preserve"> = 5</a:t>
-            </a:r>
-            <a:r>
-              <a:rPr lang="en-US" sz="1425" dirty="0">
-                <a:solidFill>
-                  <a:srgbClr val="16171D"/>
-                </a:solidFill>
-                <a:latin typeface="Segoe UI"/>
-                <a:cs typeface="Segoe UI"/>
-              </a:rPr>
-              <a:t xml:space="preserve">, so the </a:t>
-            </a:r>
-            <a:r>
-              <a:rPr lang="en-US" sz="1425" dirty="0" i="1">
-                <a:solidFill>
-                  <a:srgbClr val="16171D"/>
-                </a:solidFill>
-                <a:latin typeface="Cambria"/>
-                <a:cs typeface="Cambria"/>
-              </a:rPr>
-              <a:t xml:space="preserve">y</a:t>
-            </a:r>
-            <a:r>
-              <a:rPr lang="en-US" sz="1425" dirty="0">
-                <a:solidFill>
-                  <a:srgbClr val="16171D"/>
-                </a:solidFill>
-                <a:latin typeface="Segoe UI"/>
-                <a:cs typeface="Segoe UI"/>
-              </a:rPr>
-              <a:t xml:space="preserve">-intercept is </a:t>
-            </a:r>
-            <a:r>
-              <a:rPr lang="en-US" sz="1425" dirty="0">
-                <a:solidFill>
-                  <a:srgbClr val="16171D"/>
-                </a:solidFill>
-                <a:latin typeface="Cambria"/>
-                <a:cs typeface="Cambria"/>
-              </a:rPr>
-              <a:t xml:space="preserve">(0, 5)</a:t>
-            </a:r>
-            <a:r>
-              <a:rPr lang="en-US" sz="1425" dirty="0">
-                <a:solidFill>
-                  <a:srgbClr val="16171D"/>
-                </a:solidFill>
-                <a:latin typeface="Segoe UI"/>
-                <a:cs typeface="Segoe UI"/>
-              </a:rPr>
-              <a:t xml:space="preserve">: </a:t>
-            </a:r>
-            <a:r>
-              <a:rPr lang="en-US" sz="1425" dirty="0">
-                <a:solidFill>
-                  <a:srgbClr val="16171D"/>
-                </a:solidFill>
-                <a:latin typeface="Cambria"/>
-                <a:cs typeface="Cambria"/>
-              </a:rPr>
-              <a:t xml:space="preserve">(0, −1)</a:t>
-            </a:r>
-            <a:r>
-              <a:rPr lang="en-US" sz="1425" dirty="0">
-                <a:solidFill>
-                  <a:srgbClr val="16171D"/>
-                </a:solidFill>
-                <a:latin typeface="Segoe UI"/>
-                <a:cs typeface="Segoe UI"/>
-              </a:rPr>
-              <a:t xml:space="preserve"> moved up 6.</a:t>
+              <a:t xml:space="preserve"> Minus means down: a translation down 2 units.</a:t>
             </a:r>
             <a:endParaRPr lang="en-US" sz="1425" dirty="0"/>
           </a:p>
@@ -20641,7 +20511,7 @@
         <p:spPr>
           <a:xfrm>
             <a:off x="6210148" y="4251198"/>
-            <a:ext cx="5295748" cy="2065020"/>
+            <a:ext cx="5295748" cy="2545080"/>
           </a:xfrm>
           <a:prstGeom prst="roundRect">
             <a:avLst>
@@ -20681,7 +20551,7 @@
         <p:spPr>
           <a:xfrm>
             <a:off x="6419698" y="4422648"/>
-            <a:ext cx="4876648" cy="534924"/>
+            <a:ext cx="4876648" cy="774954"/>
           </a:xfrm>
           <a:prstGeom prst="rect">
             <a:avLst/>
@@ -20720,7 +20590,7 @@
                 <a:latin typeface="Segoe UI"/>
                 <a:cs typeface="Segoe UI"/>
               </a:rPr>
-              <a:t xml:space="preserve"> </a:t>
+              <a:t xml:space="preserve"> Which function is a reflection of </a:t>
             </a:r>
             <a:r>
               <a:rPr lang="en-US" sz="1575" dirty="0" i="1">
@@ -20780,7 +20650,7 @@
                 <a:latin typeface="Segoe UI"/>
                 <a:cs typeface="Segoe UI"/>
               </a:rPr>
-              <a:t xml:space="preserve"> and </a:t>
+              <a:t xml:space="preserve"> across the </a:t>
             </a:r>
             <a:r>
               <a:rPr lang="en-US" sz="1575" dirty="0" i="1">
@@ -20790,157 +20660,17 @@
                 <a:latin typeface="Cambria"/>
                 <a:cs typeface="Cambria"/>
               </a:rPr>
-              <a:t xml:space="preserve">g</a:t>
+              <a:t xml:space="preserve">x</a:t>
             </a:r>
             <a:r>
               <a:rPr lang="en-US" sz="1575" dirty="0">
                 <a:solidFill>
                   <a:srgbClr val="16171D"/>
                 </a:solidFill>
-                <a:latin typeface="Cambria"/>
-                <a:cs typeface="Cambria"/>
-              </a:rPr>
-              <a:t xml:space="preserve">(</a:t>
-            </a:r>
-            <a:r>
-              <a:rPr lang="en-US" sz="1575" dirty="0" i="1">
-                <a:solidFill>
-                  <a:srgbClr val="16171D"/>
-                </a:solidFill>
-                <a:latin typeface="Cambria"/>
-                <a:cs typeface="Cambria"/>
-              </a:rPr>
-              <a:t xml:space="preserve">x</a:t>
-            </a:r>
-            <a:r>
-              <a:rPr lang="en-US" sz="1575" dirty="0">
-                <a:solidFill>
-                  <a:srgbClr val="16171D"/>
-                </a:solidFill>
-                <a:latin typeface="Cambria"/>
-                <a:cs typeface="Cambria"/>
-              </a:rPr>
-              <a:t xml:space="preserve">) = 2</a:t>
-            </a:r>
-            <a:r>
-              <a:rPr lang="en-US" sz="1575" dirty="0" i="1">
-                <a:solidFill>
-                  <a:srgbClr val="16171D"/>
-                </a:solidFill>
-                <a:latin typeface="Cambria"/>
-                <a:cs typeface="Cambria"/>
-              </a:rPr>
-              <a:t xml:space="preserve">f</a:t>
-            </a:r>
-            <a:r>
-              <a:rPr lang="en-US" sz="1575" dirty="0">
-                <a:solidFill>
-                  <a:srgbClr val="16171D"/>
-                </a:solidFill>
-                <a:latin typeface="Cambria"/>
-                <a:cs typeface="Cambria"/>
-              </a:rPr>
-              <a:t xml:space="preserve">(</a:t>
-            </a:r>
-            <a:r>
-              <a:rPr lang="en-US" sz="1575" dirty="0" i="1">
-                <a:solidFill>
-                  <a:srgbClr val="16171D"/>
-                </a:solidFill>
-                <a:latin typeface="Cambria"/>
-                <a:cs typeface="Cambria"/>
-              </a:rPr>
-              <a:t xml:space="preserve">x</a:t>
-            </a:r>
-            <a:r>
-              <a:rPr lang="en-US" sz="1575" dirty="0">
-                <a:solidFill>
-                  <a:srgbClr val="16171D"/>
-                </a:solidFill>
-                <a:latin typeface="Cambria"/>
-                <a:cs typeface="Cambria"/>
-              </a:rPr>
-              <a:t xml:space="preserve">) − 5</a:t>
-            </a:r>
-            <a:r>
-              <a:rPr lang="en-US" sz="1575" dirty="0">
-                <a:solidFill>
-                  <a:srgbClr val="16171D"/>
-                </a:solidFill>
-                <a:latin typeface="Segoe UI"/>
-                <a:cs typeface="Segoe UI"/>
-              </a:rPr>
-              <a:t xml:space="preserve">. What is the </a:t>
-            </a:r>
-            <a:r>
-              <a:rPr lang="en-US" sz="1575" dirty="0" i="1">
-                <a:solidFill>
-                  <a:srgbClr val="16171D"/>
-                </a:solidFill>
-                <a:latin typeface="Cambria"/>
-                <a:cs typeface="Cambria"/>
-              </a:rPr>
-              <a:t xml:space="preserve">y</a:t>
-            </a:r>
-            <a:r>
-              <a:rPr lang="en-US" sz="1575" dirty="0">
-                <a:solidFill>
-                  <a:srgbClr val="16171D"/>
-                </a:solidFill>
-                <a:latin typeface="Segoe UI"/>
-                <a:cs typeface="Segoe UI"/>
-              </a:rPr>
-              <a:t xml:space="preserve">-intercept of </a:t>
-            </a:r>
-            <a:r>
-              <a:rPr lang="en-US" sz="1575" dirty="0" i="1">
-                <a:solidFill>
-                  <a:srgbClr val="16171D"/>
-                </a:solidFill>
-                <a:latin typeface="Cambria"/>
-                <a:cs typeface="Cambria"/>
-              </a:rPr>
-              <a:t xml:space="preserve">g</a:t>
-            </a:r>
-            <a:r>
-              <a:rPr lang="en-US" sz="1575" dirty="0">
-                <a:solidFill>
-                  <a:srgbClr val="16171D"/>
-                </a:solidFill>
-                <a:latin typeface="Cambria"/>
-                <a:cs typeface="Cambria"/>
-              </a:rPr>
-              <a:t xml:space="preserve">(</a:t>
-            </a:r>
-            <a:r>
-              <a:rPr lang="en-US" sz="1575" dirty="0" i="1">
-                <a:solidFill>
-                  <a:srgbClr val="16171D"/>
-                </a:solidFill>
-                <a:latin typeface="Cambria"/>
-                <a:cs typeface="Cambria"/>
-              </a:rPr>
-              <a:t xml:space="preserve">x</a:t>
-            </a:r>
-            <a:r>
-              <a:rPr lang="en-US" sz="1575" dirty="0">
-                <a:solidFill>
-                  <a:srgbClr val="16171D"/>
-                </a:solidFill>
-                <a:latin typeface="Cambria"/>
-                <a:cs typeface="Cambria"/>
-              </a:rPr>
-              <a:t xml:space="preserve">)</a:t>
-            </a:r>
-            <a:r>
-              <a:rPr lang="en-US" sz="1575" dirty="0">
-                <a:solidFill>
-                  <a:srgbClr val="16171D"/>
-                </a:solidFill>
-                <a:latin typeface="Segoe UI"/>
-                <a:cs typeface="Segoe UI"/>
-              </a:rPr>
-              <a:t xml:space="preserve">?</a:t>
+                <a:latin typeface="Segoe UI"/>
+                <a:cs typeface="Segoe UI"/>
+              </a:rPr>
+              <a:t xml:space="preserve">-axis and a vertical dilation by a factor of 2?</a:t>
             </a:r>
             <a:endParaRPr lang="en-US" sz="1575" dirty="0"/>
           </a:p>
@@ -20954,8 +20684,8 @@
         </p:nvSpPr>
         <p:spPr>
           <a:xfrm>
-            <a:off x="6419698" y="4995672"/>
-            <a:ext cx="4876648" cy="294894"/>
+            <a:off x="6419698" y="5235702"/>
+            <a:ext cx="4876648" cy="534924"/>
           </a:xfrm>
           <a:prstGeom prst="rect">
             <a:avLst/>
@@ -21054,7 +20784,17 @@
                 <a:latin typeface="Cambria"/>
                 <a:cs typeface="Cambria"/>
               </a:rPr>
-              <a:t xml:space="preserve">) + </a:t>
+              <a:t xml:space="preserve">)</a:t>
+            </a:r>
+            <a:r>
+              <a:rPr lang="en-US" sz="1575" dirty="0">
+                <a:solidFill>
+                  <a:srgbClr val="16171D"/>
+                </a:solidFill>
+                <a:latin typeface="Segoe UI"/>
+                <a:cs typeface="Segoe UI"/>
+              </a:rPr>
+              <a:t xml:space="preserve">: </a:t>
             </a:r>
             <a:r>
               <a:rPr lang="en-US" sz="1575" dirty="0" i="1">
@@ -21064,17 +20804,57 @@
                 <a:latin typeface="Cambria"/>
                 <a:cs typeface="Cambria"/>
               </a:rPr>
-              <a:t xml:space="preserve">d</a:t>
+              <a:t xml:space="preserve">a</a:t>
             </a:r>
             <a:r>
               <a:rPr lang="en-US" sz="1575" dirty="0">
                 <a:solidFill>
                   <a:srgbClr val="16171D"/>
                 </a:solidFill>
-                <a:latin typeface="Segoe UI"/>
-                <a:cs typeface="Segoe UI"/>
-              </a:rPr>
-              <a:t xml:space="preserve"> has </a:t>
+                <a:latin typeface="Cambria"/>
+                <a:cs typeface="Cambria"/>
+              </a:rPr>
+              <a:t xml:space="preserve"> </a:t>
+            </a:r>
+            <a:r>
+              <a:rPr lang="en-US" sz="1575" dirty="0">
+                <a:solidFill>
+                  <a:srgbClr val="16171D"/>
+                </a:solidFill>
+                <a:latin typeface="Cambria"/>
+                <a:cs typeface="Cambria"/>
+              </a:rPr>
+              <a:t xml:space="preserve">&lt;</a:t>
+            </a:r>
+            <a:r>
+              <a:rPr lang="en-US" sz="1575" dirty="0">
+                <a:solidFill>
+                  <a:srgbClr val="16171D"/>
+                </a:solidFill>
+                <a:latin typeface="Cambria"/>
+                <a:cs typeface="Cambria"/>
+              </a:rPr>
+              <a:t xml:space="preserve"> 0</a:t>
+            </a:r>
+            <a:r>
+              <a:rPr lang="en-US" sz="1575" dirty="0">
+                <a:solidFill>
+                  <a:srgbClr val="16171D"/>
+                </a:solidFill>
+                <a:latin typeface="Segoe UI"/>
+                <a:cs typeface="Segoe UI"/>
+              </a:rPr>
+              <a:t xml:space="preserve"> reflects, </a:t>
+            </a:r>
+            <a:r>
+              <a:rPr lang="en-US" sz="1575" dirty="0">
+                <a:solidFill>
+                  <a:srgbClr val="16171D"/>
+                </a:solidFill>
+                <a:latin typeface="Cambria"/>
+                <a:cs typeface="Cambria"/>
+              </a:rPr>
+              <a:t xml:space="preserve">|</a:t>
             </a:r>
             <a:r>
               <a:rPr lang="en-US" sz="1575" dirty="0" i="1">
@@ -21084,47 +20864,27 @@
                 <a:latin typeface="Cambria"/>
                 <a:cs typeface="Cambria"/>
               </a:rPr>
-              <a:t xml:space="preserve">y</a:t>
+              <a:t xml:space="preserve">a</a:t>
             </a:r>
             <a:r>
               <a:rPr lang="en-US" sz="1575" dirty="0">
                 <a:solidFill>
                   <a:srgbClr val="16171D"/>
                 </a:solidFill>
-                <a:latin typeface="Segoe UI"/>
-                <a:cs typeface="Segoe UI"/>
-              </a:rPr>
-              <a:t xml:space="preserve">-intercept </a:t>
+                <a:latin typeface="Cambria"/>
+                <a:cs typeface="Cambria"/>
+              </a:rPr>
+              <a:t xml:space="preserve">| &gt; 1</a:t>
             </a:r>
             <a:r>
               <a:rPr lang="en-US" sz="1575" dirty="0">
                 <a:solidFill>
                   <a:srgbClr val="16171D"/>
                 </a:solidFill>
-                <a:latin typeface="Cambria"/>
-                <a:cs typeface="Cambria"/>
-              </a:rPr>
-              <a:t xml:space="preserve">(0, </a:t>
-            </a:r>
-            <a:r>
-              <a:rPr lang="en-US" sz="1575" dirty="0" i="1">
-                <a:solidFill>
-                  <a:srgbClr val="16171D"/>
-                </a:solidFill>
-                <a:latin typeface="Cambria"/>
-                <a:cs typeface="Cambria"/>
-              </a:rPr>
-              <a:t xml:space="preserve">d</a:t>
-            </a:r>
-            <a:r>
-              <a:rPr lang="en-US" sz="1575" dirty="0">
-                <a:solidFill>
-                  <a:srgbClr val="16171D"/>
-                </a:solidFill>
-                <a:latin typeface="Cambria"/>
-                <a:cs typeface="Cambria"/>
-              </a:rPr>
-              <a:t xml:space="preserve">)</a:t>
+                <a:latin typeface="Segoe UI"/>
+                <a:cs typeface="Segoe UI"/>
+              </a:rPr>
+              <a:t xml:space="preserve"> stretches</a:t>
             </a:r>
             <a:endParaRPr lang="en-US" sz="1575" dirty="0"/>
           </a:p>
@@ -21138,8 +20898,8 @@
         </p:nvSpPr>
         <p:spPr>
           <a:xfrm>
-            <a:off x="6419698" y="5328666"/>
-            <a:ext cx="4347275" cy="816102"/>
+            <a:off x="6419698" y="5808726"/>
+            <a:ext cx="4876648" cy="816102"/>
           </a:xfrm>
           <a:prstGeom prst="roundRect">
             <a:avLst>
@@ -21175,6 +20935,16 @@
               <a:t xml:space="preserve">ANSWER   </a:t>
             </a:r>
             <a:r>
+              <a:rPr lang="en-US" sz="1425" dirty="0" b="1" i="1">
+                <a:solidFill>
+                  <a:srgbClr val="16171D"/>
+                </a:solidFill>
+                <a:latin typeface="Cambria"/>
+                <a:cs typeface="Cambria"/>
+              </a:rPr>
+              <a:t xml:space="preserve">g</a:t>
+            </a:r>
+            <a:r>
               <a:rPr lang="en-US" sz="1425" dirty="0" b="1">
                 <a:solidFill>
                   <a:srgbClr val="16171D"/>
@@ -21182,7 +20952,37 @@
                 <a:latin typeface="Cambria"/>
                 <a:cs typeface="Cambria"/>
               </a:rPr>
-              <a:t xml:space="preserve">(0, −5)</a:t>
+              <a:t xml:space="preserve">(</a:t>
+            </a:r>
+            <a:r>
+              <a:rPr lang="en-US" sz="1425" dirty="0" b="1" i="1">
+                <a:solidFill>
+                  <a:srgbClr val="16171D"/>
+                </a:solidFill>
+                <a:latin typeface="Cambria"/>
+                <a:cs typeface="Cambria"/>
+              </a:rPr>
+              <a:t xml:space="preserve">x</a:t>
+            </a:r>
+            <a:r>
+              <a:rPr lang="en-US" sz="1425" dirty="0" b="1">
+                <a:solidFill>
+                  <a:srgbClr val="16171D"/>
+                </a:solidFill>
+                <a:latin typeface="Cambria"/>
+                <a:cs typeface="Cambria"/>
+              </a:rPr>
+              <a:t xml:space="preserve">) = −2</a:t>
+            </a:r>
+            <a:r>
+              <a:rPr lang="en-US" sz="1425" dirty="0" b="1" i="1">
+                <a:solidFill>
+                  <a:srgbClr val="16171D"/>
+                </a:solidFill>
+                <a:latin typeface="Cambria"/>
+                <a:cs typeface="Cambria"/>
+              </a:rPr>
+              <a:t xml:space="preserve">x</a:t>
             </a:r>
             <a:br>
               <a:rPr lang="en-US" sz="1425" dirty="0">
@@ -21211,7 +21011,7 @@
                 <a:latin typeface="Segoe UI"/>
                 <a:cs typeface="Segoe UI"/>
               </a:rPr>
-              <a:t xml:space="preserve"> Replace </a:t>
+              <a:t xml:space="preserve"> Reflect: </a:t>
             </a:r>
             <a:r>
               <a:rPr lang="en-US" sz="1425" dirty="0" i="1">
@@ -21221,17 +21021,27 @@
                 <a:latin typeface="Cambria"/>
                 <a:cs typeface="Cambria"/>
               </a:rPr>
-              <a:t xml:space="preserve">f</a:t>
+              <a:t xml:space="preserve">a</a:t>
             </a:r>
             <a:r>
               <a:rPr lang="en-US" sz="1425" dirty="0">
                 <a:solidFill>
                   <a:srgbClr val="16171D"/>
                 </a:solidFill>
-                <a:latin typeface="Cambria"/>
-                <a:cs typeface="Cambria"/>
-              </a:rPr>
-              <a:t xml:space="preserve">(</a:t>
+                <a:latin typeface="Segoe UI"/>
+                <a:cs typeface="Segoe UI"/>
+              </a:rPr>
+              <a:t xml:space="preserve"> is negative. Factor of 2: </a:t>
+            </a:r>
+            <a:r>
+              <a:rPr lang="en-US" sz="1425" dirty="0">
+                <a:solidFill>
+                  <a:srgbClr val="16171D"/>
+                </a:solidFill>
+                <a:latin typeface="Cambria"/>
+                <a:cs typeface="Cambria"/>
+              </a:rPr>
+              <a:t xml:space="preserve">|</a:t>
             </a:r>
             <a:r>
               <a:rPr lang="en-US" sz="1425" dirty="0" i="1">
@@ -21241,7 +21051,7 @@
                 <a:latin typeface="Cambria"/>
                 <a:cs typeface="Cambria"/>
               </a:rPr>
-              <a:t xml:space="preserve">x</a:t>
+              <a:t xml:space="preserve">a</a:t>
             </a:r>
             <a:r>
               <a:rPr lang="en-US" sz="1425" dirty="0">
@@ -21251,97 +21061,7 @@
                 <a:latin typeface="Cambria"/>
                 <a:cs typeface="Cambria"/>
               </a:rPr>
-              <a:t xml:space="preserve">)</a:t>
-            </a:r>
-            <a:r>
-              <a:rPr lang="en-US" sz="1425" dirty="0">
-                <a:solidFill>
-                  <a:srgbClr val="16171D"/>
-                </a:solidFill>
-                <a:latin typeface="Segoe UI"/>
-                <a:cs typeface="Segoe UI"/>
-              </a:rPr>
-              <a:t xml:space="preserve"> with </a:t>
-            </a:r>
-            <a:r>
-              <a:rPr lang="en-US" sz="1425" dirty="0" i="1">
-                <a:solidFill>
-                  <a:srgbClr val="16171D"/>
-                </a:solidFill>
-                <a:latin typeface="Cambria"/>
-                <a:cs typeface="Cambria"/>
-              </a:rPr>
-              <a:t xml:space="preserve">x</a:t>
-            </a:r>
-            <a:r>
-              <a:rPr lang="en-US" sz="1425" dirty="0">
-                <a:solidFill>
-                  <a:srgbClr val="16171D"/>
-                </a:solidFill>
-                <a:latin typeface="Segoe UI"/>
-                <a:cs typeface="Segoe UI"/>
-              </a:rPr>
-              <a:t xml:space="preserve">: </a:t>
-            </a:r>
-            <a:r>
-              <a:rPr lang="en-US" sz="1425" dirty="0" i="1">
-                <a:solidFill>
-                  <a:srgbClr val="16171D"/>
-                </a:solidFill>
-                <a:latin typeface="Cambria"/>
-                <a:cs typeface="Cambria"/>
-              </a:rPr>
-              <a:t xml:space="preserve">g</a:t>
-            </a:r>
-            <a:r>
-              <a:rPr lang="en-US" sz="1425" dirty="0">
-                <a:solidFill>
-                  <a:srgbClr val="16171D"/>
-                </a:solidFill>
-                <a:latin typeface="Cambria"/>
-                <a:cs typeface="Cambria"/>
-              </a:rPr>
-              <a:t xml:space="preserve">(</a:t>
-            </a:r>
-            <a:r>
-              <a:rPr lang="en-US" sz="1425" dirty="0" i="1">
-                <a:solidFill>
-                  <a:srgbClr val="16171D"/>
-                </a:solidFill>
-                <a:latin typeface="Cambria"/>
-                <a:cs typeface="Cambria"/>
-              </a:rPr>
-              <a:t xml:space="preserve">x</a:t>
-            </a:r>
-            <a:r>
-              <a:rPr lang="en-US" sz="1425" dirty="0">
-                <a:solidFill>
-                  <a:srgbClr val="16171D"/>
-                </a:solidFill>
-                <a:latin typeface="Cambria"/>
-                <a:cs typeface="Cambria"/>
-              </a:rPr>
-              <a:t xml:space="preserve">) = 2</a:t>
-            </a:r>
-            <a:r>
-              <a:rPr lang="en-US" sz="1425" dirty="0" i="1">
-                <a:solidFill>
-                  <a:srgbClr val="16171D"/>
-                </a:solidFill>
-                <a:latin typeface="Cambria"/>
-                <a:cs typeface="Cambria"/>
-              </a:rPr>
-              <a:t xml:space="preserve">x</a:t>
-            </a:r>
-            <a:r>
-              <a:rPr lang="en-US" sz="1425" dirty="0">
-                <a:solidFill>
-                  <a:srgbClr val="16171D"/>
-                </a:solidFill>
-                <a:latin typeface="Cambria"/>
-                <a:cs typeface="Cambria"/>
-              </a:rPr>
-              <a:t xml:space="preserve"> − 5</a:t>
+              <a:t xml:space="preserve">| = 2</a:t>
             </a:r>
             <a:r>
               <a:rPr lang="en-US" sz="1425" dirty="0">
@@ -21380,7 +21100,7 @@
                 <a:latin typeface="Segoe UI"/>
                 <a:cs typeface="Segoe UI"/>
               </a:rPr>
-              <a:t xml:space="preserve"> </a:t>
+              <a:t xml:space="preserve"> So </a:t>
             </a:r>
             <a:r>
               <a:rPr lang="en-US" sz="1425" dirty="0" i="1">
@@ -21390,7 +21110,7 @@
                 <a:latin typeface="Cambria"/>
                 <a:cs typeface="Cambria"/>
               </a:rPr>
-              <a:t xml:space="preserve">d</a:t>
+              <a:t xml:space="preserve">a</a:t>
             </a:r>
             <a:r>
               <a:rPr lang="en-US" sz="1425" dirty="0">
@@ -21400,7 +21120,7 @@
                 <a:latin typeface="Cambria"/>
                 <a:cs typeface="Cambria"/>
               </a:rPr>
-              <a:t xml:space="preserve"> = −5</a:t>
+              <a:t xml:space="preserve"> = −2</a:t>
             </a:r>
             <a:r>
               <a:rPr lang="en-US" sz="1425" dirty="0">
@@ -21410,7 +21130,7 @@
                 <a:latin typeface="Segoe UI"/>
                 <a:cs typeface="Segoe UI"/>
               </a:rPr>
-              <a:t xml:space="preserve">, so the </a:t>
+              <a:t xml:space="preserve"> and </a:t>
             </a:r>
             <a:r>
               <a:rPr lang="en-US" sz="1425" dirty="0" i="1">
@@ -21420,17 +21140,27 @@
                 <a:latin typeface="Cambria"/>
                 <a:cs typeface="Cambria"/>
               </a:rPr>
-              <a:t xml:space="preserve">y</a:t>
+              <a:t xml:space="preserve">g</a:t>
             </a:r>
             <a:r>
               <a:rPr lang="en-US" sz="1425" dirty="0">
                 <a:solidFill>
                   <a:srgbClr val="16171D"/>
                 </a:solidFill>
-                <a:latin typeface="Segoe UI"/>
-                <a:cs typeface="Segoe UI"/>
-              </a:rPr>
-              <a:t xml:space="preserve">-intercept is </a:t>
+                <a:latin typeface="Cambria"/>
+                <a:cs typeface="Cambria"/>
+              </a:rPr>
+              <a:t xml:space="preserve">(</a:t>
+            </a:r>
+            <a:r>
+              <a:rPr lang="en-US" sz="1425" dirty="0" i="1">
+                <a:solidFill>
+                  <a:srgbClr val="16171D"/>
+                </a:solidFill>
+                <a:latin typeface="Cambria"/>
+                <a:cs typeface="Cambria"/>
+              </a:rPr>
+              <a:t xml:space="preserve">x</a:t>
             </a:r>
             <a:r>
               <a:rPr lang="en-US" sz="1425" dirty="0">
@@ -21440,7 +21170,17 @@
                 <a:latin typeface="Cambria"/>
                 <a:cs typeface="Cambria"/>
               </a:rPr>
-              <a:t xml:space="preserve">(0, −5)</a:t>
+              <a:t xml:space="preserve">) = −2</a:t>
+            </a:r>
+            <a:r>
+              <a:rPr lang="en-US" sz="1425" dirty="0" i="1">
+                <a:solidFill>
+                  <a:srgbClr val="16171D"/>
+                </a:solidFill>
+                <a:latin typeface="Cambria"/>
+                <a:cs typeface="Cambria"/>
+              </a:rPr>
+              <a:t xml:space="preserve">x</a:t>
             </a:r>
             <a:r>
               <a:rPr lang="en-US" sz="1425" dirty="0">

--- a/IEP/t2-lesson1-transforming-linear-functions-IEP.pptx
+++ b/IEP/t2-lesson1-transforming-linear-functions-IEP.pptx
@@ -2076,7 +2076,7 @@
                 <a:latin typeface="Segoe UI"/>
                 <a:cs typeface="Segoe UI"/>
               </a:rPr>
-              <a:t xml:space="preserve">You do · Try it</a:t>
+              <a:t xml:space="preserve">You do · Try it · ★ Essential</a:t>
             </a:r>
             <a:endParaRPr lang="en-US" sz="1200" dirty="0"/>
           </a:p>
@@ -3088,7 +3088,7 @@
                 <a:latin typeface="Segoe UI"/>
                 <a:cs typeface="Segoe UI"/>
               </a:rPr>
-              <a:t xml:space="preserve">Check it · Step by step</a:t>
+              <a:t xml:space="preserve">Check it · Step by step · ★ Essential</a:t>
             </a:r>
             <a:endParaRPr lang="en-US" sz="1200" dirty="0"/>
           </a:p>
@@ -5668,7 +5668,7 @@
                 <a:latin typeface="Segoe UI"/>
                 <a:cs typeface="Segoe UI"/>
               </a:rPr>
-              <a:t xml:space="preserve">We do · Parallel line</a:t>
+              <a:t xml:space="preserve">We do · Parallel line · ★ Essential</a:t>
             </a:r>
             <a:endParaRPr lang="en-US" sz="1200" dirty="0"/>
           </a:p>
@@ -6601,7 +6601,7 @@
                 <a:latin typeface="Segoe UI"/>
                 <a:cs typeface="Segoe UI"/>
               </a:rPr>
-              <a:t xml:space="preserve">You do · Try it</a:t>
+              <a:t xml:space="preserve">You do · Try it · ★ Essential</a:t>
             </a:r>
             <a:endParaRPr lang="en-US" sz="1200" dirty="0"/>
           </a:p>
@@ -7407,7 +7407,7 @@
                 <a:latin typeface="Segoe UI"/>
                 <a:cs typeface="Segoe UI"/>
               </a:rPr>
-              <a:t xml:space="preserve">Check it · Step by step</a:t>
+              <a:t xml:space="preserve">Check it · Step by step · ★ Essential</a:t>
             </a:r>
             <a:endParaRPr lang="en-US" sz="1200" dirty="0"/>
           </a:p>
@@ -23234,7 +23234,7 @@
                 <a:latin typeface="Segoe UI"/>
                 <a:cs typeface="Segoe UI"/>
               </a:rPr>
-              <a:t xml:space="preserve">I do · Watch me</a:t>
+              <a:t xml:space="preserve">I do · Watch me · ★ Essential</a:t>
             </a:r>
             <a:endParaRPr lang="en-US" sz="1200" dirty="0"/>
           </a:p>
@@ -27457,7 +27457,7 @@
                 <a:latin typeface="Segoe UI"/>
                 <a:cs typeface="Segoe UI"/>
               </a:rPr>
-              <a:t xml:space="preserve">We do · Together</a:t>
+              <a:t xml:space="preserve">We do · Together · ★ Essential</a:t>
             </a:r>
             <a:endParaRPr lang="en-US" sz="1200" dirty="0"/>
           </a:p>
@@ -30713,7 +30713,7 @@
                 <a:latin typeface="Segoe UI"/>
                 <a:cs typeface="Segoe UI"/>
               </a:rPr>
-              <a:t xml:space="preserve">I do · Stretch</a:t>
+              <a:t xml:space="preserve">I do · Stretch · ★ Essential</a:t>
             </a:r>
             <a:endParaRPr lang="en-US" sz="1200" dirty="0"/>
           </a:p>
